--- a/docs/flink-demo-exec-briefing.pptx
+++ b/docs/flink-demo-exec-briefing.pptx
@@ -4749,7 +4749,7 @@
                   <a:srgbClr val="52514E"/>
                 </a:solidFill>
               </a:rPr>
-              <a:t>Six phases — each ended in something reviewable and running</a:t>
+              <a:t>Seven phases — each ended in something reviewable and running</a:t>
             </a:r>
           </a:p>
         </p:txBody>
@@ -4762,8 +4762,8 @@
         </p:nvSpPr>
         <p:spPr>
           <a:xfrm>
-            <a:off x="502920" y="2011680"/>
-            <a:ext cx="1783080" cy="1463040"/>
+            <a:off x="411480" y="2011680"/>
+            <a:ext cx="1536192" cy="1463040"/>
           </a:xfrm>
           <a:prstGeom prst="roundRect">
             <a:avLst/>
@@ -4797,7 +4797,7 @@
           <a:p>
             <a:pPr algn="ctr"/>
             <a:r>
-              <a:rPr sz="1400" b="1">
+              <a:rPr sz="1200" b="1">
                 <a:solidFill>
                   <a:srgbClr val="0B0B0B"/>
                 </a:solidFill>
@@ -4808,7 +4808,7 @@
           <a:p>
             <a:pPr algn="ctr"/>
             <a:r>
-              <a:rPr sz="1200" b="0">
+              <a:rPr sz="1000" b="0">
                 <a:solidFill>
                   <a:srgbClr val="0B0B0B"/>
                 </a:solidFill>
@@ -4819,7 +4819,7 @@
           <a:p>
             <a:pPr algn="ctr"/>
             <a:r>
-              <a:rPr sz="1200" b="0">
+              <a:rPr sz="1000" b="0">
                 <a:solidFill>
                   <a:srgbClr val="0B0B0B"/>
                 </a:solidFill>
@@ -4837,8 +4837,8 @@
         </p:nvSpPr>
         <p:spPr>
           <a:xfrm>
-            <a:off x="2450591" y="2011680"/>
-            <a:ext cx="1783080" cy="1463040"/>
+            <a:off x="2048256" y="2011680"/>
+            <a:ext cx="1536192" cy="1463040"/>
           </a:xfrm>
           <a:prstGeom prst="roundRect">
             <a:avLst/>
@@ -4872,7 +4872,7 @@
           <a:p>
             <a:pPr algn="ctr"/>
             <a:r>
-              <a:rPr sz="1400" b="1">
+              <a:rPr sz="1200" b="1">
                 <a:solidFill>
                   <a:srgbClr val="0B0B0B"/>
                 </a:solidFill>
@@ -4883,7 +4883,7 @@
           <a:p>
             <a:pPr algn="ctr"/>
             <a:r>
-              <a:rPr sz="1200" b="0">
+              <a:rPr sz="1000" b="0">
                 <a:solidFill>
                   <a:srgbClr val="0B0B0B"/>
                 </a:solidFill>
@@ -4894,7 +4894,7 @@
           <a:p>
             <a:pPr algn="ctr"/>
             <a:r>
-              <a:rPr sz="1200" b="0">
+              <a:rPr sz="1000" b="0">
                 <a:solidFill>
                   <a:srgbClr val="0B0B0B"/>
                 </a:solidFill>
@@ -4912,8 +4912,8 @@
         </p:nvSpPr>
         <p:spPr>
           <a:xfrm>
-            <a:off x="4398264" y="2011680"/>
-            <a:ext cx="1783080" cy="1463040"/>
+            <a:off x="3685032" y="2011680"/>
+            <a:ext cx="1536192" cy="1463040"/>
           </a:xfrm>
           <a:prstGeom prst="roundRect">
             <a:avLst/>
@@ -4947,7 +4947,7 @@
           <a:p>
             <a:pPr algn="ctr"/>
             <a:r>
-              <a:rPr sz="1400" b="1">
+              <a:rPr sz="1200" b="1">
                 <a:solidFill>
                   <a:srgbClr val="0B0B0B"/>
                 </a:solidFill>
@@ -4958,7 +4958,7 @@
           <a:p>
             <a:pPr algn="ctr"/>
             <a:r>
-              <a:rPr sz="1200" b="0">
+              <a:rPr sz="1000" b="0">
                 <a:solidFill>
                   <a:srgbClr val="0B0B0B"/>
                 </a:solidFill>
@@ -4969,7 +4969,7 @@
           <a:p>
             <a:pPr algn="ctr"/>
             <a:r>
-              <a:rPr sz="1200" b="0">
+              <a:rPr sz="1000" b="0">
                 <a:solidFill>
                   <a:srgbClr val="0B0B0B"/>
                 </a:solidFill>
@@ -4987,8 +4987,8 @@
         </p:nvSpPr>
         <p:spPr>
           <a:xfrm>
-            <a:off x="6345936" y="2011680"/>
-            <a:ext cx="1783080" cy="1463040"/>
+            <a:off x="5321808" y="2011680"/>
+            <a:ext cx="1536192" cy="1463040"/>
           </a:xfrm>
           <a:prstGeom prst="roundRect">
             <a:avLst/>
@@ -5022,7 +5022,7 @@
           <a:p>
             <a:pPr algn="ctr"/>
             <a:r>
-              <a:rPr sz="1400" b="1">
+              <a:rPr sz="1200" b="1">
                 <a:solidFill>
                   <a:srgbClr val="0B0B0B"/>
                 </a:solidFill>
@@ -5033,23 +5033,23 @@
           <a:p>
             <a:pPr algn="ctr"/>
             <a:r>
-              <a:rPr sz="1200" b="0">
-                <a:solidFill>
-                  <a:srgbClr val="0B0B0B"/>
-                </a:solidFill>
-              </a:rPr>
-              <a:t>14 tests + independent</a:t>
+              <a:rPr sz="1000" b="0">
+                <a:solidFill>
+                  <a:srgbClr val="0B0B0B"/>
+                </a:solidFill>
+              </a:rPr>
+              <a:t>18 tests + indep.</a:t>
             </a:r>
           </a:p>
           <a:p>
             <a:pPr algn="ctr"/>
             <a:r>
-              <a:rPr sz="1200" b="0">
-                <a:solidFill>
-                  <a:srgbClr val="0B0B0B"/>
-                </a:solidFill>
-              </a:rPr>
-              <a:t>validation, all green</a:t>
+              <a:rPr sz="1000" b="0">
+                <a:solidFill>
+                  <a:srgbClr val="0B0B0B"/>
+                </a:solidFill>
+              </a:rPr>
+              <a:t>validation, green</a:t>
             </a:r>
           </a:p>
         </p:txBody>
@@ -5062,8 +5062,8 @@
         </p:nvSpPr>
         <p:spPr>
           <a:xfrm>
-            <a:off x="8293608" y="2011680"/>
-            <a:ext cx="1783080" cy="1463040"/>
+            <a:off x="6958584" y="2011680"/>
+            <a:ext cx="1536192" cy="1463040"/>
           </a:xfrm>
           <a:prstGeom prst="roundRect">
             <a:avLst/>
@@ -5097,7 +5097,7 @@
           <a:p>
             <a:pPr algn="ctr"/>
             <a:r>
-              <a:rPr sz="1400" b="1">
+              <a:rPr sz="1200" b="1">
                 <a:solidFill>
                   <a:srgbClr val="0B0B0B"/>
                 </a:solidFill>
@@ -5108,7 +5108,7 @@
           <a:p>
             <a:pPr algn="ctr"/>
             <a:r>
-              <a:rPr sz="1200" b="0">
+              <a:rPr sz="1000" b="0">
                 <a:solidFill>
                   <a:srgbClr val="0B0B0B"/>
                 </a:solidFill>
@@ -5119,7 +5119,7 @@
           <a:p>
             <a:pPr algn="ctr"/>
             <a:r>
-              <a:rPr sz="1200" b="0">
+              <a:rPr sz="1000" b="0">
                 <a:solidFill>
                   <a:srgbClr val="0B0B0B"/>
                 </a:solidFill>
@@ -5137,8 +5137,83 @@
         </p:nvSpPr>
         <p:spPr>
           <a:xfrm>
-            <a:off x="10241280" y="2011680"/>
-            <a:ext cx="1783080" cy="1463040"/>
+            <a:off x="8595359" y="2011680"/>
+            <a:ext cx="1536192" cy="1463040"/>
+          </a:xfrm>
+          <a:prstGeom prst="roundRect">
+            <a:avLst/>
+          </a:prstGeom>
+          <a:solidFill>
+            <a:srgbClr val="F0EFEC"/>
+          </a:solidFill>
+          <a:ln w="12700">
+            <a:solidFill>
+              <a:srgbClr val="2A78D6"/>
+            </a:solidFill>
+          </a:ln>
+        </p:spPr>
+        <p:style>
+          <a:lnRef idx="1">
+            <a:schemeClr val="accent1"/>
+          </a:lnRef>
+          <a:fillRef idx="3">
+            <a:schemeClr val="accent1"/>
+          </a:fillRef>
+          <a:effectRef idx="2">
+            <a:schemeClr val="accent1"/>
+          </a:effectRef>
+          <a:fontRef idx="minor">
+            <a:schemeClr val="lt1"/>
+          </a:fontRef>
+        </p:style>
+        <p:txBody>
+          <a:bodyPr rtlCol="0" anchor="ctr" wrap="square"/>
+          <a:lstStyle/>
+          <a:p>
+            <a:pPr algn="ctr"/>
+            <a:r>
+              <a:rPr sz="1200" b="1">
+                <a:solidFill>
+                  <a:srgbClr val="0B0B0B"/>
+                </a:solidFill>
+              </a:rPr>
+              <a:t>6. Load tests</a:t>
+            </a:r>
+          </a:p>
+          <a:p>
+            <a:pPr algn="ctr"/>
+            <a:r>
+              <a:rPr sz="1000" b="0">
+                <a:solidFill>
+                  <a:srgbClr val="0B0B0B"/>
+                </a:solidFill>
+              </a:rPr>
+              <a:t>Both perf cases</a:t>
+            </a:r>
+          </a:p>
+          <a:p>
+            <a:pPr algn="ctr"/>
+            <a:r>
+              <a:rPr sz="1000" b="0">
+                <a:solidFill>
+                  <a:srgbClr val="0B0B0B"/>
+                </a:solidFill>
+              </a:rPr>
+              <a:t>passed, measured</a:t>
+            </a:r>
+          </a:p>
+        </p:txBody>
+      </p:sp>
+      <p:sp>
+        <p:nvSpPr>
+          <p:cNvPr id="11" name="Rounded Rectangle 10"/>
+          <p:cNvSpPr/>
+          <p:nvPr/>
+        </p:nvSpPr>
+        <p:spPr>
+          <a:xfrm>
+            <a:off x="10232136" y="2011680"/>
+            <a:ext cx="1536192" cy="1463040"/>
           </a:xfrm>
           <a:prstGeom prst="roundRect">
             <a:avLst/>
@@ -5172,41 +5247,41 @@
           <a:p>
             <a:pPr algn="ctr"/>
             <a:r>
-              <a:rPr sz="1400" b="1">
-                <a:solidFill>
-                  <a:srgbClr val="0B0B0B"/>
-                </a:solidFill>
-              </a:rPr>
-              <a:t>6. Load tests</a:t>
+              <a:rPr sz="1200" b="1">
+                <a:solidFill>
+                  <a:srgbClr val="0B0B0B"/>
+                </a:solidFill>
+              </a:rPr>
+              <a:t>7. Review find</a:t>
             </a:r>
           </a:p>
           <a:p>
             <a:pPr algn="ctr"/>
             <a:r>
-              <a:rPr sz="1200" b="0">
-                <a:solidFill>
-                  <a:srgbClr val="0B0B0B"/>
-                </a:solidFill>
-              </a:rPr>
-              <a:t>Both perf cases</a:t>
+              <a:rPr sz="1000" b="0">
+                <a:solidFill>
+                  <a:srgbClr val="0B0B0B"/>
+                </a:solidFill>
+              </a:rPr>
+              <a:t>Price-storm flaw:</a:t>
             </a:r>
           </a:p>
           <a:p>
             <a:pPr algn="ctr"/>
             <a:r>
-              <a:rPr sz="1200" b="0">
-                <a:solidFill>
-                  <a:srgbClr val="0B0B0B"/>
-                </a:solidFill>
-              </a:rPr>
-              <a:t>passed, measured</a:t>
-            </a:r>
-          </a:p>
-        </p:txBody>
-      </p:sp>
-      <p:sp>
-        <p:nvSpPr>
-          <p:cNvPr id="11" name="TextBox 10"/>
+              <a:rPr sz="1000" b="0">
+                <a:solidFill>
+                  <a:srgbClr val="0B0B0B"/>
+                </a:solidFill>
+              </a:rPr>
+              <a:t>proven, fixed, verified</a:t>
+            </a:r>
+          </a:p>
+        </p:txBody>
+      </p:sp>
+      <p:sp>
+        <p:nvSpPr>
+          <p:cNvPr id="12" name="TextBox 11"/>
           <p:cNvSpPr txBox="1"/>
           <p:nvPr/>
         </p:nvSpPr>
@@ -5262,12 +5337,27 @@
               </a:spcAft>
             </a:pPr>
             <a:r>
+              <a:rPr sz="1700" b="1">
+                <a:solidFill>
+                  <a:srgbClr val="0B0B0B"/>
+                </a:solidFill>
+              </a:rPr>
+              <a:t>• Phase 7 was unplanned: a human review comment predicted the price-storm bottleneck — proven, fixed and re-verified the same day</a:t>
+            </a:r>
+          </a:p>
+          <a:p>
+            <a:pPr>
+              <a:spcAft>
+                <a:spcPts val="1000"/>
+              </a:spcAft>
+            </a:pPr>
+            <a:r>
               <a:rPr sz="1700" b="0">
                 <a:solidFill>
                   <a:srgbClr val="0B0B0B"/>
                 </a:solidFill>
               </a:rPr>
-              <a:t>• The six engineering prompts that drove the build are recorded in the repo (prompts/)</a:t>
+              <a:t>• The seven engineering prompts that drove the build are recorded in the repo (prompts/)</a:t>
             </a:r>
           </a:p>
         </p:txBody>
@@ -5432,7 +5522,7 @@
                   <a:srgbClr val="0B0B0B"/>
                 </a:solidFill>
               </a:rPr>
-              <a:t>• 14 unit tests against the real operators — including a golden dataset with hand-computed expected results</a:t>
+              <a:t>• 18 unit tests against the real operators — including a golden dataset with hand-computed expected results</a:t>
             </a:r>
           </a:p>
           <a:p>
@@ -6206,7 +6296,7 @@
         </p:nvSpPr>
         <p:spPr>
           <a:xfrm>
-            <a:off x="640080" y="4892040"/>
+            <a:off x="640080" y="4800600"/>
             <a:ext cx="10881360" cy="4754880"/>
           </a:xfrm>
           <a:prstGeom prst="rect">
@@ -6222,11 +6312,11 @@
           <a:p>
             <a:pPr>
               <a:spcAft>
-                <a:spcPts val="800"/>
+                <a:spcPts val="600"/>
               </a:spcAft>
             </a:pPr>
             <a:r>
-              <a:rPr sz="1600" b="1">
+              <a:rPr sz="1500" b="1">
                 <a:solidFill>
                   <a:srgbClr val="0B0B0B"/>
                 </a:solidFill>
@@ -6237,16 +6327,31 @@
           <a:p>
             <a:pPr>
               <a:spcAft>
-                <a:spcPts val="800"/>
+                <a:spcPts val="600"/>
               </a:spcAft>
             </a:pPr>
             <a:r>
-              <a:rPr sz="1600" b="0">
+              <a:rPr sz="1500" b="0">
                 <a:solidFill>
                   <a:srgbClr val="0B0B0B"/>
                 </a:solidFill>
               </a:rPr>
               <a:t>• Price magnitude is data, not work: the extreme-price case cannot slow the order path by design</a:t>
+            </a:r>
+          </a:p>
+          <a:p>
+            <a:pPr>
+              <a:spcAft>
+                <a:spcPts val="600"/>
+              </a:spcAft>
+            </a:pPr>
+            <a:r>
+              <a:rPr sz="1500" b="1">
+                <a:solidFill>
+                  <a:srgbClr val="008300"/>
+                </a:solidFill>
+              </a:rPr>
+              <a:t>• Review-driven Case 3: 10,000 price ticks/sec saturated the naive design; conflated re-valuation (config: 250 ms) gives 240x less work, zero backpressure, flat order latency</a:t>
             </a:r>
           </a:p>
         </p:txBody>
@@ -6969,7 +7074,7 @@
                   <a:srgbClr val="2A78D6"/>
                 </a:solidFill>
               </a:rPr>
-              <a:t>6 prompts</a:t>
+              <a:t>7 prompts</a:t>
             </a:r>
           </a:p>
           <a:p>
@@ -6980,7 +7085,7 @@
                   <a:srgbClr val="52514E"/>
                 </a:solidFill>
               </a:rPr>
-              <a:t>drove all six</a:t>
+              <a:t>drove all seven</a:t>
             </a:r>
           </a:p>
           <a:p>
@@ -7044,7 +7149,7 @@
                   <a:srgbClr val="2A78D6"/>
                 </a:solidFill>
               </a:rPr>
-              <a:t>≈ $128</a:t>
+              <a:t>≈ $200</a:t>
             </a:r>
           </a:p>
           <a:p>
@@ -7119,7 +7224,7 @@
                   <a:srgbClr val="2A78D6"/>
                 </a:solidFill>
               </a:rPr>
-              <a:t>6 bugs</a:t>
+              <a:t>6 + 1</a:t>
             </a:r>
           </a:p>
           <a:p>
@@ -7130,7 +7235,7 @@
                   <a:srgbClr val="52514E"/>
                 </a:solidFill>
               </a:rPr>
-              <a:t>found &amp; fixed by</a:t>
+              <a:t>bugs + design flaw</a:t>
             </a:r>
           </a:p>
           <a:p>
@@ -7141,7 +7246,7 @@
                   <a:srgbClr val="52514E"/>
                 </a:solidFill>
               </a:rPr>
-              <a:t>verification, pre-prod</a:t>
+              <a:t>found &amp; fixed pre-prod</a:t>
             </a:r>
           </a:p>
         </p:txBody>

--- a/docs/flink-demo-exec-briefing.pptx
+++ b/docs/flink-demo-exec-briefing.pptx
@@ -134,7 +134,7 @@
               <c:strCache>
                 <c:ptCount val="1"/>
                 <c:pt idx="0">
-                  <c:v>Capacity (records/sec)</c:v>
+                  <c:v>Processed msgs/sec at saturation</c:v>
                 </c:pt>
               </c:strCache>
             </c:strRef>
@@ -150,13 +150,13 @@
               <c:strCache>
                 <c:ptCount val="3"/>
                 <c:pt idx="0">
-                  <c:v>Parallelism 1</c:v>
+                  <c:v>P=2 (2 KPUs)</c:v>
                 </c:pt>
                 <c:pt idx="1">
-                  <c:v>Parallelism 2</c:v>
+                  <c:v>P=4 (4 KPUs)</c:v>
                 </c:pt>
                 <c:pt idx="2">
-                  <c:v>Parallelism 4</c:v>
+                  <c:v>P=8 (8 KPUs)</c:v>
                 </c:pt>
               </c:strCache>
             </c:strRef>
@@ -168,13 +168,13 @@
                 <c:formatCode>General</c:formatCode>
                 <c:ptCount val="3"/>
                 <c:pt idx="0">
-                  <c:v>7000</c:v>
+                  <c:v>16500</c:v>
                 </c:pt>
                 <c:pt idx="1">
-                  <c:v>14300</c:v>
+                  <c:v>52000</c:v>
                 </c:pt>
                 <c:pt idx="2">
-                  <c:v>16800</c:v>
+                  <c:v>97000</c:v>
                 </c:pt>
               </c:numCache>
             </c:numRef>
@@ -4749,7 +4749,7 @@
                   <a:srgbClr val="52514E"/>
                 </a:solidFill>
               </a:rPr>
-              <a:t>Seven phases — each ended in something reviewable and running</a:t>
+              <a:t>Eight phases — each ended in something reviewable and running</a:t>
             </a:r>
           </a:p>
         </p:txBody>
@@ -4762,8 +4762,8 @@
         </p:nvSpPr>
         <p:spPr>
           <a:xfrm>
-            <a:off x="411480" y="2011680"/>
-            <a:ext cx="1536192" cy="1463040"/>
+            <a:off x="365760" y="2011680"/>
+            <a:ext cx="1353312" cy="1463040"/>
           </a:xfrm>
           <a:prstGeom prst="roundRect">
             <a:avLst/>
@@ -4797,7 +4797,7 @@
           <a:p>
             <a:pPr algn="ctr"/>
             <a:r>
-              <a:rPr sz="1200" b="1">
+              <a:rPr sz="1100" b="1">
                 <a:solidFill>
                   <a:srgbClr val="0B0B0B"/>
                 </a:solidFill>
@@ -4808,7 +4808,7 @@
           <a:p>
             <a:pPr algn="ctr"/>
             <a:r>
-              <a:rPr sz="1000" b="0">
+              <a:rPr sz="900" b="0">
                 <a:solidFill>
                   <a:srgbClr val="0B0B0B"/>
                 </a:solidFill>
@@ -4819,7 +4819,7 @@
           <a:p>
             <a:pPr algn="ctr"/>
             <a:r>
-              <a:rPr sz="1000" b="0">
+              <a:rPr sz="900" b="0">
                 <a:solidFill>
                   <a:srgbClr val="0B0B0B"/>
                 </a:solidFill>
@@ -4837,8 +4837,8 @@
         </p:nvSpPr>
         <p:spPr>
           <a:xfrm>
-            <a:off x="2048256" y="2011680"/>
-            <a:ext cx="1536192" cy="1463040"/>
+            <a:off x="1815084" y="2011680"/>
+            <a:ext cx="1353312" cy="1463040"/>
           </a:xfrm>
           <a:prstGeom prst="roundRect">
             <a:avLst/>
@@ -4872,7 +4872,7 @@
           <a:p>
             <a:pPr algn="ctr"/>
             <a:r>
-              <a:rPr sz="1200" b="1">
+              <a:rPr sz="1100" b="1">
                 <a:solidFill>
                   <a:srgbClr val="0B0B0B"/>
                 </a:solidFill>
@@ -4883,7 +4883,7 @@
           <a:p>
             <a:pPr algn="ctr"/>
             <a:r>
-              <a:rPr sz="1000" b="0">
+              <a:rPr sz="900" b="0">
                 <a:solidFill>
                   <a:srgbClr val="0B0B0B"/>
                 </a:solidFill>
@@ -4894,7 +4894,7 @@
           <a:p>
             <a:pPr algn="ctr"/>
             <a:r>
-              <a:rPr sz="1000" b="0">
+              <a:rPr sz="900" b="0">
                 <a:solidFill>
                   <a:srgbClr val="0B0B0B"/>
                 </a:solidFill>
@@ -4912,8 +4912,8 @@
         </p:nvSpPr>
         <p:spPr>
           <a:xfrm>
-            <a:off x="3685032" y="2011680"/>
-            <a:ext cx="1536192" cy="1463040"/>
+            <a:off x="3264408" y="2011680"/>
+            <a:ext cx="1353312" cy="1463040"/>
           </a:xfrm>
           <a:prstGeom prst="roundRect">
             <a:avLst/>
@@ -4947,7 +4947,7 @@
           <a:p>
             <a:pPr algn="ctr"/>
             <a:r>
-              <a:rPr sz="1200" b="1">
+              <a:rPr sz="1100" b="1">
                 <a:solidFill>
                   <a:srgbClr val="0B0B0B"/>
                 </a:solidFill>
@@ -4958,7 +4958,7 @@
           <a:p>
             <a:pPr algn="ctr"/>
             <a:r>
-              <a:rPr sz="1000" b="0">
+              <a:rPr sz="900" b="0">
                 <a:solidFill>
                   <a:srgbClr val="0B0B0B"/>
                 </a:solidFill>
@@ -4969,7 +4969,7 @@
           <a:p>
             <a:pPr algn="ctr"/>
             <a:r>
-              <a:rPr sz="1000" b="0">
+              <a:rPr sz="900" b="0">
                 <a:solidFill>
                   <a:srgbClr val="0B0B0B"/>
                 </a:solidFill>
@@ -4987,8 +4987,8 @@
         </p:nvSpPr>
         <p:spPr>
           <a:xfrm>
-            <a:off x="5321808" y="2011680"/>
-            <a:ext cx="1536192" cy="1463040"/>
+            <a:off x="4713732" y="2011680"/>
+            <a:ext cx="1353312" cy="1463040"/>
           </a:xfrm>
           <a:prstGeom prst="roundRect">
             <a:avLst/>
@@ -5022,7 +5022,7 @@
           <a:p>
             <a:pPr algn="ctr"/>
             <a:r>
-              <a:rPr sz="1200" b="1">
+              <a:rPr sz="1100" b="1">
                 <a:solidFill>
                   <a:srgbClr val="0B0B0B"/>
                 </a:solidFill>
@@ -5033,7 +5033,7 @@
           <a:p>
             <a:pPr algn="ctr"/>
             <a:r>
-              <a:rPr sz="1000" b="0">
+              <a:rPr sz="900" b="0">
                 <a:solidFill>
                   <a:srgbClr val="0B0B0B"/>
                 </a:solidFill>
@@ -5044,7 +5044,7 @@
           <a:p>
             <a:pPr algn="ctr"/>
             <a:r>
-              <a:rPr sz="1000" b="0">
+              <a:rPr sz="900" b="0">
                 <a:solidFill>
                   <a:srgbClr val="0B0B0B"/>
                 </a:solidFill>
@@ -5062,8 +5062,8 @@
         </p:nvSpPr>
         <p:spPr>
           <a:xfrm>
-            <a:off x="6958584" y="2011680"/>
-            <a:ext cx="1536192" cy="1463040"/>
+            <a:off x="6163056" y="2011680"/>
+            <a:ext cx="1353312" cy="1463040"/>
           </a:xfrm>
           <a:prstGeom prst="roundRect">
             <a:avLst/>
@@ -5097,7 +5097,7 @@
           <a:p>
             <a:pPr algn="ctr"/>
             <a:r>
-              <a:rPr sz="1200" b="1">
+              <a:rPr sz="1100" b="1">
                 <a:solidFill>
                   <a:srgbClr val="0B0B0B"/>
                 </a:solidFill>
@@ -5108,7 +5108,7 @@
           <a:p>
             <a:pPr algn="ctr"/>
             <a:r>
-              <a:rPr sz="1000" b="0">
+              <a:rPr sz="900" b="0">
                 <a:solidFill>
                   <a:srgbClr val="0B0B0B"/>
                 </a:solidFill>
@@ -5119,7 +5119,7 @@
           <a:p>
             <a:pPr algn="ctr"/>
             <a:r>
-              <a:rPr sz="1000" b="0">
+              <a:rPr sz="900" b="0">
                 <a:solidFill>
                   <a:srgbClr val="0B0B0B"/>
                 </a:solidFill>
@@ -5137,8 +5137,8 @@
         </p:nvSpPr>
         <p:spPr>
           <a:xfrm>
-            <a:off x="8595359" y="2011680"/>
-            <a:ext cx="1536192" cy="1463040"/>
+            <a:off x="7612379" y="2011680"/>
+            <a:ext cx="1353312" cy="1463040"/>
           </a:xfrm>
           <a:prstGeom prst="roundRect">
             <a:avLst/>
@@ -5172,7 +5172,7 @@
           <a:p>
             <a:pPr algn="ctr"/>
             <a:r>
-              <a:rPr sz="1200" b="1">
+              <a:rPr sz="1100" b="1">
                 <a:solidFill>
                   <a:srgbClr val="0B0B0B"/>
                 </a:solidFill>
@@ -5183,7 +5183,7 @@
           <a:p>
             <a:pPr algn="ctr"/>
             <a:r>
-              <a:rPr sz="1000" b="0">
+              <a:rPr sz="900" b="0">
                 <a:solidFill>
                   <a:srgbClr val="0B0B0B"/>
                 </a:solidFill>
@@ -5194,7 +5194,7 @@
           <a:p>
             <a:pPr algn="ctr"/>
             <a:r>
-              <a:rPr sz="1000" b="0">
+              <a:rPr sz="900" b="0">
                 <a:solidFill>
                   <a:srgbClr val="0B0B0B"/>
                 </a:solidFill>
@@ -5212,8 +5212,8 @@
         </p:nvSpPr>
         <p:spPr>
           <a:xfrm>
-            <a:off x="10232136" y="2011680"/>
-            <a:ext cx="1536192" cy="1463040"/>
+            <a:off x="9061704" y="2011680"/>
+            <a:ext cx="1353312" cy="1463040"/>
           </a:xfrm>
           <a:prstGeom prst="roundRect">
             <a:avLst/>
@@ -5247,7 +5247,7 @@
           <a:p>
             <a:pPr algn="ctr"/>
             <a:r>
-              <a:rPr sz="1200" b="1">
+              <a:rPr sz="1100" b="1">
                 <a:solidFill>
                   <a:srgbClr val="0B0B0B"/>
                 </a:solidFill>
@@ -5258,7 +5258,7 @@
           <a:p>
             <a:pPr algn="ctr"/>
             <a:r>
-              <a:rPr sz="1000" b="0">
+              <a:rPr sz="900" b="0">
                 <a:solidFill>
                   <a:srgbClr val="0B0B0B"/>
                 </a:solidFill>
@@ -5269,7 +5269,7 @@
           <a:p>
             <a:pPr algn="ctr"/>
             <a:r>
-              <a:rPr sz="1000" b="0">
+              <a:rPr sz="900" b="0">
                 <a:solidFill>
                   <a:srgbClr val="0B0B0B"/>
                 </a:solidFill>
@@ -5281,7 +5281,82 @@
       </p:sp>
       <p:sp>
         <p:nvSpPr>
-          <p:cNvPr id="12" name="TextBox 11"/>
+          <p:cNvPr id="12" name="Rounded Rectangle 11"/>
+          <p:cNvSpPr/>
+          <p:nvPr/>
+        </p:nvSpPr>
+        <p:spPr>
+          <a:xfrm>
+            <a:off x="10511028" y="2011680"/>
+            <a:ext cx="1353312" cy="1463040"/>
+          </a:xfrm>
+          <a:prstGeom prst="roundRect">
+            <a:avLst/>
+          </a:prstGeom>
+          <a:solidFill>
+            <a:srgbClr val="FFFFFF"/>
+          </a:solidFill>
+          <a:ln w="12700">
+            <a:solidFill>
+              <a:srgbClr val="2A78D6"/>
+            </a:solidFill>
+          </a:ln>
+        </p:spPr>
+        <p:style>
+          <a:lnRef idx="1">
+            <a:schemeClr val="accent1"/>
+          </a:lnRef>
+          <a:fillRef idx="3">
+            <a:schemeClr val="accent1"/>
+          </a:fillRef>
+          <a:effectRef idx="2">
+            <a:schemeClr val="accent1"/>
+          </a:effectRef>
+          <a:fontRef idx="minor">
+            <a:schemeClr val="lt1"/>
+          </a:fontRef>
+        </p:style>
+        <p:txBody>
+          <a:bodyPr rtlCol="0" anchor="ctr" wrap="square"/>
+          <a:lstStyle/>
+          <a:p>
+            <a:pPr algn="ctr"/>
+            <a:r>
+              <a:rPr sz="1100" b="1">
+                <a:solidFill>
+                  <a:srgbClr val="0B0B0B"/>
+                </a:solidFill>
+              </a:rPr>
+              <a:t>8. AWS proof</a:t>
+            </a:r>
+          </a:p>
+          <a:p>
+            <a:pPr algn="ctr"/>
+            <a:r>
+              <a:rPr sz="900" b="0">
+                <a:solidFill>
+                  <a:srgbClr val="0B0B0B"/>
+                </a:solidFill>
+              </a:rPr>
+              <a:t>Deployed, all tests</a:t>
+            </a:r>
+          </a:p>
+          <a:p>
+            <a:pPr algn="ctr"/>
+            <a:r>
+              <a:rPr sz="900" b="0">
+                <a:solidFill>
+                  <a:srgbClr val="0B0B0B"/>
+                </a:solidFill>
+              </a:rPr>
+              <a:t>green, ladder measured</a:t>
+            </a:r>
+          </a:p>
+        </p:txBody>
+      </p:sp>
+      <p:sp>
+        <p:nvSpPr>
+          <p:cNvPr id="13" name="TextBox 12"/>
           <p:cNvSpPr txBox="1"/>
           <p:nvPr/>
         </p:nvSpPr>
@@ -6478,7 +6553,7 @@
                   <a:srgbClr val="52514E"/>
                 </a:solidFill>
               </a:rPr>
-              <a:t>Measured capacity at saturation (backlog catch-up)</a:t>
+              <a:t>Measured on AWS under sustained overload (Managed Flink KPUs)</a:t>
             </a:r>
           </a:p>
         </p:txBody>
@@ -6509,7 +6584,7 @@
         </p:nvSpPr>
         <p:spPr>
           <a:xfrm>
-            <a:off x="6949440" y="2194560"/>
+            <a:off x="6949440" y="2011680"/>
             <a:ext cx="4846320" cy="4754880"/>
           </a:xfrm>
           <a:prstGeom prst="rect">
@@ -6525,61 +6600,76 @@
           <a:p>
             <a:pPr>
               <a:spcAft>
-                <a:spcPts val="1200"/>
+                <a:spcPts val="1000"/>
               </a:spcAft>
             </a:pPr>
             <a:r>
-              <a:rPr sz="1600" b="1">
+              <a:rPr sz="1500" b="1">
                 <a:solidFill>
                   <a:srgbClr val="008300"/>
                 </a:solidFill>
               </a:rPr>
-              <a:t>• 1 → 2: exactly 2.0× — linear</a:t>
+              <a:t>• Each doubling of parallelism ~doubles throughput — one Terraform variable, zero job restarts</a:t>
             </a:r>
           </a:p>
           <a:p>
             <a:pPr>
               <a:spcAft>
-                <a:spcPts val="1200"/>
+                <a:spcPts val="1000"/>
               </a:spcAft>
             </a:pPr>
             <a:r>
-              <a:rPr sz="1600" b="0">
-                <a:solidFill>
-                  <a:srgbClr val="C98500"/>
-                </a:solidFill>
-              </a:rPr>
-              <a:t>• 2 → 4: limited by the 8-core laptop (28 tasks + Kafka + monitoring on one machine), not the pipeline</a:t>
+              <a:rPr sz="1500" b="0">
+                <a:solidFill>
+                  <a:srgbClr val="0B0B0B"/>
+                </a:solidFill>
+              </a:rPr>
+              <a:t>• Capacity model: ~12k msgs/sec per KPU (~$0.12/hr each)</a:t>
             </a:r>
           </a:p>
           <a:p>
             <a:pPr>
               <a:spcAft>
-                <a:spcPts val="1200"/>
+                <a:spcPts val="1000"/>
               </a:spcAft>
             </a:pPr>
             <a:r>
-              <a:rPr sz="1600" b="0">
-                <a:solidFill>
-                  <a:srgbClr val="0B0B0B"/>
-                </a:solidFill>
-              </a:rPr>
-              <a:t>• Rescaling = one config value; no rebuild, no code change</a:t>
+              <a:rPr sz="1500" b="0">
+                <a:solidFill>
+                  <a:srgbClr val="0B0B0B"/>
+                </a:solidFill>
+              </a:rPr>
+              <a:t>• The 110k msgs/sec stress load = a ~P=10 dial setting</a:t>
             </a:r>
           </a:p>
           <a:p>
             <a:pPr>
               <a:spcAft>
-                <a:spcPts val="1200"/>
+                <a:spcPts val="1000"/>
               </a:spcAft>
             </a:pPr>
             <a:r>
-              <a:rPr sz="1600" b="0">
-                <a:solidFill>
-                  <a:srgbClr val="0B0B0B"/>
-                </a:solidFill>
-              </a:rPr>
-              <a:t>• AWS (dedicated compute per unit) is the venue to demonstrate 4-way+ linearity</a:t>
+              <a:rPr sz="1500" b="0">
+                <a:solidFill>
+                  <a:srgbClr val="0B0B0B"/>
+                </a:solidFill>
+              </a:rPr>
+              <a:t>• Next 3-5x identified: binary serialization (Avro) instead of JSON — before buying more KPUs</a:t>
+            </a:r>
+          </a:p>
+          <a:p>
+            <a:pPr>
+              <a:spcAft>
+                <a:spcPts val="1000"/>
+              </a:spcAft>
+            </a:pPr>
+            <a:r>
+              <a:rPr sz="1500" b="0">
+                <a:solidFill>
+                  <a:srgbClr val="52514E"/>
+                </a:solidFill>
+              </a:rPr>
+              <a:t>• Laptop result matched: P=1-&gt;2 exactly 2.0x</a:t>
             </a:r>
           </a:p>
         </p:txBody>
@@ -6816,10 +6906,10 @@
             <a:r>
               <a:rPr sz="1800" b="1">
                 <a:solidFill>
-                  <a:srgbClr val="C98500"/>
-                </a:solidFill>
-              </a:rPr>
-              <a:t>• Status: validated and ready — awaiting credentials/approval to apply</a:t>
+                  <a:srgbClr val="008300"/>
+                </a:solidFill>
+              </a:rPr>
+              <a:t>• Status: DEPLOYED and load-tested on AWS — all cases green, scaling ladder measured, then torn down cleanly</a:t>
             </a:r>
           </a:p>
         </p:txBody>
@@ -7074,7 +7164,7 @@
                   <a:srgbClr val="2A78D6"/>
                 </a:solidFill>
               </a:rPr>
-              <a:t>7 prompts</a:t>
+              <a:t>8 prompts</a:t>
             </a:r>
           </a:p>
           <a:p>
@@ -7085,7 +7175,7 @@
                   <a:srgbClr val="52514E"/>
                 </a:solidFill>
               </a:rPr>
-              <a:t>drove all seven</a:t>
+              <a:t>drove all eight</a:t>
             </a:r>
           </a:p>
           <a:p>
@@ -7149,7 +7239,7 @@
                   <a:srgbClr val="2A78D6"/>
                 </a:solidFill>
               </a:rPr>
-              <a:t>≈ $200</a:t>
+              <a:t>≈ $430</a:t>
             </a:r>
           </a:p>
           <a:p>
@@ -7224,7 +7314,7 @@
                   <a:srgbClr val="2A78D6"/>
                 </a:solidFill>
               </a:rPr>
-              <a:t>6 + 1</a:t>
+              <a:t>15 finds</a:t>
             </a:r>
           </a:p>
           <a:p>
@@ -7235,7 +7325,7 @@
                   <a:srgbClr val="52514E"/>
                 </a:solidFill>
               </a:rPr>
-              <a:t>bugs + design flaw</a:t>
+              <a:t>6 bugs, 1 design flaw,</a:t>
             </a:r>
           </a:p>
           <a:p>
@@ -7246,7 +7336,7 @@
                   <a:srgbClr val="52514E"/>
                 </a:solidFill>
               </a:rPr>
-              <a:t>found &amp; fixed pre-prod</a:t>
+              <a:t>8 deploy gotchas — pre-prod</a:t>
             </a:r>
           </a:p>
         </p:txBody>

--- a/docs/flink-demo-exec-briefing.pptx
+++ b/docs/flink-demo-exec-briefing.pptx
@@ -15,6 +15,7 @@
     <p:sldId id="263" r:id="rId14"/>
     <p:sldId id="264" r:id="rId15"/>
     <p:sldId id="265" r:id="rId16"/>
+    <p:sldId id="266" r:id="rId17"/>
   </p:sldIdLst>
   <p:sldSz cx="12191695" cy="6858000" type="screen4x3"/>
   <p:notesSz cx="6858000" cy="9144000"/>
@@ -3392,6 +3393,501 @@
 </file>
 
 <file path=ppt/slides/slide10.xml><?xml version="1.0" encoding="utf-8"?>
+<p:sld xmlns:a="http://schemas.openxmlformats.org/drawingml/2006/main" xmlns:p="http://schemas.openxmlformats.org/presentationml/2006/main" xmlns:r="http://schemas.openxmlformats.org/officeDocument/2006/relationships">
+  <p:cSld>
+    <p:spTree>
+      <p:nvGrpSpPr>
+        <p:cNvPr id="1" name=""/>
+        <p:cNvGrpSpPr/>
+        <p:nvPr/>
+      </p:nvGrpSpPr>
+      <p:grpSpPr/>
+      <p:sp>
+        <p:nvSpPr>
+          <p:cNvPr id="2" name="TextBox 1"/>
+          <p:cNvSpPr txBox="1"/>
+          <p:nvPr/>
+        </p:nvSpPr>
+        <p:spPr>
+          <a:xfrm>
+            <a:off x="548640" y="320040"/>
+            <a:ext cx="11064240" cy="914400"/>
+          </a:xfrm>
+          <a:prstGeom prst="rect">
+            <a:avLst/>
+          </a:prstGeom>
+          <a:noFill/>
+        </p:spPr>
+        <p:txBody>
+          <a:bodyPr wrap="square">
+            <a:spAutoFit/>
+          </a:bodyPr>
+          <a:lstStyle/>
+          <a:p>
+            <a:r>
+              <a:rPr sz="3000" b="1">
+                <a:solidFill>
+                  <a:srgbClr val="0B0B0B"/>
+                </a:solidFill>
+              </a:rPr>
+              <a:t>What it took to build</a:t>
+            </a:r>
+          </a:p>
+        </p:txBody>
+      </p:sp>
+      <p:sp>
+        <p:nvSpPr>
+          <p:cNvPr id="3" name="Rectangle 2"/>
+          <p:cNvSpPr/>
+          <p:nvPr/>
+        </p:nvSpPr>
+        <p:spPr>
+          <a:xfrm>
+            <a:off x="594360" y="1051560"/>
+            <a:ext cx="2011680" cy="50800"/>
+          </a:xfrm>
+          <a:prstGeom prst="rect">
+            <a:avLst/>
+          </a:prstGeom>
+          <a:solidFill>
+            <a:srgbClr val="2A78D6"/>
+          </a:solidFill>
+          <a:ln>
+            <a:noFill/>
+          </a:ln>
+        </p:spPr>
+        <p:style>
+          <a:lnRef idx="1">
+            <a:schemeClr val="accent1"/>
+          </a:lnRef>
+          <a:fillRef idx="3">
+            <a:schemeClr val="accent1"/>
+          </a:fillRef>
+          <a:effectRef idx="2">
+            <a:schemeClr val="accent1"/>
+          </a:effectRef>
+          <a:fontRef idx="minor">
+            <a:schemeClr val="lt1"/>
+          </a:fontRef>
+        </p:style>
+        <p:txBody>
+          <a:bodyPr rtlCol="0" anchor="ctr"/>
+          <a:lstStyle/>
+          <a:p>
+            <a:pPr algn="ctr"/>
+          </a:p>
+        </p:txBody>
+      </p:sp>
+      <p:sp>
+        <p:nvSpPr>
+          <p:cNvPr id="4" name="TextBox 3"/>
+          <p:cNvSpPr txBox="1"/>
+          <p:nvPr/>
+        </p:nvSpPr>
+        <p:spPr>
+          <a:xfrm>
+            <a:off x="548640" y="1143000"/>
+            <a:ext cx="11064240" cy="457200"/>
+          </a:xfrm>
+          <a:prstGeom prst="rect">
+            <a:avLst/>
+          </a:prstGeom>
+          <a:noFill/>
+        </p:spPr>
+        <p:txBody>
+          <a:bodyPr wrap="square">
+            <a:spAutoFit/>
+          </a:bodyPr>
+          <a:lstStyle/>
+          <a:p>
+            <a:r>
+              <a:rPr sz="1500">
+                <a:solidFill>
+                  <a:srgbClr val="52514E"/>
+                </a:solidFill>
+              </a:rPr>
+              <a:t>AI-assisted engineering with review gates</a:t>
+            </a:r>
+          </a:p>
+        </p:txBody>
+      </p:sp>
+      <p:sp>
+        <p:nvSpPr>
+          <p:cNvPr id="5" name="Rounded Rectangle 4"/>
+          <p:cNvSpPr/>
+          <p:nvPr/>
+        </p:nvSpPr>
+        <p:spPr>
+          <a:xfrm>
+            <a:off x="640080" y="1920240"/>
+            <a:ext cx="2560320" cy="1828800"/>
+          </a:xfrm>
+          <a:prstGeom prst="roundRect">
+            <a:avLst/>
+          </a:prstGeom>
+          <a:solidFill>
+            <a:srgbClr val="F0EFEC"/>
+          </a:solidFill>
+          <a:ln w="12700">
+            <a:solidFill>
+              <a:srgbClr val="2A78D6"/>
+            </a:solidFill>
+          </a:ln>
+        </p:spPr>
+        <p:style>
+          <a:lnRef idx="1">
+            <a:schemeClr val="accent1"/>
+          </a:lnRef>
+          <a:fillRef idx="3">
+            <a:schemeClr val="accent1"/>
+          </a:fillRef>
+          <a:effectRef idx="2">
+            <a:schemeClr val="accent1"/>
+          </a:effectRef>
+          <a:fontRef idx="minor">
+            <a:schemeClr val="lt1"/>
+          </a:fontRef>
+        </p:style>
+        <p:txBody>
+          <a:bodyPr rtlCol="0" anchor="ctr"/>
+          <a:lstStyle/>
+          <a:p>
+            <a:pPr algn="ctr"/>
+            <a:r>
+              <a:rPr sz="3400" b="1">
+                <a:solidFill>
+                  <a:srgbClr val="2A78D6"/>
+                </a:solidFill>
+              </a:rPr>
+              <a:t>1 day</a:t>
+            </a:r>
+          </a:p>
+          <a:p>
+            <a:pPr algn="ctr"/>
+            <a:r>
+              <a:rPr sz="1300">
+                <a:solidFill>
+                  <a:srgbClr val="52514E"/>
+                </a:solidFill>
+              </a:rPr>
+              <a:t>requirements to</a:t>
+            </a:r>
+          </a:p>
+          <a:p>
+            <a:pPr algn="ctr"/>
+            <a:r>
+              <a:rPr sz="1300">
+                <a:solidFill>
+                  <a:srgbClr val="52514E"/>
+                </a:solidFill>
+              </a:rPr>
+              <a:t>load-tested system</a:t>
+            </a:r>
+          </a:p>
+        </p:txBody>
+      </p:sp>
+      <p:sp>
+        <p:nvSpPr>
+          <p:cNvPr id="6" name="Rounded Rectangle 5"/>
+          <p:cNvSpPr/>
+          <p:nvPr/>
+        </p:nvSpPr>
+        <p:spPr>
+          <a:xfrm>
+            <a:off x="3474720" y="1920240"/>
+            <a:ext cx="2560320" cy="1828800"/>
+          </a:xfrm>
+          <a:prstGeom prst="roundRect">
+            <a:avLst/>
+          </a:prstGeom>
+          <a:solidFill>
+            <a:srgbClr val="F0EFEC"/>
+          </a:solidFill>
+          <a:ln w="12700">
+            <a:solidFill>
+              <a:srgbClr val="2A78D6"/>
+            </a:solidFill>
+          </a:ln>
+        </p:spPr>
+        <p:style>
+          <a:lnRef idx="1">
+            <a:schemeClr val="accent1"/>
+          </a:lnRef>
+          <a:fillRef idx="3">
+            <a:schemeClr val="accent1"/>
+          </a:fillRef>
+          <a:effectRef idx="2">
+            <a:schemeClr val="accent1"/>
+          </a:effectRef>
+          <a:fontRef idx="minor">
+            <a:schemeClr val="lt1"/>
+          </a:fontRef>
+        </p:style>
+        <p:txBody>
+          <a:bodyPr rtlCol="0" anchor="ctr"/>
+          <a:lstStyle/>
+          <a:p>
+            <a:pPr algn="ctr"/>
+            <a:r>
+              <a:rPr sz="3400" b="1">
+                <a:solidFill>
+                  <a:srgbClr val="2A78D6"/>
+                </a:solidFill>
+              </a:rPr>
+              <a:t>8 prompts</a:t>
+            </a:r>
+          </a:p>
+          <a:p>
+            <a:pPr algn="ctr"/>
+            <a:r>
+              <a:rPr sz="1300">
+                <a:solidFill>
+                  <a:srgbClr val="52514E"/>
+                </a:solidFill>
+              </a:rPr>
+              <a:t>drove all eight</a:t>
+            </a:r>
+          </a:p>
+          <a:p>
+            <a:pPr algn="ctr"/>
+            <a:r>
+              <a:rPr sz="1300">
+                <a:solidFill>
+                  <a:srgbClr val="52514E"/>
+                </a:solidFill>
+              </a:rPr>
+              <a:t>phases of work</a:t>
+            </a:r>
+          </a:p>
+        </p:txBody>
+      </p:sp>
+      <p:sp>
+        <p:nvSpPr>
+          <p:cNvPr id="7" name="Rounded Rectangle 6"/>
+          <p:cNvSpPr/>
+          <p:nvPr/>
+        </p:nvSpPr>
+        <p:spPr>
+          <a:xfrm>
+            <a:off x="6309360" y="1920240"/>
+            <a:ext cx="2560320" cy="1828800"/>
+          </a:xfrm>
+          <a:prstGeom prst="roundRect">
+            <a:avLst/>
+          </a:prstGeom>
+          <a:solidFill>
+            <a:srgbClr val="F0EFEC"/>
+          </a:solidFill>
+          <a:ln w="12700">
+            <a:solidFill>
+              <a:srgbClr val="2A78D6"/>
+            </a:solidFill>
+          </a:ln>
+        </p:spPr>
+        <p:style>
+          <a:lnRef idx="1">
+            <a:schemeClr val="accent1"/>
+          </a:lnRef>
+          <a:fillRef idx="3">
+            <a:schemeClr val="accent1"/>
+          </a:fillRef>
+          <a:effectRef idx="2">
+            <a:schemeClr val="accent1"/>
+          </a:effectRef>
+          <a:fontRef idx="minor">
+            <a:schemeClr val="lt1"/>
+          </a:fontRef>
+        </p:style>
+        <p:txBody>
+          <a:bodyPr rtlCol="0" anchor="ctr"/>
+          <a:lstStyle/>
+          <a:p>
+            <a:pPr algn="ctr"/>
+            <a:r>
+              <a:rPr sz="3400" b="1">
+                <a:solidFill>
+                  <a:srgbClr val="2A78D6"/>
+                </a:solidFill>
+              </a:rPr>
+              <a:t>≈ $430</a:t>
+            </a:r>
+          </a:p>
+          <a:p>
+            <a:pPr algn="ctr"/>
+            <a:r>
+              <a:rPr sz="1300">
+                <a:solidFill>
+                  <a:srgbClr val="52514E"/>
+                </a:solidFill>
+              </a:rPr>
+              <a:t>metered AI compute</a:t>
+            </a:r>
+          </a:p>
+          <a:p>
+            <a:pPr algn="ctr"/>
+            <a:r>
+              <a:rPr sz="1300">
+                <a:solidFill>
+                  <a:srgbClr val="52514E"/>
+                </a:solidFill>
+              </a:rPr>
+              <a:t>(included in subscription)</a:t>
+            </a:r>
+          </a:p>
+        </p:txBody>
+      </p:sp>
+      <p:sp>
+        <p:nvSpPr>
+          <p:cNvPr id="8" name="Rounded Rectangle 7"/>
+          <p:cNvSpPr/>
+          <p:nvPr/>
+        </p:nvSpPr>
+        <p:spPr>
+          <a:xfrm>
+            <a:off x="9144000" y="1920240"/>
+            <a:ext cx="2560320" cy="1828800"/>
+          </a:xfrm>
+          <a:prstGeom prst="roundRect">
+            <a:avLst/>
+          </a:prstGeom>
+          <a:solidFill>
+            <a:srgbClr val="F0EFEC"/>
+          </a:solidFill>
+          <a:ln w="12700">
+            <a:solidFill>
+              <a:srgbClr val="2A78D6"/>
+            </a:solidFill>
+          </a:ln>
+        </p:spPr>
+        <p:style>
+          <a:lnRef idx="1">
+            <a:schemeClr val="accent1"/>
+          </a:lnRef>
+          <a:fillRef idx="3">
+            <a:schemeClr val="accent1"/>
+          </a:fillRef>
+          <a:effectRef idx="2">
+            <a:schemeClr val="accent1"/>
+          </a:effectRef>
+          <a:fontRef idx="minor">
+            <a:schemeClr val="lt1"/>
+          </a:fontRef>
+        </p:style>
+        <p:txBody>
+          <a:bodyPr rtlCol="0" anchor="ctr"/>
+          <a:lstStyle/>
+          <a:p>
+            <a:pPr algn="ctr"/>
+            <a:r>
+              <a:rPr sz="3400" b="1">
+                <a:solidFill>
+                  <a:srgbClr val="2A78D6"/>
+                </a:solidFill>
+              </a:rPr>
+              <a:t>15 finds</a:t>
+            </a:r>
+          </a:p>
+          <a:p>
+            <a:pPr algn="ctr"/>
+            <a:r>
+              <a:rPr sz="1300">
+                <a:solidFill>
+                  <a:srgbClr val="52514E"/>
+                </a:solidFill>
+              </a:rPr>
+              <a:t>6 bugs, 1 design flaw,</a:t>
+            </a:r>
+          </a:p>
+          <a:p>
+            <a:pPr algn="ctr"/>
+            <a:r>
+              <a:rPr sz="1300">
+                <a:solidFill>
+                  <a:srgbClr val="52514E"/>
+                </a:solidFill>
+              </a:rPr>
+              <a:t>8 deploy gotchas — pre-prod</a:t>
+            </a:r>
+          </a:p>
+        </p:txBody>
+      </p:sp>
+      <p:sp>
+        <p:nvSpPr>
+          <p:cNvPr id="9" name="TextBox 8"/>
+          <p:cNvSpPr txBox="1"/>
+          <p:nvPr/>
+        </p:nvSpPr>
+        <p:spPr>
+          <a:xfrm>
+            <a:off x="640080" y="4297680"/>
+            <a:ext cx="10881360" cy="4754880"/>
+          </a:xfrm>
+          <a:prstGeom prst="rect">
+            <a:avLst/>
+          </a:prstGeom>
+          <a:noFill/>
+        </p:spPr>
+        <p:txBody>
+          <a:bodyPr wrap="square">
+            <a:spAutoFit/>
+          </a:bodyPr>
+          <a:lstStyle/>
+          <a:p>
+            <a:pPr>
+              <a:spcAft>
+                <a:spcPts val="1000"/>
+              </a:spcAft>
+            </a:pPr>
+            <a:r>
+              <a:rPr sz="1700" b="1">
+                <a:solidFill>
+                  <a:srgbClr val="0B0B0B"/>
+                </a:solidFill>
+              </a:rPr>
+              <a:t>• Quality came from the process: plan first, review each outcome, make the system prove itself</a:t>
+            </a:r>
+          </a:p>
+          <a:p>
+            <a:pPr>
+              <a:spcAft>
+                <a:spcPts val="1000"/>
+              </a:spcAft>
+            </a:pPr>
+            <a:r>
+              <a:rPr sz="1700" b="0">
+                <a:solidFill>
+                  <a:srgbClr val="0B0B0B"/>
+                </a:solidFill>
+              </a:rPr>
+              <a:t>• Bugs caught included the kind that bite in production: dependency clashes, silent metric mismatches, replay semantics</a:t>
+            </a:r>
+          </a:p>
+          <a:p>
+            <a:pPr>
+              <a:spcAft>
+                <a:spcPts val="1000"/>
+              </a:spcAft>
+            </a:pPr>
+            <a:r>
+              <a:rPr sz="1700" b="0">
+                <a:solidFill>
+                  <a:srgbClr val="0B0B0B"/>
+                </a:solidFill>
+              </a:rPr>
+              <a:t>• Every prompt, decision, and result is recorded in the repository — fully auditable</a:t>
+            </a:r>
+          </a:p>
+        </p:txBody>
+      </p:sp>
+    </p:spTree>
+  </p:cSld>
+  <p:clrMapOvr>
+    <a:masterClrMapping/>
+  </p:clrMapOvr>
+</p:sld>
+</file>
+
+<file path=ppt/slides/slide11.xml><?xml version="1.0" encoding="utf-8"?>
 <p:sld xmlns:a="http://schemas.openxmlformats.org/drawingml/2006/main" xmlns:p="http://schemas.openxmlformats.org/presentationml/2006/main" xmlns:r="http://schemas.openxmlformats.org/officeDocument/2006/relationships">
   <p:cSld>
     <p:spTree>
@@ -6720,7 +7216,7 @@
                   <a:srgbClr val="0B0B0B"/>
                 </a:solidFill>
               </a:rPr>
-              <a:t>Path to production — AWS ready today</a:t>
+              <a:t>The ladder, as measured</a:t>
             </a:r>
           </a:p>
         </p:txBody>
@@ -6796,124 +7292,59 @@
                   <a:srgbClr val="52514E"/>
                 </a:solidFill>
               </a:rPr>
-              <a:t>Full infrastructure-as-code, validated; one command to deploy</a:t>
-            </a:r>
-          </a:p>
-        </p:txBody>
-      </p:sp>
-      <p:sp>
-        <p:nvSpPr>
-          <p:cNvPr id="5" name="TextBox 4"/>
-          <p:cNvSpPr txBox="1"/>
+              <a:t>CloudWatch, per-subtask throughput and saturation — AWS, Managed Flink</a:t>
+            </a:r>
+          </a:p>
+        </p:txBody>
+      </p:sp>
+      <p:pic>
+        <p:nvPicPr>
+          <p:cNvPr id="5" name="Picture 4" descr="aws-ladder-throughput.png"/>
+          <p:cNvPicPr>
+            <a:picLocks noChangeAspect="1"/>
+          </p:cNvPicPr>
           <p:nvPr/>
-        </p:nvSpPr>
-        <p:spPr>
-          <a:xfrm>
-            <a:off x="640080" y="1737360"/>
-            <a:ext cx="10881360" cy="4754880"/>
+        </p:nvPicPr>
+        <p:blipFill>
+          <a:blip r:embed="rId2"/>
+          <a:stretch>
+            <a:fillRect/>
+          </a:stretch>
+        </p:blipFill>
+        <p:spPr>
+          <a:xfrm>
+            <a:off x="457200" y="1554480"/>
+            <a:ext cx="11247120" cy="2468880"/>
           </a:xfrm>
           <a:prstGeom prst="rect">
             <a:avLst/>
           </a:prstGeom>
-          <a:noFill/>
-        </p:spPr>
-        <p:txBody>
-          <a:bodyPr wrap="square">
-            <a:spAutoFit/>
-          </a:bodyPr>
-          <a:lstStyle/>
-          <a:p>
-            <a:pPr>
-              <a:spcAft>
-                <a:spcPts val="1200"/>
-              </a:spcAft>
-            </a:pPr>
-            <a:r>
-              <a:rPr sz="1800" b="0">
-                <a:solidFill>
-                  <a:srgbClr val="0B0B0B"/>
-                </a:solidFill>
-              </a:rPr>
-              <a:t>• Terraform stack complete: MSK Serverless (Kafka) + Amazon Managed Service for Apache Flink + generator on Fargate + CloudWatch dashboard</a:t>
-            </a:r>
-          </a:p>
-          <a:p>
-            <a:pPr>
-              <a:spcAft>
-                <a:spcPts val="1200"/>
-              </a:spcAft>
-            </a:pPr>
-            <a:r>
-              <a:rPr sz="1800" b="1">
-                <a:solidFill>
-                  <a:srgbClr val="0B0B0B"/>
-                </a:solidFill>
-              </a:rPr>
-              <a:t>• The exact same application jar runs on AWS — every environment difference is configuration</a:t>
-            </a:r>
-          </a:p>
-          <a:p>
-            <a:pPr>
-              <a:spcAft>
-                <a:spcPts val="1200"/>
-              </a:spcAft>
-            </a:pPr>
-            <a:r>
-              <a:rPr sz="1800" b="0">
-                <a:solidFill>
-                  <a:srgbClr val="0B0B0B"/>
-                </a:solidFill>
-              </a:rPr>
-              <a:t>• Security by default: private VPC, IAM auth to Kafka, least-privilege roles</a:t>
-            </a:r>
-          </a:p>
-          <a:p>
-            <a:pPr>
-              <a:spcAft>
-                <a:spcPts val="1200"/>
-              </a:spcAft>
-            </a:pPr>
-            <a:r>
-              <a:rPr sz="1800" b="0">
-                <a:solidFill>
-                  <a:srgbClr val="0B0B0B"/>
-                </a:solidFill>
-              </a:rPr>
-              <a:t>• Operations runbook: deploy, in-place code update, config-only rescale, teardown</a:t>
-            </a:r>
-          </a:p>
-          <a:p>
-            <a:pPr>
-              <a:spcAft>
-                <a:spcPts val="1200"/>
-              </a:spcAft>
-            </a:pPr>
-            <a:r>
-              <a:rPr sz="1800" b="0">
-                <a:solidFill>
-                  <a:srgbClr val="0B0B0B"/>
-                </a:solidFill>
-              </a:rPr>
-              <a:t>• Demo cost ≈ $1/hour while running; destroyed when not in use</a:t>
-            </a:r>
-          </a:p>
-          <a:p>
-            <a:pPr>
-              <a:spcAft>
-                <a:spcPts val="1200"/>
-              </a:spcAft>
-            </a:pPr>
-            <a:r>
-              <a:rPr sz="1800" b="1">
-                <a:solidFill>
-                  <a:srgbClr val="008300"/>
-                </a:solidFill>
-              </a:rPr>
-              <a:t>• Status: DEPLOYED and load-tested on AWS — all cases green, scaling ladder measured, then torn down cleanly</a:t>
-            </a:r>
-          </a:p>
-        </p:txBody>
-      </p:sp>
+        </p:spPr>
+      </p:pic>
+      <p:pic>
+        <p:nvPicPr>
+          <p:cNvPr id="6" name="Picture 5" descr="aws-busy-backpressure.png"/>
+          <p:cNvPicPr>
+            <a:picLocks noChangeAspect="1"/>
+          </p:cNvPicPr>
+          <p:nvPr/>
+        </p:nvPicPr>
+        <p:blipFill>
+          <a:blip r:embed="rId3"/>
+          <a:stretch>
+            <a:fillRect/>
+          </a:stretch>
+        </p:blipFill>
+        <p:spPr>
+          <a:xfrm>
+            <a:off x="457200" y="4114800"/>
+            <a:ext cx="11247120" cy="2468880"/>
+          </a:xfrm>
+          <a:prstGeom prst="rect">
+            <a:avLst/>
+          </a:prstGeom>
+        </p:spPr>
+      </p:pic>
     </p:spTree>
   </p:cSld>
   <p:clrMapOvr>
@@ -6960,7 +7391,7 @@
                   <a:srgbClr val="0B0B0B"/>
                 </a:solidFill>
               </a:rPr>
-              <a:t>What it took to build</a:t>
+              <a:t>Path to production — AWS ready today</a:t>
             </a:r>
           </a:p>
         </p:txBody>
@@ -7036,320 +7467,20 @@
                   <a:srgbClr val="52514E"/>
                 </a:solidFill>
               </a:rPr>
-              <a:t>AI-assisted engineering with review gates</a:t>
-            </a:r>
-          </a:p>
-        </p:txBody>
-      </p:sp>
-      <p:sp>
-        <p:nvSpPr>
-          <p:cNvPr id="5" name="Rounded Rectangle 4"/>
-          <p:cNvSpPr/>
-          <p:nvPr/>
-        </p:nvSpPr>
-        <p:spPr>
-          <a:xfrm>
-            <a:off x="640080" y="1920240"/>
-            <a:ext cx="2560320" cy="1828800"/>
-          </a:xfrm>
-          <a:prstGeom prst="roundRect">
-            <a:avLst/>
-          </a:prstGeom>
-          <a:solidFill>
-            <a:srgbClr val="F0EFEC"/>
-          </a:solidFill>
-          <a:ln w="12700">
-            <a:solidFill>
-              <a:srgbClr val="2A78D6"/>
-            </a:solidFill>
-          </a:ln>
-        </p:spPr>
-        <p:style>
-          <a:lnRef idx="1">
-            <a:schemeClr val="accent1"/>
-          </a:lnRef>
-          <a:fillRef idx="3">
-            <a:schemeClr val="accent1"/>
-          </a:fillRef>
-          <a:effectRef idx="2">
-            <a:schemeClr val="accent1"/>
-          </a:effectRef>
-          <a:fontRef idx="minor">
-            <a:schemeClr val="lt1"/>
-          </a:fontRef>
-        </p:style>
-        <p:txBody>
-          <a:bodyPr rtlCol="0" anchor="ctr"/>
-          <a:lstStyle/>
-          <a:p>
-            <a:pPr algn="ctr"/>
-            <a:r>
-              <a:rPr sz="3400" b="1">
-                <a:solidFill>
-                  <a:srgbClr val="2A78D6"/>
-                </a:solidFill>
-              </a:rPr>
-              <a:t>1 day</a:t>
-            </a:r>
-          </a:p>
-          <a:p>
-            <a:pPr algn="ctr"/>
-            <a:r>
-              <a:rPr sz="1300">
-                <a:solidFill>
-                  <a:srgbClr val="52514E"/>
-                </a:solidFill>
-              </a:rPr>
-              <a:t>requirements to</a:t>
-            </a:r>
-          </a:p>
-          <a:p>
-            <a:pPr algn="ctr"/>
-            <a:r>
-              <a:rPr sz="1300">
-                <a:solidFill>
-                  <a:srgbClr val="52514E"/>
-                </a:solidFill>
-              </a:rPr>
-              <a:t>load-tested system</a:t>
-            </a:r>
-          </a:p>
-        </p:txBody>
-      </p:sp>
-      <p:sp>
-        <p:nvSpPr>
-          <p:cNvPr id="6" name="Rounded Rectangle 5"/>
-          <p:cNvSpPr/>
-          <p:nvPr/>
-        </p:nvSpPr>
-        <p:spPr>
-          <a:xfrm>
-            <a:off x="3474720" y="1920240"/>
-            <a:ext cx="2560320" cy="1828800"/>
-          </a:xfrm>
-          <a:prstGeom prst="roundRect">
-            <a:avLst/>
-          </a:prstGeom>
-          <a:solidFill>
-            <a:srgbClr val="F0EFEC"/>
-          </a:solidFill>
-          <a:ln w="12700">
-            <a:solidFill>
-              <a:srgbClr val="2A78D6"/>
-            </a:solidFill>
-          </a:ln>
-        </p:spPr>
-        <p:style>
-          <a:lnRef idx="1">
-            <a:schemeClr val="accent1"/>
-          </a:lnRef>
-          <a:fillRef idx="3">
-            <a:schemeClr val="accent1"/>
-          </a:fillRef>
-          <a:effectRef idx="2">
-            <a:schemeClr val="accent1"/>
-          </a:effectRef>
-          <a:fontRef idx="minor">
-            <a:schemeClr val="lt1"/>
-          </a:fontRef>
-        </p:style>
-        <p:txBody>
-          <a:bodyPr rtlCol="0" anchor="ctr"/>
-          <a:lstStyle/>
-          <a:p>
-            <a:pPr algn="ctr"/>
-            <a:r>
-              <a:rPr sz="3400" b="1">
-                <a:solidFill>
-                  <a:srgbClr val="2A78D6"/>
-                </a:solidFill>
-              </a:rPr>
-              <a:t>8 prompts</a:t>
-            </a:r>
-          </a:p>
-          <a:p>
-            <a:pPr algn="ctr"/>
-            <a:r>
-              <a:rPr sz="1300">
-                <a:solidFill>
-                  <a:srgbClr val="52514E"/>
-                </a:solidFill>
-              </a:rPr>
-              <a:t>drove all eight</a:t>
-            </a:r>
-          </a:p>
-          <a:p>
-            <a:pPr algn="ctr"/>
-            <a:r>
-              <a:rPr sz="1300">
-                <a:solidFill>
-                  <a:srgbClr val="52514E"/>
-                </a:solidFill>
-              </a:rPr>
-              <a:t>phases of work</a:t>
-            </a:r>
-          </a:p>
-        </p:txBody>
-      </p:sp>
-      <p:sp>
-        <p:nvSpPr>
-          <p:cNvPr id="7" name="Rounded Rectangle 6"/>
-          <p:cNvSpPr/>
-          <p:nvPr/>
-        </p:nvSpPr>
-        <p:spPr>
-          <a:xfrm>
-            <a:off x="6309360" y="1920240"/>
-            <a:ext cx="2560320" cy="1828800"/>
-          </a:xfrm>
-          <a:prstGeom prst="roundRect">
-            <a:avLst/>
-          </a:prstGeom>
-          <a:solidFill>
-            <a:srgbClr val="F0EFEC"/>
-          </a:solidFill>
-          <a:ln w="12700">
-            <a:solidFill>
-              <a:srgbClr val="2A78D6"/>
-            </a:solidFill>
-          </a:ln>
-        </p:spPr>
-        <p:style>
-          <a:lnRef idx="1">
-            <a:schemeClr val="accent1"/>
-          </a:lnRef>
-          <a:fillRef idx="3">
-            <a:schemeClr val="accent1"/>
-          </a:fillRef>
-          <a:effectRef idx="2">
-            <a:schemeClr val="accent1"/>
-          </a:effectRef>
-          <a:fontRef idx="minor">
-            <a:schemeClr val="lt1"/>
-          </a:fontRef>
-        </p:style>
-        <p:txBody>
-          <a:bodyPr rtlCol="0" anchor="ctr"/>
-          <a:lstStyle/>
-          <a:p>
-            <a:pPr algn="ctr"/>
-            <a:r>
-              <a:rPr sz="3400" b="1">
-                <a:solidFill>
-                  <a:srgbClr val="2A78D6"/>
-                </a:solidFill>
-              </a:rPr>
-              <a:t>≈ $430</a:t>
-            </a:r>
-          </a:p>
-          <a:p>
-            <a:pPr algn="ctr"/>
-            <a:r>
-              <a:rPr sz="1300">
-                <a:solidFill>
-                  <a:srgbClr val="52514E"/>
-                </a:solidFill>
-              </a:rPr>
-              <a:t>metered AI compute</a:t>
-            </a:r>
-          </a:p>
-          <a:p>
-            <a:pPr algn="ctr"/>
-            <a:r>
-              <a:rPr sz="1300">
-                <a:solidFill>
-                  <a:srgbClr val="52514E"/>
-                </a:solidFill>
-              </a:rPr>
-              <a:t>(included in subscription)</a:t>
-            </a:r>
-          </a:p>
-        </p:txBody>
-      </p:sp>
-      <p:sp>
-        <p:nvSpPr>
-          <p:cNvPr id="8" name="Rounded Rectangle 7"/>
-          <p:cNvSpPr/>
-          <p:nvPr/>
-        </p:nvSpPr>
-        <p:spPr>
-          <a:xfrm>
-            <a:off x="9144000" y="1920240"/>
-            <a:ext cx="2560320" cy="1828800"/>
-          </a:xfrm>
-          <a:prstGeom prst="roundRect">
-            <a:avLst/>
-          </a:prstGeom>
-          <a:solidFill>
-            <a:srgbClr val="F0EFEC"/>
-          </a:solidFill>
-          <a:ln w="12700">
-            <a:solidFill>
-              <a:srgbClr val="2A78D6"/>
-            </a:solidFill>
-          </a:ln>
-        </p:spPr>
-        <p:style>
-          <a:lnRef idx="1">
-            <a:schemeClr val="accent1"/>
-          </a:lnRef>
-          <a:fillRef idx="3">
-            <a:schemeClr val="accent1"/>
-          </a:fillRef>
-          <a:effectRef idx="2">
-            <a:schemeClr val="accent1"/>
-          </a:effectRef>
-          <a:fontRef idx="minor">
-            <a:schemeClr val="lt1"/>
-          </a:fontRef>
-        </p:style>
-        <p:txBody>
-          <a:bodyPr rtlCol="0" anchor="ctr"/>
-          <a:lstStyle/>
-          <a:p>
-            <a:pPr algn="ctr"/>
-            <a:r>
-              <a:rPr sz="3400" b="1">
-                <a:solidFill>
-                  <a:srgbClr val="2A78D6"/>
-                </a:solidFill>
-              </a:rPr>
-              <a:t>15 finds</a:t>
-            </a:r>
-          </a:p>
-          <a:p>
-            <a:pPr algn="ctr"/>
-            <a:r>
-              <a:rPr sz="1300">
-                <a:solidFill>
-                  <a:srgbClr val="52514E"/>
-                </a:solidFill>
-              </a:rPr>
-              <a:t>6 bugs, 1 design flaw,</a:t>
-            </a:r>
-          </a:p>
-          <a:p>
-            <a:pPr algn="ctr"/>
-            <a:r>
-              <a:rPr sz="1300">
-                <a:solidFill>
-                  <a:srgbClr val="52514E"/>
-                </a:solidFill>
-              </a:rPr>
-              <a:t>8 deploy gotchas — pre-prod</a:t>
-            </a:r>
-          </a:p>
-        </p:txBody>
-      </p:sp>
-      <p:sp>
-        <p:nvSpPr>
-          <p:cNvPr id="9" name="TextBox 8"/>
+              <a:t>Full infrastructure-as-code, validated; one command to deploy</a:t>
+            </a:r>
+          </a:p>
+        </p:txBody>
+      </p:sp>
+      <p:sp>
+        <p:nvSpPr>
+          <p:cNvPr id="5" name="TextBox 4"/>
           <p:cNvSpPr txBox="1"/>
           <p:nvPr/>
         </p:nvSpPr>
         <p:spPr>
           <a:xfrm>
-            <a:off x="640080" y="4297680"/>
+            <a:off x="640080" y="1737360"/>
             <a:ext cx="10881360" cy="4754880"/>
           </a:xfrm>
           <a:prstGeom prst="rect">
@@ -7365,46 +7496,91 @@
           <a:p>
             <a:pPr>
               <a:spcAft>
-                <a:spcPts val="1000"/>
+                <a:spcPts val="1200"/>
               </a:spcAft>
             </a:pPr>
             <a:r>
-              <a:rPr sz="1700" b="1">
-                <a:solidFill>
-                  <a:srgbClr val="0B0B0B"/>
-                </a:solidFill>
-              </a:rPr>
-              <a:t>• Quality came from the process: plan first, review each outcome, make the system prove itself</a:t>
+              <a:rPr sz="1800" b="0">
+                <a:solidFill>
+                  <a:srgbClr val="0B0B0B"/>
+                </a:solidFill>
+              </a:rPr>
+              <a:t>• Terraform stack complete: MSK Serverless (Kafka) + Amazon Managed Service for Apache Flink + generator on Fargate + CloudWatch dashboard</a:t>
             </a:r>
           </a:p>
           <a:p>
             <a:pPr>
               <a:spcAft>
-                <a:spcPts val="1000"/>
+                <a:spcPts val="1200"/>
               </a:spcAft>
             </a:pPr>
             <a:r>
-              <a:rPr sz="1700" b="0">
-                <a:solidFill>
-                  <a:srgbClr val="0B0B0B"/>
-                </a:solidFill>
-              </a:rPr>
-              <a:t>• Bugs caught included the kind that bite in production: dependency clashes, silent metric mismatches, replay semantics</a:t>
+              <a:rPr sz="1800" b="1">
+                <a:solidFill>
+                  <a:srgbClr val="0B0B0B"/>
+                </a:solidFill>
+              </a:rPr>
+              <a:t>• The exact same application jar runs on AWS — every environment difference is configuration</a:t>
             </a:r>
           </a:p>
           <a:p>
             <a:pPr>
               <a:spcAft>
-                <a:spcPts val="1000"/>
+                <a:spcPts val="1200"/>
               </a:spcAft>
             </a:pPr>
             <a:r>
-              <a:rPr sz="1700" b="0">
-                <a:solidFill>
-                  <a:srgbClr val="0B0B0B"/>
-                </a:solidFill>
-              </a:rPr>
-              <a:t>• Every prompt, decision, and result is recorded in the repository — fully auditable</a:t>
+              <a:rPr sz="1800" b="0">
+                <a:solidFill>
+                  <a:srgbClr val="0B0B0B"/>
+                </a:solidFill>
+              </a:rPr>
+              <a:t>• Security by default: private VPC, IAM auth to Kafka, least-privilege roles</a:t>
+            </a:r>
+          </a:p>
+          <a:p>
+            <a:pPr>
+              <a:spcAft>
+                <a:spcPts val="1200"/>
+              </a:spcAft>
+            </a:pPr>
+            <a:r>
+              <a:rPr sz="1800" b="0">
+                <a:solidFill>
+                  <a:srgbClr val="0B0B0B"/>
+                </a:solidFill>
+              </a:rPr>
+              <a:t>• Operations runbook: deploy, in-place code update, config-only rescale, teardown</a:t>
+            </a:r>
+          </a:p>
+          <a:p>
+            <a:pPr>
+              <a:spcAft>
+                <a:spcPts val="1200"/>
+              </a:spcAft>
+            </a:pPr>
+            <a:r>
+              <a:rPr sz="1800" b="0">
+                <a:solidFill>
+                  <a:srgbClr val="0B0B0B"/>
+                </a:solidFill>
+              </a:rPr>
+              <a:t>• Demo cost ≈ $1/hour while running; destroyed when not in use</a:t>
+            </a:r>
+          </a:p>
+          <a:p>
+            <a:pPr>
+              <a:spcAft>
+                <a:spcPts val="1200"/>
+              </a:spcAft>
+            </a:pPr>
+            <a:r>
+              <a:rPr sz="1800" b="1">
+                <a:solidFill>
+                  <a:srgbClr val="008300"/>
+                </a:solidFill>
+              </a:rPr>
+              <a:t>• Status: DEPLOYED and load-tested on AWS — all cases green, scaling ladder measured, then torn down cleanly</a:t>
             </a:r>
           </a:p>
         </p:txBody>

--- a/docs/flink-demo-exec-briefing.pptx
+++ b/docs/flink-demo-exec-briefing.pptx
@@ -16,6 +16,7 @@
     <p:sldId id="264" r:id="rId15"/>
     <p:sldId id="265" r:id="rId16"/>
     <p:sldId id="266" r:id="rId17"/>
+    <p:sldId id="267" r:id="rId18"/>
   </p:sldIdLst>
   <p:sldSz cx="12191695" cy="6858000" type="screen4x3"/>
   <p:notesSz cx="6858000" cy="9144000"/>
@@ -3430,7 +3431,7 @@
                   <a:srgbClr val="0B0B0B"/>
                 </a:solidFill>
               </a:rPr>
-              <a:t>What it took to build</a:t>
+              <a:t>Path to production — AWS ready today</a:t>
             </a:r>
           </a:p>
         </p:txBody>
@@ -3506,320 +3507,20 @@
                   <a:srgbClr val="52514E"/>
                 </a:solidFill>
               </a:rPr>
-              <a:t>AI-assisted engineering with review gates</a:t>
-            </a:r>
-          </a:p>
-        </p:txBody>
-      </p:sp>
-      <p:sp>
-        <p:nvSpPr>
-          <p:cNvPr id="5" name="Rounded Rectangle 4"/>
-          <p:cNvSpPr/>
-          <p:nvPr/>
-        </p:nvSpPr>
-        <p:spPr>
-          <a:xfrm>
-            <a:off x="640080" y="1920240"/>
-            <a:ext cx="2560320" cy="1828800"/>
-          </a:xfrm>
-          <a:prstGeom prst="roundRect">
-            <a:avLst/>
-          </a:prstGeom>
-          <a:solidFill>
-            <a:srgbClr val="F0EFEC"/>
-          </a:solidFill>
-          <a:ln w="12700">
-            <a:solidFill>
-              <a:srgbClr val="2A78D6"/>
-            </a:solidFill>
-          </a:ln>
-        </p:spPr>
-        <p:style>
-          <a:lnRef idx="1">
-            <a:schemeClr val="accent1"/>
-          </a:lnRef>
-          <a:fillRef idx="3">
-            <a:schemeClr val="accent1"/>
-          </a:fillRef>
-          <a:effectRef idx="2">
-            <a:schemeClr val="accent1"/>
-          </a:effectRef>
-          <a:fontRef idx="minor">
-            <a:schemeClr val="lt1"/>
-          </a:fontRef>
-        </p:style>
-        <p:txBody>
-          <a:bodyPr rtlCol="0" anchor="ctr"/>
-          <a:lstStyle/>
-          <a:p>
-            <a:pPr algn="ctr"/>
-            <a:r>
-              <a:rPr sz="3400" b="1">
-                <a:solidFill>
-                  <a:srgbClr val="2A78D6"/>
-                </a:solidFill>
-              </a:rPr>
-              <a:t>1 day</a:t>
-            </a:r>
-          </a:p>
-          <a:p>
-            <a:pPr algn="ctr"/>
-            <a:r>
-              <a:rPr sz="1300">
-                <a:solidFill>
-                  <a:srgbClr val="52514E"/>
-                </a:solidFill>
-              </a:rPr>
-              <a:t>requirements to</a:t>
-            </a:r>
-          </a:p>
-          <a:p>
-            <a:pPr algn="ctr"/>
-            <a:r>
-              <a:rPr sz="1300">
-                <a:solidFill>
-                  <a:srgbClr val="52514E"/>
-                </a:solidFill>
-              </a:rPr>
-              <a:t>load-tested system</a:t>
-            </a:r>
-          </a:p>
-        </p:txBody>
-      </p:sp>
-      <p:sp>
-        <p:nvSpPr>
-          <p:cNvPr id="6" name="Rounded Rectangle 5"/>
-          <p:cNvSpPr/>
-          <p:nvPr/>
-        </p:nvSpPr>
-        <p:spPr>
-          <a:xfrm>
-            <a:off x="3474720" y="1920240"/>
-            <a:ext cx="2560320" cy="1828800"/>
-          </a:xfrm>
-          <a:prstGeom prst="roundRect">
-            <a:avLst/>
-          </a:prstGeom>
-          <a:solidFill>
-            <a:srgbClr val="F0EFEC"/>
-          </a:solidFill>
-          <a:ln w="12700">
-            <a:solidFill>
-              <a:srgbClr val="2A78D6"/>
-            </a:solidFill>
-          </a:ln>
-        </p:spPr>
-        <p:style>
-          <a:lnRef idx="1">
-            <a:schemeClr val="accent1"/>
-          </a:lnRef>
-          <a:fillRef idx="3">
-            <a:schemeClr val="accent1"/>
-          </a:fillRef>
-          <a:effectRef idx="2">
-            <a:schemeClr val="accent1"/>
-          </a:effectRef>
-          <a:fontRef idx="minor">
-            <a:schemeClr val="lt1"/>
-          </a:fontRef>
-        </p:style>
-        <p:txBody>
-          <a:bodyPr rtlCol="0" anchor="ctr"/>
-          <a:lstStyle/>
-          <a:p>
-            <a:pPr algn="ctr"/>
-            <a:r>
-              <a:rPr sz="3400" b="1">
-                <a:solidFill>
-                  <a:srgbClr val="2A78D6"/>
-                </a:solidFill>
-              </a:rPr>
-              <a:t>8 prompts</a:t>
-            </a:r>
-          </a:p>
-          <a:p>
-            <a:pPr algn="ctr"/>
-            <a:r>
-              <a:rPr sz="1300">
-                <a:solidFill>
-                  <a:srgbClr val="52514E"/>
-                </a:solidFill>
-              </a:rPr>
-              <a:t>drove all eight</a:t>
-            </a:r>
-          </a:p>
-          <a:p>
-            <a:pPr algn="ctr"/>
-            <a:r>
-              <a:rPr sz="1300">
-                <a:solidFill>
-                  <a:srgbClr val="52514E"/>
-                </a:solidFill>
-              </a:rPr>
-              <a:t>phases of work</a:t>
-            </a:r>
-          </a:p>
-        </p:txBody>
-      </p:sp>
-      <p:sp>
-        <p:nvSpPr>
-          <p:cNvPr id="7" name="Rounded Rectangle 6"/>
-          <p:cNvSpPr/>
-          <p:nvPr/>
-        </p:nvSpPr>
-        <p:spPr>
-          <a:xfrm>
-            <a:off x="6309360" y="1920240"/>
-            <a:ext cx="2560320" cy="1828800"/>
-          </a:xfrm>
-          <a:prstGeom prst="roundRect">
-            <a:avLst/>
-          </a:prstGeom>
-          <a:solidFill>
-            <a:srgbClr val="F0EFEC"/>
-          </a:solidFill>
-          <a:ln w="12700">
-            <a:solidFill>
-              <a:srgbClr val="2A78D6"/>
-            </a:solidFill>
-          </a:ln>
-        </p:spPr>
-        <p:style>
-          <a:lnRef idx="1">
-            <a:schemeClr val="accent1"/>
-          </a:lnRef>
-          <a:fillRef idx="3">
-            <a:schemeClr val="accent1"/>
-          </a:fillRef>
-          <a:effectRef idx="2">
-            <a:schemeClr val="accent1"/>
-          </a:effectRef>
-          <a:fontRef idx="minor">
-            <a:schemeClr val="lt1"/>
-          </a:fontRef>
-        </p:style>
-        <p:txBody>
-          <a:bodyPr rtlCol="0" anchor="ctr"/>
-          <a:lstStyle/>
-          <a:p>
-            <a:pPr algn="ctr"/>
-            <a:r>
-              <a:rPr sz="3400" b="1">
-                <a:solidFill>
-                  <a:srgbClr val="2A78D6"/>
-                </a:solidFill>
-              </a:rPr>
-              <a:t>≈ $430</a:t>
-            </a:r>
-          </a:p>
-          <a:p>
-            <a:pPr algn="ctr"/>
-            <a:r>
-              <a:rPr sz="1300">
-                <a:solidFill>
-                  <a:srgbClr val="52514E"/>
-                </a:solidFill>
-              </a:rPr>
-              <a:t>metered AI compute</a:t>
-            </a:r>
-          </a:p>
-          <a:p>
-            <a:pPr algn="ctr"/>
-            <a:r>
-              <a:rPr sz="1300">
-                <a:solidFill>
-                  <a:srgbClr val="52514E"/>
-                </a:solidFill>
-              </a:rPr>
-              <a:t>(included in subscription)</a:t>
-            </a:r>
-          </a:p>
-        </p:txBody>
-      </p:sp>
-      <p:sp>
-        <p:nvSpPr>
-          <p:cNvPr id="8" name="Rounded Rectangle 7"/>
-          <p:cNvSpPr/>
-          <p:nvPr/>
-        </p:nvSpPr>
-        <p:spPr>
-          <a:xfrm>
-            <a:off x="9144000" y="1920240"/>
-            <a:ext cx="2560320" cy="1828800"/>
-          </a:xfrm>
-          <a:prstGeom prst="roundRect">
-            <a:avLst/>
-          </a:prstGeom>
-          <a:solidFill>
-            <a:srgbClr val="F0EFEC"/>
-          </a:solidFill>
-          <a:ln w="12700">
-            <a:solidFill>
-              <a:srgbClr val="2A78D6"/>
-            </a:solidFill>
-          </a:ln>
-        </p:spPr>
-        <p:style>
-          <a:lnRef idx="1">
-            <a:schemeClr val="accent1"/>
-          </a:lnRef>
-          <a:fillRef idx="3">
-            <a:schemeClr val="accent1"/>
-          </a:fillRef>
-          <a:effectRef idx="2">
-            <a:schemeClr val="accent1"/>
-          </a:effectRef>
-          <a:fontRef idx="minor">
-            <a:schemeClr val="lt1"/>
-          </a:fontRef>
-        </p:style>
-        <p:txBody>
-          <a:bodyPr rtlCol="0" anchor="ctr"/>
-          <a:lstStyle/>
-          <a:p>
-            <a:pPr algn="ctr"/>
-            <a:r>
-              <a:rPr sz="3400" b="1">
-                <a:solidFill>
-                  <a:srgbClr val="2A78D6"/>
-                </a:solidFill>
-              </a:rPr>
-              <a:t>15 finds</a:t>
-            </a:r>
-          </a:p>
-          <a:p>
-            <a:pPr algn="ctr"/>
-            <a:r>
-              <a:rPr sz="1300">
-                <a:solidFill>
-                  <a:srgbClr val="52514E"/>
-                </a:solidFill>
-              </a:rPr>
-              <a:t>6 bugs, 1 design flaw,</a:t>
-            </a:r>
-          </a:p>
-          <a:p>
-            <a:pPr algn="ctr"/>
-            <a:r>
-              <a:rPr sz="1300">
-                <a:solidFill>
-                  <a:srgbClr val="52514E"/>
-                </a:solidFill>
-              </a:rPr>
-              <a:t>8 deploy gotchas — pre-prod</a:t>
-            </a:r>
-          </a:p>
-        </p:txBody>
-      </p:sp>
-      <p:sp>
-        <p:nvSpPr>
-          <p:cNvPr id="9" name="TextBox 8"/>
+              <a:t>Full infrastructure-as-code, validated; one command to deploy</a:t>
+            </a:r>
+          </a:p>
+        </p:txBody>
+      </p:sp>
+      <p:sp>
+        <p:nvSpPr>
+          <p:cNvPr id="5" name="TextBox 4"/>
           <p:cNvSpPr txBox="1"/>
           <p:nvPr/>
         </p:nvSpPr>
         <p:spPr>
           <a:xfrm>
-            <a:off x="640080" y="4297680"/>
+            <a:off x="640080" y="1737360"/>
             <a:ext cx="10881360" cy="4754880"/>
           </a:xfrm>
           <a:prstGeom prst="rect">
@@ -3835,46 +3536,91 @@
           <a:p>
             <a:pPr>
               <a:spcAft>
-                <a:spcPts val="1000"/>
+                <a:spcPts val="1200"/>
               </a:spcAft>
             </a:pPr>
             <a:r>
-              <a:rPr sz="1700" b="1">
-                <a:solidFill>
-                  <a:srgbClr val="0B0B0B"/>
-                </a:solidFill>
-              </a:rPr>
-              <a:t>• Quality came from the process: plan first, review each outcome, make the system prove itself</a:t>
+              <a:rPr sz="1800" b="0">
+                <a:solidFill>
+                  <a:srgbClr val="0B0B0B"/>
+                </a:solidFill>
+              </a:rPr>
+              <a:t>• Terraform stack complete: MSK Serverless (Kafka) + Amazon Managed Service for Apache Flink + generator on Fargate + CloudWatch dashboard</a:t>
             </a:r>
           </a:p>
           <a:p>
             <a:pPr>
               <a:spcAft>
-                <a:spcPts val="1000"/>
+                <a:spcPts val="1200"/>
               </a:spcAft>
             </a:pPr>
             <a:r>
-              <a:rPr sz="1700" b="0">
-                <a:solidFill>
-                  <a:srgbClr val="0B0B0B"/>
-                </a:solidFill>
-              </a:rPr>
-              <a:t>• Bugs caught included the kind that bite in production: dependency clashes, silent metric mismatches, replay semantics</a:t>
+              <a:rPr sz="1800" b="1">
+                <a:solidFill>
+                  <a:srgbClr val="0B0B0B"/>
+                </a:solidFill>
+              </a:rPr>
+              <a:t>• The exact same application jar runs on AWS — every environment difference is configuration</a:t>
             </a:r>
           </a:p>
           <a:p>
             <a:pPr>
               <a:spcAft>
-                <a:spcPts val="1000"/>
+                <a:spcPts val="1200"/>
               </a:spcAft>
             </a:pPr>
             <a:r>
-              <a:rPr sz="1700" b="0">
-                <a:solidFill>
-                  <a:srgbClr val="0B0B0B"/>
-                </a:solidFill>
-              </a:rPr>
-              <a:t>• Every prompt, decision, and result is recorded in the repository — fully auditable</a:t>
+              <a:rPr sz="1800" b="0">
+                <a:solidFill>
+                  <a:srgbClr val="0B0B0B"/>
+                </a:solidFill>
+              </a:rPr>
+              <a:t>• Security by default: private VPC, IAM auth to Kafka, least-privilege roles</a:t>
+            </a:r>
+          </a:p>
+          <a:p>
+            <a:pPr>
+              <a:spcAft>
+                <a:spcPts val="1200"/>
+              </a:spcAft>
+            </a:pPr>
+            <a:r>
+              <a:rPr sz="1800" b="0">
+                <a:solidFill>
+                  <a:srgbClr val="0B0B0B"/>
+                </a:solidFill>
+              </a:rPr>
+              <a:t>• Operations runbook: deploy, in-place code update, config-only rescale, teardown</a:t>
+            </a:r>
+          </a:p>
+          <a:p>
+            <a:pPr>
+              <a:spcAft>
+                <a:spcPts val="1200"/>
+              </a:spcAft>
+            </a:pPr>
+            <a:r>
+              <a:rPr sz="1800" b="0">
+                <a:solidFill>
+                  <a:srgbClr val="0B0B0B"/>
+                </a:solidFill>
+              </a:rPr>
+              <a:t>• Demo cost ≈ $1/hour while running; destroyed when not in use</a:t>
+            </a:r>
+          </a:p>
+          <a:p>
+            <a:pPr>
+              <a:spcAft>
+                <a:spcPts val="1200"/>
+              </a:spcAft>
+            </a:pPr>
+            <a:r>
+              <a:rPr sz="1800" b="1">
+                <a:solidFill>
+                  <a:srgbClr val="008300"/>
+                </a:solidFill>
+              </a:rPr>
+              <a:t>• Status: DEPLOYED and load-tested on AWS — all cases green, scaling ladder measured, then torn down cleanly</a:t>
             </a:r>
           </a:p>
         </p:txBody>
@@ -3925,7 +3671,7 @@
                   <a:srgbClr val="0B0B0B"/>
                 </a:solidFill>
               </a:rPr>
-              <a:t>Recommendations &amp; next steps</a:t>
+              <a:t>What it took to build</a:t>
             </a:r>
           </a:p>
         </p:txBody>
@@ -3981,6 +3727,501 @@
         </p:nvSpPr>
         <p:spPr>
           <a:xfrm>
+            <a:off x="548640" y="1143000"/>
+            <a:ext cx="11064240" cy="457200"/>
+          </a:xfrm>
+          <a:prstGeom prst="rect">
+            <a:avLst/>
+          </a:prstGeom>
+          <a:noFill/>
+        </p:spPr>
+        <p:txBody>
+          <a:bodyPr wrap="square">
+            <a:spAutoFit/>
+          </a:bodyPr>
+          <a:lstStyle/>
+          <a:p>
+            <a:r>
+              <a:rPr sz="1500">
+                <a:solidFill>
+                  <a:srgbClr val="52514E"/>
+                </a:solidFill>
+              </a:rPr>
+              <a:t>AI-assisted engineering with review gates</a:t>
+            </a:r>
+          </a:p>
+        </p:txBody>
+      </p:sp>
+      <p:sp>
+        <p:nvSpPr>
+          <p:cNvPr id="5" name="Rounded Rectangle 4"/>
+          <p:cNvSpPr/>
+          <p:nvPr/>
+        </p:nvSpPr>
+        <p:spPr>
+          <a:xfrm>
+            <a:off x="640080" y="1920240"/>
+            <a:ext cx="2560320" cy="1828800"/>
+          </a:xfrm>
+          <a:prstGeom prst="roundRect">
+            <a:avLst/>
+          </a:prstGeom>
+          <a:solidFill>
+            <a:srgbClr val="F0EFEC"/>
+          </a:solidFill>
+          <a:ln w="12700">
+            <a:solidFill>
+              <a:srgbClr val="2A78D6"/>
+            </a:solidFill>
+          </a:ln>
+        </p:spPr>
+        <p:style>
+          <a:lnRef idx="1">
+            <a:schemeClr val="accent1"/>
+          </a:lnRef>
+          <a:fillRef idx="3">
+            <a:schemeClr val="accent1"/>
+          </a:fillRef>
+          <a:effectRef idx="2">
+            <a:schemeClr val="accent1"/>
+          </a:effectRef>
+          <a:fontRef idx="minor">
+            <a:schemeClr val="lt1"/>
+          </a:fontRef>
+        </p:style>
+        <p:txBody>
+          <a:bodyPr rtlCol="0" anchor="ctr"/>
+          <a:lstStyle/>
+          <a:p>
+            <a:pPr algn="ctr"/>
+            <a:r>
+              <a:rPr sz="3400" b="1">
+                <a:solidFill>
+                  <a:srgbClr val="2A78D6"/>
+                </a:solidFill>
+              </a:rPr>
+              <a:t>1 day + epilogue</a:t>
+            </a:r>
+          </a:p>
+          <a:p>
+            <a:pPr algn="ctr"/>
+            <a:r>
+              <a:rPr sz="1300">
+                <a:solidFill>
+                  <a:srgbClr val="52514E"/>
+                </a:solidFill>
+              </a:rPr>
+              <a:t>requirements to a</a:t>
+            </a:r>
+          </a:p>
+          <a:p>
+            <a:pPr algn="ctr"/>
+            <a:r>
+              <a:rPr sz="1300">
+                <a:solidFill>
+                  <a:srgbClr val="52514E"/>
+                </a:solidFill>
+              </a:rPr>
+              <a:t>two-cloud proof</a:t>
+            </a:r>
+          </a:p>
+        </p:txBody>
+      </p:sp>
+      <p:sp>
+        <p:nvSpPr>
+          <p:cNvPr id="6" name="Rounded Rectangle 5"/>
+          <p:cNvSpPr/>
+          <p:nvPr/>
+        </p:nvSpPr>
+        <p:spPr>
+          <a:xfrm>
+            <a:off x="3474720" y="1920240"/>
+            <a:ext cx="2560320" cy="1828800"/>
+          </a:xfrm>
+          <a:prstGeom prst="roundRect">
+            <a:avLst/>
+          </a:prstGeom>
+          <a:solidFill>
+            <a:srgbClr val="F0EFEC"/>
+          </a:solidFill>
+          <a:ln w="12700">
+            <a:solidFill>
+              <a:srgbClr val="2A78D6"/>
+            </a:solidFill>
+          </a:ln>
+        </p:spPr>
+        <p:style>
+          <a:lnRef idx="1">
+            <a:schemeClr val="accent1"/>
+          </a:lnRef>
+          <a:fillRef idx="3">
+            <a:schemeClr val="accent1"/>
+          </a:fillRef>
+          <a:effectRef idx="2">
+            <a:schemeClr val="accent1"/>
+          </a:effectRef>
+          <a:fontRef idx="minor">
+            <a:schemeClr val="lt1"/>
+          </a:fontRef>
+        </p:style>
+        <p:txBody>
+          <a:bodyPr rtlCol="0" anchor="ctr"/>
+          <a:lstStyle/>
+          <a:p>
+            <a:pPr algn="ctr"/>
+            <a:r>
+              <a:rPr sz="3400" b="1">
+                <a:solidFill>
+                  <a:srgbClr val="2A78D6"/>
+                </a:solidFill>
+              </a:rPr>
+              <a:t>9 prompts</a:t>
+            </a:r>
+          </a:p>
+          <a:p>
+            <a:pPr algn="ctr"/>
+            <a:r>
+              <a:rPr sz="1300">
+                <a:solidFill>
+                  <a:srgbClr val="52514E"/>
+                </a:solidFill>
+              </a:rPr>
+              <a:t>drove all nine</a:t>
+            </a:r>
+          </a:p>
+          <a:p>
+            <a:pPr algn="ctr"/>
+            <a:r>
+              <a:rPr sz="1300">
+                <a:solidFill>
+                  <a:srgbClr val="52514E"/>
+                </a:solidFill>
+              </a:rPr>
+              <a:t>phases of work</a:t>
+            </a:r>
+          </a:p>
+        </p:txBody>
+      </p:sp>
+      <p:sp>
+        <p:nvSpPr>
+          <p:cNvPr id="7" name="Rounded Rectangle 6"/>
+          <p:cNvSpPr/>
+          <p:nvPr/>
+        </p:nvSpPr>
+        <p:spPr>
+          <a:xfrm>
+            <a:off x="6309360" y="1920240"/>
+            <a:ext cx="2560320" cy="1828800"/>
+          </a:xfrm>
+          <a:prstGeom prst="roundRect">
+            <a:avLst/>
+          </a:prstGeom>
+          <a:solidFill>
+            <a:srgbClr val="F0EFEC"/>
+          </a:solidFill>
+          <a:ln w="12700">
+            <a:solidFill>
+              <a:srgbClr val="2A78D6"/>
+            </a:solidFill>
+          </a:ln>
+        </p:spPr>
+        <p:style>
+          <a:lnRef idx="1">
+            <a:schemeClr val="accent1"/>
+          </a:lnRef>
+          <a:fillRef idx="3">
+            <a:schemeClr val="accent1"/>
+          </a:fillRef>
+          <a:effectRef idx="2">
+            <a:schemeClr val="accent1"/>
+          </a:effectRef>
+          <a:fontRef idx="minor">
+            <a:schemeClr val="lt1"/>
+          </a:fontRef>
+        </p:style>
+        <p:txBody>
+          <a:bodyPr rtlCol="0" anchor="ctr"/>
+          <a:lstStyle/>
+          <a:p>
+            <a:pPr algn="ctr"/>
+            <a:r>
+              <a:rPr sz="3400" b="1">
+                <a:solidFill>
+                  <a:srgbClr val="2A78D6"/>
+                </a:solidFill>
+              </a:rPr>
+              <a:t>≈ $515</a:t>
+            </a:r>
+          </a:p>
+          <a:p>
+            <a:pPr algn="ctr"/>
+            <a:r>
+              <a:rPr sz="1300">
+                <a:solidFill>
+                  <a:srgbClr val="52514E"/>
+                </a:solidFill>
+              </a:rPr>
+              <a:t>metered AI compute</a:t>
+            </a:r>
+          </a:p>
+          <a:p>
+            <a:pPr algn="ctr"/>
+            <a:r>
+              <a:rPr sz="1300">
+                <a:solidFill>
+                  <a:srgbClr val="52514E"/>
+                </a:solidFill>
+              </a:rPr>
+              <a:t>(flat-rate in practice)</a:t>
+            </a:r>
+          </a:p>
+        </p:txBody>
+      </p:sp>
+      <p:sp>
+        <p:nvSpPr>
+          <p:cNvPr id="8" name="Rounded Rectangle 7"/>
+          <p:cNvSpPr/>
+          <p:nvPr/>
+        </p:nvSpPr>
+        <p:spPr>
+          <a:xfrm>
+            <a:off x="9144000" y="1920240"/>
+            <a:ext cx="2560320" cy="1828800"/>
+          </a:xfrm>
+          <a:prstGeom prst="roundRect">
+            <a:avLst/>
+          </a:prstGeom>
+          <a:solidFill>
+            <a:srgbClr val="F0EFEC"/>
+          </a:solidFill>
+          <a:ln w="12700">
+            <a:solidFill>
+              <a:srgbClr val="2A78D6"/>
+            </a:solidFill>
+          </a:ln>
+        </p:spPr>
+        <p:style>
+          <a:lnRef idx="1">
+            <a:schemeClr val="accent1"/>
+          </a:lnRef>
+          <a:fillRef idx="3">
+            <a:schemeClr val="accent1"/>
+          </a:fillRef>
+          <a:effectRef idx="2">
+            <a:schemeClr val="accent1"/>
+          </a:effectRef>
+          <a:fontRef idx="minor">
+            <a:schemeClr val="lt1"/>
+          </a:fontRef>
+        </p:style>
+        <p:txBody>
+          <a:bodyPr rtlCol="0" anchor="ctr"/>
+          <a:lstStyle/>
+          <a:p>
+            <a:pPr algn="ctr"/>
+            <a:r>
+              <a:rPr sz="3400" b="1">
+                <a:solidFill>
+                  <a:srgbClr val="2A78D6"/>
+                </a:solidFill>
+              </a:rPr>
+              <a:t>26 finds</a:t>
+            </a:r>
+          </a:p>
+          <a:p>
+            <a:pPr algn="ctr"/>
+            <a:r>
+              <a:rPr sz="1300">
+                <a:solidFill>
+                  <a:srgbClr val="52514E"/>
+                </a:solidFill>
+              </a:rPr>
+              <a:t>7 bugs, 1 design flaw,</a:t>
+            </a:r>
+          </a:p>
+          <a:p>
+            <a:pPr algn="ctr"/>
+            <a:r>
+              <a:rPr sz="1300">
+                <a:solidFill>
+                  <a:srgbClr val="52514E"/>
+                </a:solidFill>
+              </a:rPr>
+              <a:t>18 deploy/cleanup gotchas</a:t>
+            </a:r>
+          </a:p>
+        </p:txBody>
+      </p:sp>
+      <p:sp>
+        <p:nvSpPr>
+          <p:cNvPr id="9" name="TextBox 8"/>
+          <p:cNvSpPr txBox="1"/>
+          <p:nvPr/>
+        </p:nvSpPr>
+        <p:spPr>
+          <a:xfrm>
+            <a:off x="640080" y="4297680"/>
+            <a:ext cx="10881360" cy="4754880"/>
+          </a:xfrm>
+          <a:prstGeom prst="rect">
+            <a:avLst/>
+          </a:prstGeom>
+          <a:noFill/>
+        </p:spPr>
+        <p:txBody>
+          <a:bodyPr wrap="square">
+            <a:spAutoFit/>
+          </a:bodyPr>
+          <a:lstStyle/>
+          <a:p>
+            <a:pPr>
+              <a:spcAft>
+                <a:spcPts val="1000"/>
+              </a:spcAft>
+            </a:pPr>
+            <a:r>
+              <a:rPr sz="1700" b="1">
+                <a:solidFill>
+                  <a:srgbClr val="0B0B0B"/>
+                </a:solidFill>
+              </a:rPr>
+              <a:t>• Quality came from the process: plan first, review each outcome, make the system prove itself</a:t>
+            </a:r>
+          </a:p>
+          <a:p>
+            <a:pPr>
+              <a:spcAft>
+                <a:spcPts val="1000"/>
+              </a:spcAft>
+            </a:pPr>
+            <a:r>
+              <a:rPr sz="1700" b="0">
+                <a:solidFill>
+                  <a:srgbClr val="0B0B0B"/>
+                </a:solidFill>
+              </a:rPr>
+              <a:t>• Bugs caught included the kind that bite in production: dependency clashes, silent metric mismatches, replay semantics</a:t>
+            </a:r>
+          </a:p>
+          <a:p>
+            <a:pPr>
+              <a:spcAft>
+                <a:spcPts val="1000"/>
+              </a:spcAft>
+            </a:pPr>
+            <a:r>
+              <a:rPr sz="1700" b="0">
+                <a:solidFill>
+                  <a:srgbClr val="0B0B0B"/>
+                </a:solidFill>
+              </a:rPr>
+              <a:t>• Every prompt, decision, and result is recorded in the repository — fully auditable</a:t>
+            </a:r>
+          </a:p>
+        </p:txBody>
+      </p:sp>
+    </p:spTree>
+  </p:cSld>
+  <p:clrMapOvr>
+    <a:masterClrMapping/>
+  </p:clrMapOvr>
+</p:sld>
+</file>
+
+<file path=ppt/slides/slide12.xml><?xml version="1.0" encoding="utf-8"?>
+<p:sld xmlns:a="http://schemas.openxmlformats.org/drawingml/2006/main" xmlns:p="http://schemas.openxmlformats.org/presentationml/2006/main" xmlns:r="http://schemas.openxmlformats.org/officeDocument/2006/relationships">
+  <p:cSld>
+    <p:spTree>
+      <p:nvGrpSpPr>
+        <p:cNvPr id="1" name=""/>
+        <p:cNvGrpSpPr/>
+        <p:nvPr/>
+      </p:nvGrpSpPr>
+      <p:grpSpPr/>
+      <p:sp>
+        <p:nvSpPr>
+          <p:cNvPr id="2" name="TextBox 1"/>
+          <p:cNvSpPr txBox="1"/>
+          <p:nvPr/>
+        </p:nvSpPr>
+        <p:spPr>
+          <a:xfrm>
+            <a:off x="548640" y="320040"/>
+            <a:ext cx="11064240" cy="914400"/>
+          </a:xfrm>
+          <a:prstGeom prst="rect">
+            <a:avLst/>
+          </a:prstGeom>
+          <a:noFill/>
+        </p:spPr>
+        <p:txBody>
+          <a:bodyPr wrap="square">
+            <a:spAutoFit/>
+          </a:bodyPr>
+          <a:lstStyle/>
+          <a:p>
+            <a:r>
+              <a:rPr sz="3000" b="1">
+                <a:solidFill>
+                  <a:srgbClr val="0B0B0B"/>
+                </a:solidFill>
+              </a:rPr>
+              <a:t>Recommendations &amp; next steps</a:t>
+            </a:r>
+          </a:p>
+        </p:txBody>
+      </p:sp>
+      <p:sp>
+        <p:nvSpPr>
+          <p:cNvPr id="3" name="Rectangle 2"/>
+          <p:cNvSpPr/>
+          <p:nvPr/>
+        </p:nvSpPr>
+        <p:spPr>
+          <a:xfrm>
+            <a:off x="594360" y="1051560"/>
+            <a:ext cx="2011680" cy="50800"/>
+          </a:xfrm>
+          <a:prstGeom prst="rect">
+            <a:avLst/>
+          </a:prstGeom>
+          <a:solidFill>
+            <a:srgbClr val="2A78D6"/>
+          </a:solidFill>
+          <a:ln>
+            <a:noFill/>
+          </a:ln>
+        </p:spPr>
+        <p:style>
+          <a:lnRef idx="1">
+            <a:schemeClr val="accent1"/>
+          </a:lnRef>
+          <a:fillRef idx="3">
+            <a:schemeClr val="accent1"/>
+          </a:fillRef>
+          <a:effectRef idx="2">
+            <a:schemeClr val="accent1"/>
+          </a:effectRef>
+          <a:fontRef idx="minor">
+            <a:schemeClr val="lt1"/>
+          </a:fontRef>
+        </p:style>
+        <p:txBody>
+          <a:bodyPr rtlCol="0" anchor="ctr"/>
+          <a:lstStyle/>
+          <a:p>
+            <a:pPr algn="ctr"/>
+          </a:p>
+        </p:txBody>
+      </p:sp>
+      <p:sp>
+        <p:nvSpPr>
+          <p:cNvPr id="4" name="TextBox 3"/>
+          <p:cNvSpPr txBox="1"/>
+          <p:nvPr/>
+        </p:nvSpPr>
+        <p:spPr>
+          <a:xfrm>
             <a:off x="640080" y="1737360"/>
             <a:ext cx="10881360" cy="4754880"/>
           </a:xfrm>
@@ -4006,7 +4247,7 @@
                   <a:srgbClr val="0B0B0B"/>
                 </a:solidFill>
               </a:rPr>
-              <a:t>• Approve the AWS demo deployment (≈ $1/hour, teardown scripted) — final requirement: Grafana-backed demo on AWS</a:t>
+              <a:t>• Two validated deployment targets — choose by ops model: AWS Managed Flink (explicit control, custom metrics) vs Confluent Cloud (serverless SQL, ~25% cheaper at sustained high volume)</a:t>
             </a:r>
           </a:p>
           <a:p>
@@ -4021,7 +4262,7 @@
                   <a:srgbClr val="0B0B0B"/>
                 </a:solidFill>
               </a:rPr>
-              <a:t>• Re-run the scaling test on AWS with dedicated compute to demonstrate 4-way+ linearity</a:t>
+              <a:t>• Volume proven on both clouds: 110k msgs/sec live on AWS; 232k msgs/sec processing on Confluent</a:t>
             </a:r>
           </a:p>
           <a:p>
@@ -7391,7 +7632,7 @@
                   <a:srgbClr val="0B0B0B"/>
                 </a:solidFill>
               </a:rPr>
-              <a:t>Path to production — AWS ready today</a:t>
+              <a:t>Day two: same pipeline, second cloud</a:t>
             </a:r>
           </a:p>
         </p:txBody>
@@ -7467,20 +7708,502 @@
                   <a:srgbClr val="52514E"/>
                 </a:solidFill>
               </a:rPr>
-              <a:t>Full infrastructure-as-code, validated; one command to deploy</a:t>
-            </a:r>
-          </a:p>
-        </p:txBody>
-      </p:sp>
-      <p:sp>
-        <p:nvSpPr>
-          <p:cNvPr id="5" name="TextBox 4"/>
+              <a:t>Rewritten in Flink SQL on Confluent Cloud — judged by the same validation suite</a:t>
+            </a:r>
+          </a:p>
+        </p:txBody>
+      </p:sp>
+      <p:graphicFrame>
+        <p:nvGraphicFramePr>
+          <p:cNvPr id="5" name="Table 4"/>
+          <p:cNvGraphicFramePr>
+            <a:graphicFrameLocks noGrp="1"/>
+          </p:cNvGraphicFramePr>
+          <p:nvPr/>
+        </p:nvGraphicFramePr>
+        <p:xfrm>
+          <a:off x="640080" y="1645920"/>
+          <a:ext cx="10972800" cy="2560320"/>
+        </p:xfrm>
+        <a:graphic>
+          <a:graphicData uri="http://schemas.openxmlformats.org/drawingml/2006/table">
+            <a:tbl>
+              <a:tblPr firstRow="1" bandRow="1">
+                <a:tableStyleId>{5C22544A-7EE6-4342-B048-85BDC9FD1C3A}</a:tableStyleId>
+              </a:tblPr>
+              <a:tblGrid>
+                <a:gridCol w="4023360"/>
+                <a:gridCol w="3474720"/>
+                <a:gridCol w="3474720"/>
+              </a:tblGrid>
+              <a:tr h="365760">
+                <a:tc>
+                  <a:txBody>
+                    <a:bodyPr wrap="square"/>
+                    <a:lstStyle/>
+                    <a:p>
+                      <a:r>
+                        <a:rPr sz="1400" b="1">
+                          <a:solidFill>
+                            <a:srgbClr val="FFFFFF"/>
+                          </a:solidFill>
+                        </a:rPr>
+                        <a:t/>
+                      </a:r>
+                    </a:p>
+                  </a:txBody>
+                  <a:tcPr marT="45720" marB="45720">
+                    <a:solidFill>
+                      <a:srgbClr val="2A78D6"/>
+                    </a:solidFill>
+                  </a:tcPr>
+                </a:tc>
+                <a:tc>
+                  <a:txBody>
+                    <a:bodyPr wrap="square"/>
+                    <a:lstStyle/>
+                    <a:p>
+                      <a:r>
+                        <a:rPr sz="1400" b="1">
+                          <a:solidFill>
+                            <a:srgbClr val="FFFFFF"/>
+                          </a:solidFill>
+                        </a:rPr>
+                        <a:t>AWS (day 1)</a:t>
+                      </a:r>
+                    </a:p>
+                  </a:txBody>
+                  <a:tcPr marT="45720" marB="45720">
+                    <a:solidFill>
+                      <a:srgbClr val="2A78D6"/>
+                    </a:solidFill>
+                  </a:tcPr>
+                </a:tc>
+                <a:tc>
+                  <a:txBody>
+                    <a:bodyPr wrap="square"/>
+                    <a:lstStyle/>
+                    <a:p>
+                      <a:r>
+                        <a:rPr sz="1400" b="1">
+                          <a:solidFill>
+                            <a:srgbClr val="FFFFFF"/>
+                          </a:solidFill>
+                        </a:rPr>
+                        <a:t>Confluent Cloud (day 2)</a:t>
+                      </a:r>
+                    </a:p>
+                  </a:txBody>
+                  <a:tcPr marT="45720" marB="45720">
+                    <a:solidFill>
+                      <a:srgbClr val="2A78D6"/>
+                    </a:solidFill>
+                  </a:tcPr>
+                </a:tc>
+              </a:tr>
+              <a:tr h="365760">
+                <a:tc>
+                  <a:txBody>
+                    <a:bodyPr wrap="square"/>
+                    <a:lstStyle/>
+                    <a:p>
+                      <a:r>
+                        <a:rPr sz="1400">
+                          <a:solidFill>
+                            <a:srgbClr val="0B0B0B"/>
+                          </a:solidFill>
+                        </a:rPr>
+                        <a:t>Code</a:t>
+                      </a:r>
+                    </a:p>
+                  </a:txBody>
+                  <a:tcPr marT="45720" marB="45720">
+                    <a:solidFill>
+                      <a:srgbClr val="FFFFFF"/>
+                    </a:solidFill>
+                  </a:tcPr>
+                </a:tc>
+                <a:tc>
+                  <a:txBody>
+                    <a:bodyPr wrap="square"/>
+                    <a:lstStyle/>
+                    <a:p>
+                      <a:r>
+                        <a:rPr sz="1400">
+                          <a:solidFill>
+                            <a:srgbClr val="0B0B0B"/>
+                          </a:solidFill>
+                        </a:rPr>
+                        <a:t>~2,000 lines of Java</a:t>
+                      </a:r>
+                    </a:p>
+                  </a:txBody>
+                  <a:tcPr marT="45720" marB="45720">
+                    <a:solidFill>
+                      <a:srgbClr val="FFFFFF"/>
+                    </a:solidFill>
+                  </a:tcPr>
+                </a:tc>
+                <a:tc>
+                  <a:txBody>
+                    <a:bodyPr wrap="square"/>
+                    <a:lstStyle/>
+                    <a:p>
+                      <a:r>
+                        <a:rPr sz="1400">
+                          <a:solidFill>
+                            <a:srgbClr val="0B0B0B"/>
+                          </a:solidFill>
+                        </a:rPr>
+                        <a:t>~200 lines of SQL (6 statements)</a:t>
+                      </a:r>
+                    </a:p>
+                  </a:txBody>
+                  <a:tcPr marT="45720" marB="45720">
+                    <a:solidFill>
+                      <a:srgbClr val="FFFFFF"/>
+                    </a:solidFill>
+                  </a:tcPr>
+                </a:tc>
+              </a:tr>
+              <a:tr h="365760">
+                <a:tc>
+                  <a:txBody>
+                    <a:bodyPr wrap="square"/>
+                    <a:lstStyle/>
+                    <a:p>
+                      <a:r>
+                        <a:rPr sz="1400">
+                          <a:solidFill>
+                            <a:srgbClr val="0B0B0B"/>
+                          </a:solidFill>
+                        </a:rPr>
+                        <a:t>Correctness — 5 independent checks</a:t>
+                      </a:r>
+                    </a:p>
+                  </a:txBody>
+                  <a:tcPr marT="45720" marB="45720">
+                    <a:solidFill>
+                      <a:srgbClr val="F0EFEC"/>
+                    </a:solidFill>
+                  </a:tcPr>
+                </a:tc>
+                <a:tc>
+                  <a:txBody>
+                    <a:bodyPr wrap="square"/>
+                    <a:lstStyle/>
+                    <a:p>
+                      <a:r>
+                        <a:rPr sz="1400">
+                          <a:solidFill>
+                            <a:srgbClr val="0B0B0B"/>
+                          </a:solidFill>
+                        </a:rPr>
+                        <a:t>All pass</a:t>
+                      </a:r>
+                    </a:p>
+                  </a:txBody>
+                  <a:tcPr marT="45720" marB="45720">
+                    <a:solidFill>
+                      <a:srgbClr val="F0EFEC"/>
+                    </a:solidFill>
+                  </a:tcPr>
+                </a:tc>
+                <a:tc>
+                  <a:txBody>
+                    <a:bodyPr wrap="square"/>
+                    <a:lstStyle/>
+                    <a:p>
+                      <a:r>
+                        <a:rPr sz="1400">
+                          <a:solidFill>
+                            <a:srgbClr val="0B0B0B"/>
+                          </a:solidFill>
+                        </a:rPr>
+                        <a:t>All pass — exact to the cent</a:t>
+                      </a:r>
+                    </a:p>
+                  </a:txBody>
+                  <a:tcPr marT="45720" marB="45720">
+                    <a:solidFill>
+                      <a:srgbClr val="F0EFEC"/>
+                    </a:solidFill>
+                  </a:tcPr>
+                </a:tc>
+              </a:tr>
+              <a:tr h="365760">
+                <a:tc>
+                  <a:txBody>
+                    <a:bodyPr wrap="square"/>
+                    <a:lstStyle/>
+                    <a:p>
+                      <a:r>
+                        <a:rPr sz="1400">
+                          <a:solidFill>
+                            <a:srgbClr val="0B0B0B"/>
+                          </a:solidFill>
+                        </a:rPr>
+                        <a:t>Top speed measured</a:t>
+                      </a:r>
+                    </a:p>
+                  </a:txBody>
+                  <a:tcPr marT="45720" marB="45720">
+                    <a:solidFill>
+                      <a:srgbClr val="FFFFFF"/>
+                    </a:solidFill>
+                  </a:tcPr>
+                </a:tc>
+                <a:tc>
+                  <a:txBody>
+                    <a:bodyPr wrap="square"/>
+                    <a:lstStyle/>
+                    <a:p>
+                      <a:r>
+                        <a:rPr sz="1400">
+                          <a:solidFill>
+                            <a:srgbClr val="0B0B0B"/>
+                          </a:solidFill>
+                        </a:rPr>
+                        <a:t>110,000 msgs/sec (12 units)</a:t>
+                      </a:r>
+                    </a:p>
+                  </a:txBody>
+                  <a:tcPr marT="45720" marB="45720">
+                    <a:solidFill>
+                      <a:srgbClr val="FFFFFF"/>
+                    </a:solidFill>
+                  </a:tcPr>
+                </a:tc>
+                <a:tc>
+                  <a:txBody>
+                    <a:bodyPr wrap="square"/>
+                    <a:lstStyle/>
+                    <a:p>
+                      <a:r>
+                        <a:rPr sz="1400">
+                          <a:solidFill>
+                            <a:srgbClr val="0B0B0B"/>
+                          </a:solidFill>
+                        </a:rPr>
+                        <a:t>232,000 msgs/sec (16 units)</a:t>
+                      </a:r>
+                    </a:p>
+                  </a:txBody>
+                  <a:tcPr marT="45720" marB="45720">
+                    <a:solidFill>
+                      <a:srgbClr val="FFFFFF"/>
+                    </a:solidFill>
+                  </a:tcPr>
+                </a:tc>
+              </a:tr>
+              <a:tr h="365760">
+                <a:tc>
+                  <a:txBody>
+                    <a:bodyPr wrap="square"/>
+                    <a:lstStyle/>
+                    <a:p>
+                      <a:r>
+                        <a:rPr sz="1400">
+                          <a:solidFill>
+                            <a:srgbClr val="0B0B0B"/>
+                          </a:solidFill>
+                        </a:rPr>
+                        <a:t>How you scale</a:t>
+                      </a:r>
+                    </a:p>
+                  </a:txBody>
+                  <a:tcPr marT="45720" marB="45720">
+                    <a:solidFill>
+                      <a:srgbClr val="F0EFEC"/>
+                    </a:solidFill>
+                  </a:tcPr>
+                </a:tc>
+                <a:tc>
+                  <a:txBody>
+                    <a:bodyPr wrap="square"/>
+                    <a:lstStyle/>
+                    <a:p>
+                      <a:r>
+                        <a:rPr sz="1400">
+                          <a:solidFill>
+                            <a:srgbClr val="0B0B0B"/>
+                          </a:solidFill>
+                        </a:rPr>
+                        <a:t>Pick unit count by hand</a:t>
+                      </a:r>
+                    </a:p>
+                  </a:txBody>
+                  <a:tcPr marT="45720" marB="45720">
+                    <a:solidFill>
+                      <a:srgbClr val="F0EFEC"/>
+                    </a:solidFill>
+                  </a:tcPr>
+                </a:tc>
+                <a:tc>
+                  <a:txBody>
+                    <a:bodyPr wrap="square"/>
+                    <a:lstStyle/>
+                    <a:p>
+                      <a:r>
+                        <a:rPr sz="1400">
+                          <a:solidFill>
+                            <a:srgbClr val="0B0B0B"/>
+                          </a:solidFill>
+                        </a:rPr>
+                        <a:t>Autoscales up to a cap you set</a:t>
+                      </a:r>
+                    </a:p>
+                  </a:txBody>
+                  <a:tcPr marT="45720" marB="45720">
+                    <a:solidFill>
+                      <a:srgbClr val="F0EFEC"/>
+                    </a:solidFill>
+                  </a:tcPr>
+                </a:tc>
+              </a:tr>
+              <a:tr h="365760">
+                <a:tc>
+                  <a:txBody>
+                    <a:bodyPr wrap="square"/>
+                    <a:lstStyle/>
+                    <a:p>
+                      <a:r>
+                        <a:rPr sz="1400">
+                          <a:solidFill>
+                            <a:srgbClr val="0B0B0B"/>
+                          </a:solidFill>
+                        </a:rPr>
+                        <a:t>Est. monthly cost, normal load</a:t>
+                      </a:r>
+                    </a:p>
+                  </a:txBody>
+                  <a:tcPr marT="45720" marB="45720">
+                    <a:solidFill>
+                      <a:srgbClr val="FFFFFF"/>
+                    </a:solidFill>
+                  </a:tcPr>
+                </a:tc>
+                <a:tc>
+                  <a:txBody>
+                    <a:bodyPr wrap="square"/>
+                    <a:lstStyle/>
+                    <a:p>
+                      <a:r>
+                        <a:rPr sz="1400">
+                          <a:solidFill>
+                            <a:srgbClr val="0B0B0B"/>
+                          </a:solidFill>
+                        </a:rPr>
+                        <a:t>~ $1,070</a:t>
+                      </a:r>
+                    </a:p>
+                  </a:txBody>
+                  <a:tcPr marT="45720" marB="45720">
+                    <a:solidFill>
+                      <a:srgbClr val="FFFFFF"/>
+                    </a:solidFill>
+                  </a:tcPr>
+                </a:tc>
+                <a:tc>
+                  <a:txBody>
+                    <a:bodyPr wrap="square"/>
+                    <a:lstStyle/>
+                    <a:p>
+                      <a:r>
+                        <a:rPr sz="1400">
+                          <a:solidFill>
+                            <a:srgbClr val="0B0B0B"/>
+                          </a:solidFill>
+                        </a:rPr>
+                        <a:t>~ $1,010</a:t>
+                      </a:r>
+                    </a:p>
+                  </a:txBody>
+                  <a:tcPr marT="45720" marB="45720">
+                    <a:solidFill>
+                      <a:srgbClr val="FFFFFF"/>
+                    </a:solidFill>
+                  </a:tcPr>
+                </a:tc>
+              </a:tr>
+              <a:tr h="365760">
+                <a:tc>
+                  <a:txBody>
+                    <a:bodyPr wrap="square"/>
+                    <a:lstStyle/>
+                    <a:p>
+                      <a:r>
+                        <a:rPr sz="1400">
+                          <a:solidFill>
+                            <a:srgbClr val="0B0B0B"/>
+                          </a:solidFill>
+                        </a:rPr>
+                        <a:t>Est. monthly cost, peak volume</a:t>
+                      </a:r>
+                    </a:p>
+                  </a:txBody>
+                  <a:tcPr marT="45720" marB="45720">
+                    <a:solidFill>
+                      <a:srgbClr val="F0EFEC"/>
+                    </a:solidFill>
+                  </a:tcPr>
+                </a:tc>
+                <a:tc>
+                  <a:txBody>
+                    <a:bodyPr wrap="square"/>
+                    <a:lstStyle/>
+                    <a:p>
+                      <a:r>
+                        <a:rPr sz="1400">
+                          <a:solidFill>
+                            <a:srgbClr val="0B0B0B"/>
+                          </a:solidFill>
+                        </a:rPr>
+                        <a:t>~ $6,100</a:t>
+                      </a:r>
+                    </a:p>
+                  </a:txBody>
+                  <a:tcPr marT="45720" marB="45720">
+                    <a:solidFill>
+                      <a:srgbClr val="F0EFEC"/>
+                    </a:solidFill>
+                  </a:tcPr>
+                </a:tc>
+                <a:tc>
+                  <a:txBody>
+                    <a:bodyPr wrap="square"/>
+                    <a:lstStyle/>
+                    <a:p>
+                      <a:r>
+                        <a:rPr sz="1400">
+                          <a:solidFill>
+                            <a:srgbClr val="0B0B0B"/>
+                          </a:solidFill>
+                        </a:rPr>
+                        <a:t>~ $4,500</a:t>
+                      </a:r>
+                    </a:p>
+                  </a:txBody>
+                  <a:tcPr marT="45720" marB="45720">
+                    <a:solidFill>
+                      <a:srgbClr val="F0EFEC"/>
+                    </a:solidFill>
+                  </a:tcPr>
+                </a:tc>
+              </a:tr>
+            </a:tbl>
+          </a:graphicData>
+        </a:graphic>
+      </p:graphicFrame>
+      <p:sp>
+        <p:nvSpPr>
+          <p:cNvPr id="6" name="TextBox 5"/>
           <p:cNvSpPr txBox="1"/>
           <p:nvPr/>
         </p:nvSpPr>
         <p:spPr>
           <a:xfrm>
-            <a:off x="640080" y="1737360"/>
+            <a:off x="640080" y="5120640"/>
             <a:ext cx="10881360" cy="4754880"/>
           </a:xfrm>
           <a:prstGeom prst="rect">
@@ -7496,91 +8219,46 @@
           <a:p>
             <a:pPr>
               <a:spcAft>
-                <a:spcPts val="1200"/>
+                <a:spcPts val="1000"/>
               </a:spcAft>
             </a:pPr>
             <a:r>
-              <a:rPr sz="1800" b="0">
-                <a:solidFill>
-                  <a:srgbClr val="0B0B0B"/>
-                </a:solidFill>
-              </a:rPr>
-              <a:t>• Terraform stack complete: MSK Serverless (Kafka) + Amazon Managed Service for Apache Flink + generator on Fargate + CloudWatch dashboard</a:t>
+              <a:rPr sz="1600" b="1">
+                <a:solidFill>
+                  <a:srgbClr val="0B0B0B"/>
+                </a:solidFill>
+              </a:rPr>
+              <a:t>• Same topics, same JSON, same generator, same tests - only the engine changed</a:t>
             </a:r>
           </a:p>
           <a:p>
             <a:pPr>
               <a:spcAft>
-                <a:spcPts val="1200"/>
+                <a:spcPts val="1000"/>
               </a:spcAft>
             </a:pPr>
             <a:r>
-              <a:rPr sz="1800" b="1">
-                <a:solidFill>
-                  <a:srgbClr val="0B0B0B"/>
-                </a:solidFill>
-              </a:rPr>
-              <a:t>• The exact same application jar runs on AWS — every environment difference is configuration</a:t>
+              <a:rPr sz="1600" b="0">
+                <a:solidFill>
+                  <a:srgbClr val="0B0B0B"/>
+                </a:solidFill>
+              </a:rPr>
+              <a:t>• The validation suite re-derives every number from raw data, so proving a cross-cloud rewrite took an afternoon and ~ $4</a:t>
             </a:r>
           </a:p>
           <a:p>
             <a:pPr>
               <a:spcAft>
-                <a:spcPts val="1200"/>
+                <a:spcPts val="1000"/>
               </a:spcAft>
             </a:pPr>
             <a:r>
-              <a:rPr sz="1800" b="0">
-                <a:solidFill>
-                  <a:srgbClr val="0B0B0B"/>
-                </a:solidFill>
-              </a:rPr>
-              <a:t>• Security by default: private VPC, IAM auth to Kafka, least-privilege roles</a:t>
-            </a:r>
-          </a:p>
-          <a:p>
-            <a:pPr>
-              <a:spcAft>
-                <a:spcPts val="1200"/>
-              </a:spcAft>
-            </a:pPr>
-            <a:r>
-              <a:rPr sz="1800" b="0">
-                <a:solidFill>
-                  <a:srgbClr val="0B0B0B"/>
-                </a:solidFill>
-              </a:rPr>
-              <a:t>• Operations runbook: deploy, in-place code update, config-only rescale, teardown</a:t>
-            </a:r>
-          </a:p>
-          <a:p>
-            <a:pPr>
-              <a:spcAft>
-                <a:spcPts val="1200"/>
-              </a:spcAft>
-            </a:pPr>
-            <a:r>
-              <a:rPr sz="1800" b="0">
-                <a:solidFill>
-                  <a:srgbClr val="0B0B0B"/>
-                </a:solidFill>
-              </a:rPr>
-              <a:t>• Demo cost ≈ $1/hour while running; destroyed when not in use</a:t>
-            </a:r>
-          </a:p>
-          <a:p>
-            <a:pPr>
-              <a:spcAft>
-                <a:spcPts val="1200"/>
-              </a:spcAft>
-            </a:pPr>
-            <a:r>
-              <a:rPr sz="1800" b="1">
+              <a:rPr sz="1600" b="0">
                 <a:solidFill>
                   <a:srgbClr val="008300"/>
                 </a:solidFill>
               </a:rPr>
-              <a:t>• Status: DEPLOYED and load-tested on AWS — all cases green, scaling ladder measured, then torn down cleanly</a:t>
+              <a:t>• Price storm result reproduced: 10,000 price updates/sec in, ~10 conflated updates/sec out, trades unaffected</a:t>
             </a:r>
           </a:p>
         </p:txBody>

--- a/docs/flink-demo-exec-briefing.pptx
+++ b/docs/flink-demo-exec-briefing.pptx
@@ -4247,7 +4247,7 @@
                   <a:srgbClr val="0B0B0B"/>
                 </a:solidFill>
               </a:rPr>
-              <a:t>• Two validated deployment targets — choose by ops model: AWS Managed Flink (explicit control, custom metrics) vs Confluent Cloud (serverless SQL, ~25% cheaper at sustained high volume)</a:t>
+              <a:t>• Two validated deployment targets — choose by ops model: AWS Managed Flink (explicit control, custom metrics) vs Confluent Cloud (serverless SQL, ~40% cheaper at sustained high volume)</a:t>
             </a:r>
           </a:p>
           <a:p>
@@ -8138,7 +8138,7 @@
                             <a:srgbClr val="0B0B0B"/>
                           </a:solidFill>
                         </a:rPr>
-                        <a:t>Est. monthly cost, peak volume</a:t>
+                        <a:t>Est. monthly cost, same 110k msgs/sec job</a:t>
                       </a:r>
                     </a:p>
                   </a:txBody>
@@ -8180,7 +8180,7 @@
                             <a:srgbClr val="0B0B0B"/>
                           </a:solidFill>
                         </a:rPr>
-                        <a:t>~ $4,500</a:t>
+                        <a:t>~ $3,500</a:t>
                       </a:r>
                     </a:p>
                   </a:txBody>

--- a/docs/flink-demo-exec-briefing.pptx
+++ b/docs/flink-demo-exec-briefing.pptx
@@ -8073,7 +8073,7 @@
                             <a:srgbClr val="0B0B0B"/>
                           </a:solidFill>
                         </a:rPr>
-                        <a:t>Est. monthly cost, normal load</a:t>
+                        <a:t>Est. monthly cost, under ~10k msgs/sec</a:t>
                       </a:r>
                     </a:p>
                   </a:txBody>

--- a/docs/flink-demo-exec-briefing.pptx
+++ b/docs/flink-demo-exec-briefing.pptx
@@ -16,6 +16,7 @@
     <p:sldId id="264" r:id="rId15"/>
     <p:sldId id="265" r:id="rId16"/>
     <p:sldId id="266" r:id="rId17"/>
+    <p:sldId id="267" r:id="rId18"/>
   </p:sldIdLst>
   <p:sldSz cx="12191695" cy="6858000" type="screen4x3"/>
   <p:notesSz cx="6858000" cy="9144000"/>
@@ -3430,7 +3431,7 @@
                   <a:srgbClr val="0B0B0B"/>
                 </a:solidFill>
               </a:rPr>
-              <a:t>What it took to build</a:t>
+              <a:t>Path to production — AWS ready today</a:t>
             </a:r>
           </a:p>
         </p:txBody>
@@ -3506,320 +3507,20 @@
                   <a:srgbClr val="52514E"/>
                 </a:solidFill>
               </a:rPr>
-              <a:t>AI-assisted engineering with review gates</a:t>
-            </a:r>
-          </a:p>
-        </p:txBody>
-      </p:sp>
-      <p:sp>
-        <p:nvSpPr>
-          <p:cNvPr id="5" name="Rounded Rectangle 4"/>
-          <p:cNvSpPr/>
-          <p:nvPr/>
-        </p:nvSpPr>
-        <p:spPr>
-          <a:xfrm>
-            <a:off x="640080" y="1920240"/>
-            <a:ext cx="2560320" cy="1828800"/>
-          </a:xfrm>
-          <a:prstGeom prst="roundRect">
-            <a:avLst/>
-          </a:prstGeom>
-          <a:solidFill>
-            <a:srgbClr val="F0EFEC"/>
-          </a:solidFill>
-          <a:ln w="12700">
-            <a:solidFill>
-              <a:srgbClr val="2A78D6"/>
-            </a:solidFill>
-          </a:ln>
-        </p:spPr>
-        <p:style>
-          <a:lnRef idx="1">
-            <a:schemeClr val="accent1"/>
-          </a:lnRef>
-          <a:fillRef idx="3">
-            <a:schemeClr val="accent1"/>
-          </a:fillRef>
-          <a:effectRef idx="2">
-            <a:schemeClr val="accent1"/>
-          </a:effectRef>
-          <a:fontRef idx="minor">
-            <a:schemeClr val="lt1"/>
-          </a:fontRef>
-        </p:style>
-        <p:txBody>
-          <a:bodyPr rtlCol="0" anchor="ctr"/>
-          <a:lstStyle/>
-          <a:p>
-            <a:pPr algn="ctr"/>
-            <a:r>
-              <a:rPr sz="3400" b="1">
-                <a:solidFill>
-                  <a:srgbClr val="2A78D6"/>
-                </a:solidFill>
-              </a:rPr>
-              <a:t>1 day</a:t>
-            </a:r>
-          </a:p>
-          <a:p>
-            <a:pPr algn="ctr"/>
-            <a:r>
-              <a:rPr sz="1300">
-                <a:solidFill>
-                  <a:srgbClr val="52514E"/>
-                </a:solidFill>
-              </a:rPr>
-              <a:t>requirements to</a:t>
-            </a:r>
-          </a:p>
-          <a:p>
-            <a:pPr algn="ctr"/>
-            <a:r>
-              <a:rPr sz="1300">
-                <a:solidFill>
-                  <a:srgbClr val="52514E"/>
-                </a:solidFill>
-              </a:rPr>
-              <a:t>load-tested system</a:t>
-            </a:r>
-          </a:p>
-        </p:txBody>
-      </p:sp>
-      <p:sp>
-        <p:nvSpPr>
-          <p:cNvPr id="6" name="Rounded Rectangle 5"/>
-          <p:cNvSpPr/>
-          <p:nvPr/>
-        </p:nvSpPr>
-        <p:spPr>
-          <a:xfrm>
-            <a:off x="3474720" y="1920240"/>
-            <a:ext cx="2560320" cy="1828800"/>
-          </a:xfrm>
-          <a:prstGeom prst="roundRect">
-            <a:avLst/>
-          </a:prstGeom>
-          <a:solidFill>
-            <a:srgbClr val="F0EFEC"/>
-          </a:solidFill>
-          <a:ln w="12700">
-            <a:solidFill>
-              <a:srgbClr val="2A78D6"/>
-            </a:solidFill>
-          </a:ln>
-        </p:spPr>
-        <p:style>
-          <a:lnRef idx="1">
-            <a:schemeClr val="accent1"/>
-          </a:lnRef>
-          <a:fillRef idx="3">
-            <a:schemeClr val="accent1"/>
-          </a:fillRef>
-          <a:effectRef idx="2">
-            <a:schemeClr val="accent1"/>
-          </a:effectRef>
-          <a:fontRef idx="minor">
-            <a:schemeClr val="lt1"/>
-          </a:fontRef>
-        </p:style>
-        <p:txBody>
-          <a:bodyPr rtlCol="0" anchor="ctr"/>
-          <a:lstStyle/>
-          <a:p>
-            <a:pPr algn="ctr"/>
-            <a:r>
-              <a:rPr sz="3400" b="1">
-                <a:solidFill>
-                  <a:srgbClr val="2A78D6"/>
-                </a:solidFill>
-              </a:rPr>
-              <a:t>8 prompts</a:t>
-            </a:r>
-          </a:p>
-          <a:p>
-            <a:pPr algn="ctr"/>
-            <a:r>
-              <a:rPr sz="1300">
-                <a:solidFill>
-                  <a:srgbClr val="52514E"/>
-                </a:solidFill>
-              </a:rPr>
-              <a:t>drove all eight</a:t>
-            </a:r>
-          </a:p>
-          <a:p>
-            <a:pPr algn="ctr"/>
-            <a:r>
-              <a:rPr sz="1300">
-                <a:solidFill>
-                  <a:srgbClr val="52514E"/>
-                </a:solidFill>
-              </a:rPr>
-              <a:t>phases of work</a:t>
-            </a:r>
-          </a:p>
-        </p:txBody>
-      </p:sp>
-      <p:sp>
-        <p:nvSpPr>
-          <p:cNvPr id="7" name="Rounded Rectangle 6"/>
-          <p:cNvSpPr/>
-          <p:nvPr/>
-        </p:nvSpPr>
-        <p:spPr>
-          <a:xfrm>
-            <a:off x="6309360" y="1920240"/>
-            <a:ext cx="2560320" cy="1828800"/>
-          </a:xfrm>
-          <a:prstGeom prst="roundRect">
-            <a:avLst/>
-          </a:prstGeom>
-          <a:solidFill>
-            <a:srgbClr val="F0EFEC"/>
-          </a:solidFill>
-          <a:ln w="12700">
-            <a:solidFill>
-              <a:srgbClr val="2A78D6"/>
-            </a:solidFill>
-          </a:ln>
-        </p:spPr>
-        <p:style>
-          <a:lnRef idx="1">
-            <a:schemeClr val="accent1"/>
-          </a:lnRef>
-          <a:fillRef idx="3">
-            <a:schemeClr val="accent1"/>
-          </a:fillRef>
-          <a:effectRef idx="2">
-            <a:schemeClr val="accent1"/>
-          </a:effectRef>
-          <a:fontRef idx="minor">
-            <a:schemeClr val="lt1"/>
-          </a:fontRef>
-        </p:style>
-        <p:txBody>
-          <a:bodyPr rtlCol="0" anchor="ctr"/>
-          <a:lstStyle/>
-          <a:p>
-            <a:pPr algn="ctr"/>
-            <a:r>
-              <a:rPr sz="3400" b="1">
-                <a:solidFill>
-                  <a:srgbClr val="2A78D6"/>
-                </a:solidFill>
-              </a:rPr>
-              <a:t>≈ $430</a:t>
-            </a:r>
-          </a:p>
-          <a:p>
-            <a:pPr algn="ctr"/>
-            <a:r>
-              <a:rPr sz="1300">
-                <a:solidFill>
-                  <a:srgbClr val="52514E"/>
-                </a:solidFill>
-              </a:rPr>
-              <a:t>metered AI compute</a:t>
-            </a:r>
-          </a:p>
-          <a:p>
-            <a:pPr algn="ctr"/>
-            <a:r>
-              <a:rPr sz="1300">
-                <a:solidFill>
-                  <a:srgbClr val="52514E"/>
-                </a:solidFill>
-              </a:rPr>
-              <a:t>(included in subscription)</a:t>
-            </a:r>
-          </a:p>
-        </p:txBody>
-      </p:sp>
-      <p:sp>
-        <p:nvSpPr>
-          <p:cNvPr id="8" name="Rounded Rectangle 7"/>
-          <p:cNvSpPr/>
-          <p:nvPr/>
-        </p:nvSpPr>
-        <p:spPr>
-          <a:xfrm>
-            <a:off x="9144000" y="1920240"/>
-            <a:ext cx="2560320" cy="1828800"/>
-          </a:xfrm>
-          <a:prstGeom prst="roundRect">
-            <a:avLst/>
-          </a:prstGeom>
-          <a:solidFill>
-            <a:srgbClr val="F0EFEC"/>
-          </a:solidFill>
-          <a:ln w="12700">
-            <a:solidFill>
-              <a:srgbClr val="2A78D6"/>
-            </a:solidFill>
-          </a:ln>
-        </p:spPr>
-        <p:style>
-          <a:lnRef idx="1">
-            <a:schemeClr val="accent1"/>
-          </a:lnRef>
-          <a:fillRef idx="3">
-            <a:schemeClr val="accent1"/>
-          </a:fillRef>
-          <a:effectRef idx="2">
-            <a:schemeClr val="accent1"/>
-          </a:effectRef>
-          <a:fontRef idx="minor">
-            <a:schemeClr val="lt1"/>
-          </a:fontRef>
-        </p:style>
-        <p:txBody>
-          <a:bodyPr rtlCol="0" anchor="ctr"/>
-          <a:lstStyle/>
-          <a:p>
-            <a:pPr algn="ctr"/>
-            <a:r>
-              <a:rPr sz="3400" b="1">
-                <a:solidFill>
-                  <a:srgbClr val="2A78D6"/>
-                </a:solidFill>
-              </a:rPr>
-              <a:t>15 finds</a:t>
-            </a:r>
-          </a:p>
-          <a:p>
-            <a:pPr algn="ctr"/>
-            <a:r>
-              <a:rPr sz="1300">
-                <a:solidFill>
-                  <a:srgbClr val="52514E"/>
-                </a:solidFill>
-              </a:rPr>
-              <a:t>6 bugs, 1 design flaw,</a:t>
-            </a:r>
-          </a:p>
-          <a:p>
-            <a:pPr algn="ctr"/>
-            <a:r>
-              <a:rPr sz="1300">
-                <a:solidFill>
-                  <a:srgbClr val="52514E"/>
-                </a:solidFill>
-              </a:rPr>
-              <a:t>8 deploy gotchas — pre-prod</a:t>
-            </a:r>
-          </a:p>
-        </p:txBody>
-      </p:sp>
-      <p:sp>
-        <p:nvSpPr>
-          <p:cNvPr id="9" name="TextBox 8"/>
+              <a:t>Full infrastructure-as-code, validated; one command to deploy</a:t>
+            </a:r>
+          </a:p>
+        </p:txBody>
+      </p:sp>
+      <p:sp>
+        <p:nvSpPr>
+          <p:cNvPr id="5" name="TextBox 4"/>
           <p:cNvSpPr txBox="1"/>
           <p:nvPr/>
         </p:nvSpPr>
         <p:spPr>
           <a:xfrm>
-            <a:off x="640080" y="4297680"/>
+            <a:off x="640080" y="1737360"/>
             <a:ext cx="10881360" cy="4754880"/>
           </a:xfrm>
           <a:prstGeom prst="rect">
@@ -3835,46 +3536,91 @@
           <a:p>
             <a:pPr>
               <a:spcAft>
-                <a:spcPts val="1000"/>
+                <a:spcPts val="1200"/>
               </a:spcAft>
             </a:pPr>
             <a:r>
-              <a:rPr sz="1700" b="1">
-                <a:solidFill>
-                  <a:srgbClr val="0B0B0B"/>
-                </a:solidFill>
-              </a:rPr>
-              <a:t>• Quality came from the process: plan first, review each outcome, make the system prove itself</a:t>
+              <a:rPr sz="1800" b="0">
+                <a:solidFill>
+                  <a:srgbClr val="0B0B0B"/>
+                </a:solidFill>
+              </a:rPr>
+              <a:t>• Terraform stack complete: MSK Serverless (Kafka) + Amazon Managed Service for Apache Flink + generator on Fargate + CloudWatch dashboard</a:t>
             </a:r>
           </a:p>
           <a:p>
             <a:pPr>
               <a:spcAft>
-                <a:spcPts val="1000"/>
+                <a:spcPts val="1200"/>
               </a:spcAft>
             </a:pPr>
             <a:r>
-              <a:rPr sz="1700" b="0">
-                <a:solidFill>
-                  <a:srgbClr val="0B0B0B"/>
-                </a:solidFill>
-              </a:rPr>
-              <a:t>• Bugs caught included the kind that bite in production: dependency clashes, silent metric mismatches, replay semantics</a:t>
+              <a:rPr sz="1800" b="1">
+                <a:solidFill>
+                  <a:srgbClr val="0B0B0B"/>
+                </a:solidFill>
+              </a:rPr>
+              <a:t>• The exact same application jar runs on AWS — every environment difference is configuration</a:t>
             </a:r>
           </a:p>
           <a:p>
             <a:pPr>
               <a:spcAft>
-                <a:spcPts val="1000"/>
+                <a:spcPts val="1200"/>
               </a:spcAft>
             </a:pPr>
             <a:r>
-              <a:rPr sz="1700" b="0">
-                <a:solidFill>
-                  <a:srgbClr val="0B0B0B"/>
-                </a:solidFill>
-              </a:rPr>
-              <a:t>• Every prompt, decision, and result is recorded in the repository — fully auditable</a:t>
+              <a:rPr sz="1800" b="0">
+                <a:solidFill>
+                  <a:srgbClr val="0B0B0B"/>
+                </a:solidFill>
+              </a:rPr>
+              <a:t>• Security by default: private VPC, IAM auth to Kafka, least-privilege roles</a:t>
+            </a:r>
+          </a:p>
+          <a:p>
+            <a:pPr>
+              <a:spcAft>
+                <a:spcPts val="1200"/>
+              </a:spcAft>
+            </a:pPr>
+            <a:r>
+              <a:rPr sz="1800" b="0">
+                <a:solidFill>
+                  <a:srgbClr val="0B0B0B"/>
+                </a:solidFill>
+              </a:rPr>
+              <a:t>• Operations runbook: deploy, in-place code update, config-only rescale, teardown</a:t>
+            </a:r>
+          </a:p>
+          <a:p>
+            <a:pPr>
+              <a:spcAft>
+                <a:spcPts val="1200"/>
+              </a:spcAft>
+            </a:pPr>
+            <a:r>
+              <a:rPr sz="1800" b="0">
+                <a:solidFill>
+                  <a:srgbClr val="0B0B0B"/>
+                </a:solidFill>
+              </a:rPr>
+              <a:t>• Demo cost ≈ $1/hour while running; destroyed when not in use</a:t>
+            </a:r>
+          </a:p>
+          <a:p>
+            <a:pPr>
+              <a:spcAft>
+                <a:spcPts val="1200"/>
+              </a:spcAft>
+            </a:pPr>
+            <a:r>
+              <a:rPr sz="1800" b="1">
+                <a:solidFill>
+                  <a:srgbClr val="008300"/>
+                </a:solidFill>
+              </a:rPr>
+              <a:t>• Status: DEPLOYED and load-tested on AWS — all cases green, scaling ladder measured, then torn down cleanly</a:t>
             </a:r>
           </a:p>
         </p:txBody>
@@ -3925,7 +3671,7 @@
                   <a:srgbClr val="0B0B0B"/>
                 </a:solidFill>
               </a:rPr>
-              <a:t>Recommendations &amp; next steps</a:t>
+              <a:t>What it took to build</a:t>
             </a:r>
           </a:p>
         </p:txBody>
@@ -3981,6 +3727,501 @@
         </p:nvSpPr>
         <p:spPr>
           <a:xfrm>
+            <a:off x="548640" y="1143000"/>
+            <a:ext cx="11064240" cy="457200"/>
+          </a:xfrm>
+          <a:prstGeom prst="rect">
+            <a:avLst/>
+          </a:prstGeom>
+          <a:noFill/>
+        </p:spPr>
+        <p:txBody>
+          <a:bodyPr wrap="square">
+            <a:spAutoFit/>
+          </a:bodyPr>
+          <a:lstStyle/>
+          <a:p>
+            <a:r>
+              <a:rPr sz="1500">
+                <a:solidFill>
+                  <a:srgbClr val="52514E"/>
+                </a:solidFill>
+              </a:rPr>
+              <a:t>AI-assisted engineering with review gates</a:t>
+            </a:r>
+          </a:p>
+        </p:txBody>
+      </p:sp>
+      <p:sp>
+        <p:nvSpPr>
+          <p:cNvPr id="5" name="Rounded Rectangle 4"/>
+          <p:cNvSpPr/>
+          <p:nvPr/>
+        </p:nvSpPr>
+        <p:spPr>
+          <a:xfrm>
+            <a:off x="640080" y="1920240"/>
+            <a:ext cx="2560320" cy="1828800"/>
+          </a:xfrm>
+          <a:prstGeom prst="roundRect">
+            <a:avLst/>
+          </a:prstGeom>
+          <a:solidFill>
+            <a:srgbClr val="F0EFEC"/>
+          </a:solidFill>
+          <a:ln w="12700">
+            <a:solidFill>
+              <a:srgbClr val="2A78D6"/>
+            </a:solidFill>
+          </a:ln>
+        </p:spPr>
+        <p:style>
+          <a:lnRef idx="1">
+            <a:schemeClr val="accent1"/>
+          </a:lnRef>
+          <a:fillRef idx="3">
+            <a:schemeClr val="accent1"/>
+          </a:fillRef>
+          <a:effectRef idx="2">
+            <a:schemeClr val="accent1"/>
+          </a:effectRef>
+          <a:fontRef idx="minor">
+            <a:schemeClr val="lt1"/>
+          </a:fontRef>
+        </p:style>
+        <p:txBody>
+          <a:bodyPr rtlCol="0" anchor="ctr"/>
+          <a:lstStyle/>
+          <a:p>
+            <a:pPr algn="ctr"/>
+            <a:r>
+              <a:rPr sz="3400" b="1">
+                <a:solidFill>
+                  <a:srgbClr val="2A78D6"/>
+                </a:solidFill>
+              </a:rPr>
+              <a:t>1 day + epilogue</a:t>
+            </a:r>
+          </a:p>
+          <a:p>
+            <a:pPr algn="ctr"/>
+            <a:r>
+              <a:rPr sz="1300">
+                <a:solidFill>
+                  <a:srgbClr val="52514E"/>
+                </a:solidFill>
+              </a:rPr>
+              <a:t>requirements to a</a:t>
+            </a:r>
+          </a:p>
+          <a:p>
+            <a:pPr algn="ctr"/>
+            <a:r>
+              <a:rPr sz="1300">
+                <a:solidFill>
+                  <a:srgbClr val="52514E"/>
+                </a:solidFill>
+              </a:rPr>
+              <a:t>two-cloud proof</a:t>
+            </a:r>
+          </a:p>
+        </p:txBody>
+      </p:sp>
+      <p:sp>
+        <p:nvSpPr>
+          <p:cNvPr id="6" name="Rounded Rectangle 5"/>
+          <p:cNvSpPr/>
+          <p:nvPr/>
+        </p:nvSpPr>
+        <p:spPr>
+          <a:xfrm>
+            <a:off x="3474720" y="1920240"/>
+            <a:ext cx="2560320" cy="1828800"/>
+          </a:xfrm>
+          <a:prstGeom prst="roundRect">
+            <a:avLst/>
+          </a:prstGeom>
+          <a:solidFill>
+            <a:srgbClr val="F0EFEC"/>
+          </a:solidFill>
+          <a:ln w="12700">
+            <a:solidFill>
+              <a:srgbClr val="2A78D6"/>
+            </a:solidFill>
+          </a:ln>
+        </p:spPr>
+        <p:style>
+          <a:lnRef idx="1">
+            <a:schemeClr val="accent1"/>
+          </a:lnRef>
+          <a:fillRef idx="3">
+            <a:schemeClr val="accent1"/>
+          </a:fillRef>
+          <a:effectRef idx="2">
+            <a:schemeClr val="accent1"/>
+          </a:effectRef>
+          <a:fontRef idx="minor">
+            <a:schemeClr val="lt1"/>
+          </a:fontRef>
+        </p:style>
+        <p:txBody>
+          <a:bodyPr rtlCol="0" anchor="ctr"/>
+          <a:lstStyle/>
+          <a:p>
+            <a:pPr algn="ctr"/>
+            <a:r>
+              <a:rPr sz="3400" b="1">
+                <a:solidFill>
+                  <a:srgbClr val="2A78D6"/>
+                </a:solidFill>
+              </a:rPr>
+              <a:t>9 prompts</a:t>
+            </a:r>
+          </a:p>
+          <a:p>
+            <a:pPr algn="ctr"/>
+            <a:r>
+              <a:rPr sz="1300">
+                <a:solidFill>
+                  <a:srgbClr val="52514E"/>
+                </a:solidFill>
+              </a:rPr>
+              <a:t>drove all nine</a:t>
+            </a:r>
+          </a:p>
+          <a:p>
+            <a:pPr algn="ctr"/>
+            <a:r>
+              <a:rPr sz="1300">
+                <a:solidFill>
+                  <a:srgbClr val="52514E"/>
+                </a:solidFill>
+              </a:rPr>
+              <a:t>phases of work</a:t>
+            </a:r>
+          </a:p>
+        </p:txBody>
+      </p:sp>
+      <p:sp>
+        <p:nvSpPr>
+          <p:cNvPr id="7" name="Rounded Rectangle 6"/>
+          <p:cNvSpPr/>
+          <p:nvPr/>
+        </p:nvSpPr>
+        <p:spPr>
+          <a:xfrm>
+            <a:off x="6309360" y="1920240"/>
+            <a:ext cx="2560320" cy="1828800"/>
+          </a:xfrm>
+          <a:prstGeom prst="roundRect">
+            <a:avLst/>
+          </a:prstGeom>
+          <a:solidFill>
+            <a:srgbClr val="F0EFEC"/>
+          </a:solidFill>
+          <a:ln w="12700">
+            <a:solidFill>
+              <a:srgbClr val="2A78D6"/>
+            </a:solidFill>
+          </a:ln>
+        </p:spPr>
+        <p:style>
+          <a:lnRef idx="1">
+            <a:schemeClr val="accent1"/>
+          </a:lnRef>
+          <a:fillRef idx="3">
+            <a:schemeClr val="accent1"/>
+          </a:fillRef>
+          <a:effectRef idx="2">
+            <a:schemeClr val="accent1"/>
+          </a:effectRef>
+          <a:fontRef idx="minor">
+            <a:schemeClr val="lt1"/>
+          </a:fontRef>
+        </p:style>
+        <p:txBody>
+          <a:bodyPr rtlCol="0" anchor="ctr"/>
+          <a:lstStyle/>
+          <a:p>
+            <a:pPr algn="ctr"/>
+            <a:r>
+              <a:rPr sz="3400" b="1">
+                <a:solidFill>
+                  <a:srgbClr val="2A78D6"/>
+                </a:solidFill>
+              </a:rPr>
+              <a:t>≈ $515</a:t>
+            </a:r>
+          </a:p>
+          <a:p>
+            <a:pPr algn="ctr"/>
+            <a:r>
+              <a:rPr sz="1300">
+                <a:solidFill>
+                  <a:srgbClr val="52514E"/>
+                </a:solidFill>
+              </a:rPr>
+              <a:t>metered AI compute</a:t>
+            </a:r>
+          </a:p>
+          <a:p>
+            <a:pPr algn="ctr"/>
+            <a:r>
+              <a:rPr sz="1300">
+                <a:solidFill>
+                  <a:srgbClr val="52514E"/>
+                </a:solidFill>
+              </a:rPr>
+              <a:t>(flat-rate in practice)</a:t>
+            </a:r>
+          </a:p>
+        </p:txBody>
+      </p:sp>
+      <p:sp>
+        <p:nvSpPr>
+          <p:cNvPr id="8" name="Rounded Rectangle 7"/>
+          <p:cNvSpPr/>
+          <p:nvPr/>
+        </p:nvSpPr>
+        <p:spPr>
+          <a:xfrm>
+            <a:off x="9144000" y="1920240"/>
+            <a:ext cx="2560320" cy="1828800"/>
+          </a:xfrm>
+          <a:prstGeom prst="roundRect">
+            <a:avLst/>
+          </a:prstGeom>
+          <a:solidFill>
+            <a:srgbClr val="F0EFEC"/>
+          </a:solidFill>
+          <a:ln w="12700">
+            <a:solidFill>
+              <a:srgbClr val="2A78D6"/>
+            </a:solidFill>
+          </a:ln>
+        </p:spPr>
+        <p:style>
+          <a:lnRef idx="1">
+            <a:schemeClr val="accent1"/>
+          </a:lnRef>
+          <a:fillRef idx="3">
+            <a:schemeClr val="accent1"/>
+          </a:fillRef>
+          <a:effectRef idx="2">
+            <a:schemeClr val="accent1"/>
+          </a:effectRef>
+          <a:fontRef idx="minor">
+            <a:schemeClr val="lt1"/>
+          </a:fontRef>
+        </p:style>
+        <p:txBody>
+          <a:bodyPr rtlCol="0" anchor="ctr"/>
+          <a:lstStyle/>
+          <a:p>
+            <a:pPr algn="ctr"/>
+            <a:r>
+              <a:rPr sz="3400" b="1">
+                <a:solidFill>
+                  <a:srgbClr val="2A78D6"/>
+                </a:solidFill>
+              </a:rPr>
+              <a:t>26 finds</a:t>
+            </a:r>
+          </a:p>
+          <a:p>
+            <a:pPr algn="ctr"/>
+            <a:r>
+              <a:rPr sz="1300">
+                <a:solidFill>
+                  <a:srgbClr val="52514E"/>
+                </a:solidFill>
+              </a:rPr>
+              <a:t>7 bugs, 1 design flaw,</a:t>
+            </a:r>
+          </a:p>
+          <a:p>
+            <a:pPr algn="ctr"/>
+            <a:r>
+              <a:rPr sz="1300">
+                <a:solidFill>
+                  <a:srgbClr val="52514E"/>
+                </a:solidFill>
+              </a:rPr>
+              <a:t>18 deploy/cleanup gotchas</a:t>
+            </a:r>
+          </a:p>
+        </p:txBody>
+      </p:sp>
+      <p:sp>
+        <p:nvSpPr>
+          <p:cNvPr id="9" name="TextBox 8"/>
+          <p:cNvSpPr txBox="1"/>
+          <p:nvPr/>
+        </p:nvSpPr>
+        <p:spPr>
+          <a:xfrm>
+            <a:off x="640080" y="4297680"/>
+            <a:ext cx="10881360" cy="4754880"/>
+          </a:xfrm>
+          <a:prstGeom prst="rect">
+            <a:avLst/>
+          </a:prstGeom>
+          <a:noFill/>
+        </p:spPr>
+        <p:txBody>
+          <a:bodyPr wrap="square">
+            <a:spAutoFit/>
+          </a:bodyPr>
+          <a:lstStyle/>
+          <a:p>
+            <a:pPr>
+              <a:spcAft>
+                <a:spcPts val="1000"/>
+              </a:spcAft>
+            </a:pPr>
+            <a:r>
+              <a:rPr sz="1700" b="1">
+                <a:solidFill>
+                  <a:srgbClr val="0B0B0B"/>
+                </a:solidFill>
+              </a:rPr>
+              <a:t>• Quality came from the process: plan first, review each outcome, make the system prove itself</a:t>
+            </a:r>
+          </a:p>
+          <a:p>
+            <a:pPr>
+              <a:spcAft>
+                <a:spcPts val="1000"/>
+              </a:spcAft>
+            </a:pPr>
+            <a:r>
+              <a:rPr sz="1700" b="0">
+                <a:solidFill>
+                  <a:srgbClr val="0B0B0B"/>
+                </a:solidFill>
+              </a:rPr>
+              <a:t>• Bugs caught included the kind that bite in production: dependency clashes, silent metric mismatches, replay semantics</a:t>
+            </a:r>
+          </a:p>
+          <a:p>
+            <a:pPr>
+              <a:spcAft>
+                <a:spcPts val="1000"/>
+              </a:spcAft>
+            </a:pPr>
+            <a:r>
+              <a:rPr sz="1700" b="0">
+                <a:solidFill>
+                  <a:srgbClr val="0B0B0B"/>
+                </a:solidFill>
+              </a:rPr>
+              <a:t>• Every prompt, decision, and result is recorded in the repository — fully auditable</a:t>
+            </a:r>
+          </a:p>
+        </p:txBody>
+      </p:sp>
+    </p:spTree>
+  </p:cSld>
+  <p:clrMapOvr>
+    <a:masterClrMapping/>
+  </p:clrMapOvr>
+</p:sld>
+</file>
+
+<file path=ppt/slides/slide12.xml><?xml version="1.0" encoding="utf-8"?>
+<p:sld xmlns:a="http://schemas.openxmlformats.org/drawingml/2006/main" xmlns:p="http://schemas.openxmlformats.org/presentationml/2006/main" xmlns:r="http://schemas.openxmlformats.org/officeDocument/2006/relationships">
+  <p:cSld>
+    <p:spTree>
+      <p:nvGrpSpPr>
+        <p:cNvPr id="1" name=""/>
+        <p:cNvGrpSpPr/>
+        <p:nvPr/>
+      </p:nvGrpSpPr>
+      <p:grpSpPr/>
+      <p:sp>
+        <p:nvSpPr>
+          <p:cNvPr id="2" name="TextBox 1"/>
+          <p:cNvSpPr txBox="1"/>
+          <p:nvPr/>
+        </p:nvSpPr>
+        <p:spPr>
+          <a:xfrm>
+            <a:off x="548640" y="320040"/>
+            <a:ext cx="11064240" cy="914400"/>
+          </a:xfrm>
+          <a:prstGeom prst="rect">
+            <a:avLst/>
+          </a:prstGeom>
+          <a:noFill/>
+        </p:spPr>
+        <p:txBody>
+          <a:bodyPr wrap="square">
+            <a:spAutoFit/>
+          </a:bodyPr>
+          <a:lstStyle/>
+          <a:p>
+            <a:r>
+              <a:rPr sz="3000" b="1">
+                <a:solidFill>
+                  <a:srgbClr val="0B0B0B"/>
+                </a:solidFill>
+              </a:rPr>
+              <a:t>Recommendations &amp; next steps</a:t>
+            </a:r>
+          </a:p>
+        </p:txBody>
+      </p:sp>
+      <p:sp>
+        <p:nvSpPr>
+          <p:cNvPr id="3" name="Rectangle 2"/>
+          <p:cNvSpPr/>
+          <p:nvPr/>
+        </p:nvSpPr>
+        <p:spPr>
+          <a:xfrm>
+            <a:off x="594360" y="1051560"/>
+            <a:ext cx="2011680" cy="50800"/>
+          </a:xfrm>
+          <a:prstGeom prst="rect">
+            <a:avLst/>
+          </a:prstGeom>
+          <a:solidFill>
+            <a:srgbClr val="2A78D6"/>
+          </a:solidFill>
+          <a:ln>
+            <a:noFill/>
+          </a:ln>
+        </p:spPr>
+        <p:style>
+          <a:lnRef idx="1">
+            <a:schemeClr val="accent1"/>
+          </a:lnRef>
+          <a:fillRef idx="3">
+            <a:schemeClr val="accent1"/>
+          </a:fillRef>
+          <a:effectRef idx="2">
+            <a:schemeClr val="accent1"/>
+          </a:effectRef>
+          <a:fontRef idx="minor">
+            <a:schemeClr val="lt1"/>
+          </a:fontRef>
+        </p:style>
+        <p:txBody>
+          <a:bodyPr rtlCol="0" anchor="ctr"/>
+          <a:lstStyle/>
+          <a:p>
+            <a:pPr algn="ctr"/>
+          </a:p>
+        </p:txBody>
+      </p:sp>
+      <p:sp>
+        <p:nvSpPr>
+          <p:cNvPr id="4" name="TextBox 3"/>
+          <p:cNvSpPr txBox="1"/>
+          <p:nvPr/>
+        </p:nvSpPr>
+        <p:spPr>
+          <a:xfrm>
             <a:off x="640080" y="1737360"/>
             <a:ext cx="10881360" cy="4754880"/>
           </a:xfrm>
@@ -4006,7 +4247,7 @@
                   <a:srgbClr val="0B0B0B"/>
                 </a:solidFill>
               </a:rPr>
-              <a:t>• Approve the AWS demo deployment (≈ $1/hour, teardown scripted) — final requirement: Grafana-backed demo on AWS</a:t>
+              <a:t>• Two validated deployment targets — choose by ops model: AWS Managed Flink (explicit control, custom metrics) vs Confluent Cloud (serverless SQL, ~40% cheaper at sustained high volume)</a:t>
             </a:r>
           </a:p>
           <a:p>
@@ -4021,7 +4262,7 @@
                   <a:srgbClr val="0B0B0B"/>
                 </a:solidFill>
               </a:rPr>
-              <a:t>• Re-run the scaling test on AWS with dedicated compute to demonstrate 4-way+ linearity</a:t>
+              <a:t>• Volume proven on both clouds: 110k msgs/sec live on AWS; 232k msgs/sec processing on Confluent</a:t>
             </a:r>
           </a:p>
           <a:p>
@@ -7391,7 +7632,7 @@
                   <a:srgbClr val="0B0B0B"/>
                 </a:solidFill>
               </a:rPr>
-              <a:t>Path to production — AWS ready today</a:t>
+              <a:t>Day two: same pipeline, second cloud</a:t>
             </a:r>
           </a:p>
         </p:txBody>
@@ -7467,20 +7708,502 @@
                   <a:srgbClr val="52514E"/>
                 </a:solidFill>
               </a:rPr>
-              <a:t>Full infrastructure-as-code, validated; one command to deploy</a:t>
-            </a:r>
-          </a:p>
-        </p:txBody>
-      </p:sp>
-      <p:sp>
-        <p:nvSpPr>
-          <p:cNvPr id="5" name="TextBox 4"/>
+              <a:t>Rewritten in Flink SQL on Confluent Cloud — judged by the same validation suite</a:t>
+            </a:r>
+          </a:p>
+        </p:txBody>
+      </p:sp>
+      <p:graphicFrame>
+        <p:nvGraphicFramePr>
+          <p:cNvPr id="5" name="Table 4"/>
+          <p:cNvGraphicFramePr>
+            <a:graphicFrameLocks noGrp="1"/>
+          </p:cNvGraphicFramePr>
+          <p:nvPr/>
+        </p:nvGraphicFramePr>
+        <p:xfrm>
+          <a:off x="640080" y="1645920"/>
+          <a:ext cx="10972800" cy="2560320"/>
+        </p:xfrm>
+        <a:graphic>
+          <a:graphicData uri="http://schemas.openxmlformats.org/drawingml/2006/table">
+            <a:tbl>
+              <a:tblPr firstRow="1" bandRow="1">
+                <a:tableStyleId>{5C22544A-7EE6-4342-B048-85BDC9FD1C3A}</a:tableStyleId>
+              </a:tblPr>
+              <a:tblGrid>
+                <a:gridCol w="4023360"/>
+                <a:gridCol w="3474720"/>
+                <a:gridCol w="3474720"/>
+              </a:tblGrid>
+              <a:tr h="365760">
+                <a:tc>
+                  <a:txBody>
+                    <a:bodyPr wrap="square"/>
+                    <a:lstStyle/>
+                    <a:p>
+                      <a:r>
+                        <a:rPr sz="1400" b="1">
+                          <a:solidFill>
+                            <a:srgbClr val="FFFFFF"/>
+                          </a:solidFill>
+                        </a:rPr>
+                        <a:t/>
+                      </a:r>
+                    </a:p>
+                  </a:txBody>
+                  <a:tcPr marT="45720" marB="45720">
+                    <a:solidFill>
+                      <a:srgbClr val="2A78D6"/>
+                    </a:solidFill>
+                  </a:tcPr>
+                </a:tc>
+                <a:tc>
+                  <a:txBody>
+                    <a:bodyPr wrap="square"/>
+                    <a:lstStyle/>
+                    <a:p>
+                      <a:r>
+                        <a:rPr sz="1400" b="1">
+                          <a:solidFill>
+                            <a:srgbClr val="FFFFFF"/>
+                          </a:solidFill>
+                        </a:rPr>
+                        <a:t>AWS (day 1)</a:t>
+                      </a:r>
+                    </a:p>
+                  </a:txBody>
+                  <a:tcPr marT="45720" marB="45720">
+                    <a:solidFill>
+                      <a:srgbClr val="2A78D6"/>
+                    </a:solidFill>
+                  </a:tcPr>
+                </a:tc>
+                <a:tc>
+                  <a:txBody>
+                    <a:bodyPr wrap="square"/>
+                    <a:lstStyle/>
+                    <a:p>
+                      <a:r>
+                        <a:rPr sz="1400" b="1">
+                          <a:solidFill>
+                            <a:srgbClr val="FFFFFF"/>
+                          </a:solidFill>
+                        </a:rPr>
+                        <a:t>Confluent Cloud (day 2)</a:t>
+                      </a:r>
+                    </a:p>
+                  </a:txBody>
+                  <a:tcPr marT="45720" marB="45720">
+                    <a:solidFill>
+                      <a:srgbClr val="2A78D6"/>
+                    </a:solidFill>
+                  </a:tcPr>
+                </a:tc>
+              </a:tr>
+              <a:tr h="365760">
+                <a:tc>
+                  <a:txBody>
+                    <a:bodyPr wrap="square"/>
+                    <a:lstStyle/>
+                    <a:p>
+                      <a:r>
+                        <a:rPr sz="1400">
+                          <a:solidFill>
+                            <a:srgbClr val="0B0B0B"/>
+                          </a:solidFill>
+                        </a:rPr>
+                        <a:t>Code</a:t>
+                      </a:r>
+                    </a:p>
+                  </a:txBody>
+                  <a:tcPr marT="45720" marB="45720">
+                    <a:solidFill>
+                      <a:srgbClr val="FFFFFF"/>
+                    </a:solidFill>
+                  </a:tcPr>
+                </a:tc>
+                <a:tc>
+                  <a:txBody>
+                    <a:bodyPr wrap="square"/>
+                    <a:lstStyle/>
+                    <a:p>
+                      <a:r>
+                        <a:rPr sz="1400">
+                          <a:solidFill>
+                            <a:srgbClr val="0B0B0B"/>
+                          </a:solidFill>
+                        </a:rPr>
+                        <a:t>~2,000 lines of Java</a:t>
+                      </a:r>
+                    </a:p>
+                  </a:txBody>
+                  <a:tcPr marT="45720" marB="45720">
+                    <a:solidFill>
+                      <a:srgbClr val="FFFFFF"/>
+                    </a:solidFill>
+                  </a:tcPr>
+                </a:tc>
+                <a:tc>
+                  <a:txBody>
+                    <a:bodyPr wrap="square"/>
+                    <a:lstStyle/>
+                    <a:p>
+                      <a:r>
+                        <a:rPr sz="1400">
+                          <a:solidFill>
+                            <a:srgbClr val="0B0B0B"/>
+                          </a:solidFill>
+                        </a:rPr>
+                        <a:t>~200 lines of SQL (6 statements)</a:t>
+                      </a:r>
+                    </a:p>
+                  </a:txBody>
+                  <a:tcPr marT="45720" marB="45720">
+                    <a:solidFill>
+                      <a:srgbClr val="FFFFFF"/>
+                    </a:solidFill>
+                  </a:tcPr>
+                </a:tc>
+              </a:tr>
+              <a:tr h="365760">
+                <a:tc>
+                  <a:txBody>
+                    <a:bodyPr wrap="square"/>
+                    <a:lstStyle/>
+                    <a:p>
+                      <a:r>
+                        <a:rPr sz="1400">
+                          <a:solidFill>
+                            <a:srgbClr val="0B0B0B"/>
+                          </a:solidFill>
+                        </a:rPr>
+                        <a:t>Correctness — 5 independent checks</a:t>
+                      </a:r>
+                    </a:p>
+                  </a:txBody>
+                  <a:tcPr marT="45720" marB="45720">
+                    <a:solidFill>
+                      <a:srgbClr val="F0EFEC"/>
+                    </a:solidFill>
+                  </a:tcPr>
+                </a:tc>
+                <a:tc>
+                  <a:txBody>
+                    <a:bodyPr wrap="square"/>
+                    <a:lstStyle/>
+                    <a:p>
+                      <a:r>
+                        <a:rPr sz="1400">
+                          <a:solidFill>
+                            <a:srgbClr val="0B0B0B"/>
+                          </a:solidFill>
+                        </a:rPr>
+                        <a:t>All pass</a:t>
+                      </a:r>
+                    </a:p>
+                  </a:txBody>
+                  <a:tcPr marT="45720" marB="45720">
+                    <a:solidFill>
+                      <a:srgbClr val="F0EFEC"/>
+                    </a:solidFill>
+                  </a:tcPr>
+                </a:tc>
+                <a:tc>
+                  <a:txBody>
+                    <a:bodyPr wrap="square"/>
+                    <a:lstStyle/>
+                    <a:p>
+                      <a:r>
+                        <a:rPr sz="1400">
+                          <a:solidFill>
+                            <a:srgbClr val="0B0B0B"/>
+                          </a:solidFill>
+                        </a:rPr>
+                        <a:t>All pass — exact to the cent</a:t>
+                      </a:r>
+                    </a:p>
+                  </a:txBody>
+                  <a:tcPr marT="45720" marB="45720">
+                    <a:solidFill>
+                      <a:srgbClr val="F0EFEC"/>
+                    </a:solidFill>
+                  </a:tcPr>
+                </a:tc>
+              </a:tr>
+              <a:tr h="365760">
+                <a:tc>
+                  <a:txBody>
+                    <a:bodyPr wrap="square"/>
+                    <a:lstStyle/>
+                    <a:p>
+                      <a:r>
+                        <a:rPr sz="1400">
+                          <a:solidFill>
+                            <a:srgbClr val="0B0B0B"/>
+                          </a:solidFill>
+                        </a:rPr>
+                        <a:t>Top speed measured</a:t>
+                      </a:r>
+                    </a:p>
+                  </a:txBody>
+                  <a:tcPr marT="45720" marB="45720">
+                    <a:solidFill>
+                      <a:srgbClr val="FFFFFF"/>
+                    </a:solidFill>
+                  </a:tcPr>
+                </a:tc>
+                <a:tc>
+                  <a:txBody>
+                    <a:bodyPr wrap="square"/>
+                    <a:lstStyle/>
+                    <a:p>
+                      <a:r>
+                        <a:rPr sz="1400">
+                          <a:solidFill>
+                            <a:srgbClr val="0B0B0B"/>
+                          </a:solidFill>
+                        </a:rPr>
+                        <a:t>110,000 msgs/sec (12 units)</a:t>
+                      </a:r>
+                    </a:p>
+                  </a:txBody>
+                  <a:tcPr marT="45720" marB="45720">
+                    <a:solidFill>
+                      <a:srgbClr val="FFFFFF"/>
+                    </a:solidFill>
+                  </a:tcPr>
+                </a:tc>
+                <a:tc>
+                  <a:txBody>
+                    <a:bodyPr wrap="square"/>
+                    <a:lstStyle/>
+                    <a:p>
+                      <a:r>
+                        <a:rPr sz="1400">
+                          <a:solidFill>
+                            <a:srgbClr val="0B0B0B"/>
+                          </a:solidFill>
+                        </a:rPr>
+                        <a:t>232,000 msgs/sec (16 units)</a:t>
+                      </a:r>
+                    </a:p>
+                  </a:txBody>
+                  <a:tcPr marT="45720" marB="45720">
+                    <a:solidFill>
+                      <a:srgbClr val="FFFFFF"/>
+                    </a:solidFill>
+                  </a:tcPr>
+                </a:tc>
+              </a:tr>
+              <a:tr h="365760">
+                <a:tc>
+                  <a:txBody>
+                    <a:bodyPr wrap="square"/>
+                    <a:lstStyle/>
+                    <a:p>
+                      <a:r>
+                        <a:rPr sz="1400">
+                          <a:solidFill>
+                            <a:srgbClr val="0B0B0B"/>
+                          </a:solidFill>
+                        </a:rPr>
+                        <a:t>How you scale</a:t>
+                      </a:r>
+                    </a:p>
+                  </a:txBody>
+                  <a:tcPr marT="45720" marB="45720">
+                    <a:solidFill>
+                      <a:srgbClr val="F0EFEC"/>
+                    </a:solidFill>
+                  </a:tcPr>
+                </a:tc>
+                <a:tc>
+                  <a:txBody>
+                    <a:bodyPr wrap="square"/>
+                    <a:lstStyle/>
+                    <a:p>
+                      <a:r>
+                        <a:rPr sz="1400">
+                          <a:solidFill>
+                            <a:srgbClr val="0B0B0B"/>
+                          </a:solidFill>
+                        </a:rPr>
+                        <a:t>Pick unit count by hand</a:t>
+                      </a:r>
+                    </a:p>
+                  </a:txBody>
+                  <a:tcPr marT="45720" marB="45720">
+                    <a:solidFill>
+                      <a:srgbClr val="F0EFEC"/>
+                    </a:solidFill>
+                  </a:tcPr>
+                </a:tc>
+                <a:tc>
+                  <a:txBody>
+                    <a:bodyPr wrap="square"/>
+                    <a:lstStyle/>
+                    <a:p>
+                      <a:r>
+                        <a:rPr sz="1400">
+                          <a:solidFill>
+                            <a:srgbClr val="0B0B0B"/>
+                          </a:solidFill>
+                        </a:rPr>
+                        <a:t>Autoscales up to a cap you set</a:t>
+                      </a:r>
+                    </a:p>
+                  </a:txBody>
+                  <a:tcPr marT="45720" marB="45720">
+                    <a:solidFill>
+                      <a:srgbClr val="F0EFEC"/>
+                    </a:solidFill>
+                  </a:tcPr>
+                </a:tc>
+              </a:tr>
+              <a:tr h="365760">
+                <a:tc>
+                  <a:txBody>
+                    <a:bodyPr wrap="square"/>
+                    <a:lstStyle/>
+                    <a:p>
+                      <a:r>
+                        <a:rPr sz="1400">
+                          <a:solidFill>
+                            <a:srgbClr val="0B0B0B"/>
+                          </a:solidFill>
+                        </a:rPr>
+                        <a:t>Est. monthly cost, under ~10k msgs/sec</a:t>
+                      </a:r>
+                    </a:p>
+                  </a:txBody>
+                  <a:tcPr marT="45720" marB="45720">
+                    <a:solidFill>
+                      <a:srgbClr val="FFFFFF"/>
+                    </a:solidFill>
+                  </a:tcPr>
+                </a:tc>
+                <a:tc>
+                  <a:txBody>
+                    <a:bodyPr wrap="square"/>
+                    <a:lstStyle/>
+                    <a:p>
+                      <a:r>
+                        <a:rPr sz="1400">
+                          <a:solidFill>
+                            <a:srgbClr val="0B0B0B"/>
+                          </a:solidFill>
+                        </a:rPr>
+                        <a:t>~ $1,070</a:t>
+                      </a:r>
+                    </a:p>
+                  </a:txBody>
+                  <a:tcPr marT="45720" marB="45720">
+                    <a:solidFill>
+                      <a:srgbClr val="FFFFFF"/>
+                    </a:solidFill>
+                  </a:tcPr>
+                </a:tc>
+                <a:tc>
+                  <a:txBody>
+                    <a:bodyPr wrap="square"/>
+                    <a:lstStyle/>
+                    <a:p>
+                      <a:r>
+                        <a:rPr sz="1400">
+                          <a:solidFill>
+                            <a:srgbClr val="0B0B0B"/>
+                          </a:solidFill>
+                        </a:rPr>
+                        <a:t>~ $1,010</a:t>
+                      </a:r>
+                    </a:p>
+                  </a:txBody>
+                  <a:tcPr marT="45720" marB="45720">
+                    <a:solidFill>
+                      <a:srgbClr val="FFFFFF"/>
+                    </a:solidFill>
+                  </a:tcPr>
+                </a:tc>
+              </a:tr>
+              <a:tr h="365760">
+                <a:tc>
+                  <a:txBody>
+                    <a:bodyPr wrap="square"/>
+                    <a:lstStyle/>
+                    <a:p>
+                      <a:r>
+                        <a:rPr sz="1400">
+                          <a:solidFill>
+                            <a:srgbClr val="0B0B0B"/>
+                          </a:solidFill>
+                        </a:rPr>
+                        <a:t>Est. monthly cost, same 110k msgs/sec job</a:t>
+                      </a:r>
+                    </a:p>
+                  </a:txBody>
+                  <a:tcPr marT="45720" marB="45720">
+                    <a:solidFill>
+                      <a:srgbClr val="F0EFEC"/>
+                    </a:solidFill>
+                  </a:tcPr>
+                </a:tc>
+                <a:tc>
+                  <a:txBody>
+                    <a:bodyPr wrap="square"/>
+                    <a:lstStyle/>
+                    <a:p>
+                      <a:r>
+                        <a:rPr sz="1400">
+                          <a:solidFill>
+                            <a:srgbClr val="0B0B0B"/>
+                          </a:solidFill>
+                        </a:rPr>
+                        <a:t>~ $6,100</a:t>
+                      </a:r>
+                    </a:p>
+                  </a:txBody>
+                  <a:tcPr marT="45720" marB="45720">
+                    <a:solidFill>
+                      <a:srgbClr val="F0EFEC"/>
+                    </a:solidFill>
+                  </a:tcPr>
+                </a:tc>
+                <a:tc>
+                  <a:txBody>
+                    <a:bodyPr wrap="square"/>
+                    <a:lstStyle/>
+                    <a:p>
+                      <a:r>
+                        <a:rPr sz="1400">
+                          <a:solidFill>
+                            <a:srgbClr val="0B0B0B"/>
+                          </a:solidFill>
+                        </a:rPr>
+                        <a:t>~ $3,500</a:t>
+                      </a:r>
+                    </a:p>
+                  </a:txBody>
+                  <a:tcPr marT="45720" marB="45720">
+                    <a:solidFill>
+                      <a:srgbClr val="F0EFEC"/>
+                    </a:solidFill>
+                  </a:tcPr>
+                </a:tc>
+              </a:tr>
+            </a:tbl>
+          </a:graphicData>
+        </a:graphic>
+      </p:graphicFrame>
+      <p:sp>
+        <p:nvSpPr>
+          <p:cNvPr id="6" name="TextBox 5"/>
           <p:cNvSpPr txBox="1"/>
           <p:nvPr/>
         </p:nvSpPr>
         <p:spPr>
           <a:xfrm>
-            <a:off x="640080" y="1737360"/>
+            <a:off x="640080" y="5120640"/>
             <a:ext cx="10881360" cy="4754880"/>
           </a:xfrm>
           <a:prstGeom prst="rect">
@@ -7496,91 +8219,46 @@
           <a:p>
             <a:pPr>
               <a:spcAft>
-                <a:spcPts val="1200"/>
+                <a:spcPts val="1000"/>
               </a:spcAft>
             </a:pPr>
             <a:r>
-              <a:rPr sz="1800" b="0">
-                <a:solidFill>
-                  <a:srgbClr val="0B0B0B"/>
-                </a:solidFill>
-              </a:rPr>
-              <a:t>• Terraform stack complete: MSK Serverless (Kafka) + Amazon Managed Service for Apache Flink + generator on Fargate + CloudWatch dashboard</a:t>
+              <a:rPr sz="1600" b="1">
+                <a:solidFill>
+                  <a:srgbClr val="0B0B0B"/>
+                </a:solidFill>
+              </a:rPr>
+              <a:t>• Same topics, same JSON, same generator, same tests - only the engine changed</a:t>
             </a:r>
           </a:p>
           <a:p>
             <a:pPr>
               <a:spcAft>
-                <a:spcPts val="1200"/>
+                <a:spcPts val="1000"/>
               </a:spcAft>
             </a:pPr>
             <a:r>
-              <a:rPr sz="1800" b="1">
-                <a:solidFill>
-                  <a:srgbClr val="0B0B0B"/>
-                </a:solidFill>
-              </a:rPr>
-              <a:t>• The exact same application jar runs on AWS — every environment difference is configuration</a:t>
+              <a:rPr sz="1600" b="0">
+                <a:solidFill>
+                  <a:srgbClr val="0B0B0B"/>
+                </a:solidFill>
+              </a:rPr>
+              <a:t>• The validation suite re-derives every number from raw data, so proving a cross-cloud rewrite took an afternoon and ~ $4</a:t>
             </a:r>
           </a:p>
           <a:p>
             <a:pPr>
               <a:spcAft>
-                <a:spcPts val="1200"/>
+                <a:spcPts val="1000"/>
               </a:spcAft>
             </a:pPr>
             <a:r>
-              <a:rPr sz="1800" b="0">
-                <a:solidFill>
-                  <a:srgbClr val="0B0B0B"/>
-                </a:solidFill>
-              </a:rPr>
-              <a:t>• Security by default: private VPC, IAM auth to Kafka, least-privilege roles</a:t>
-            </a:r>
-          </a:p>
-          <a:p>
-            <a:pPr>
-              <a:spcAft>
-                <a:spcPts val="1200"/>
-              </a:spcAft>
-            </a:pPr>
-            <a:r>
-              <a:rPr sz="1800" b="0">
-                <a:solidFill>
-                  <a:srgbClr val="0B0B0B"/>
-                </a:solidFill>
-              </a:rPr>
-              <a:t>• Operations runbook: deploy, in-place code update, config-only rescale, teardown</a:t>
-            </a:r>
-          </a:p>
-          <a:p>
-            <a:pPr>
-              <a:spcAft>
-                <a:spcPts val="1200"/>
-              </a:spcAft>
-            </a:pPr>
-            <a:r>
-              <a:rPr sz="1800" b="0">
-                <a:solidFill>
-                  <a:srgbClr val="0B0B0B"/>
-                </a:solidFill>
-              </a:rPr>
-              <a:t>• Demo cost ≈ $1/hour while running; destroyed when not in use</a:t>
-            </a:r>
-          </a:p>
-          <a:p>
-            <a:pPr>
-              <a:spcAft>
-                <a:spcPts val="1200"/>
-              </a:spcAft>
-            </a:pPr>
-            <a:r>
-              <a:rPr sz="1800" b="1">
+              <a:rPr sz="1600" b="0">
                 <a:solidFill>
                   <a:srgbClr val="008300"/>
                 </a:solidFill>
               </a:rPr>
-              <a:t>• Status: DEPLOYED and load-tested on AWS — all cases green, scaling ladder measured, then torn down cleanly</a:t>
+              <a:t>• Price storm result reproduced: 10,000 price updates/sec in, ~10 conflated updates/sec out, trades unaffected</a:t>
             </a:r>
           </a:p>
         </p:txBody>

--- a/docs/flink-demo-exec-briefing.pptx
+++ b/docs/flink-demo-exec-briefing.pptx
@@ -4262,7 +4262,7 @@
                   <a:srgbClr val="0B0B0B"/>
                 </a:solidFill>
               </a:rPr>
-              <a:t>• Volume proven on both clouds: 110k msgs/sec live on AWS; 232k msgs/sec processing on Confluent</a:t>
+              <a:t>• Volume proven on both clouds, same method: AWS 757k msgs/sec tuned (linear 2x from a 10-unit floor); Confluent 232.7k</a:t>
             </a:r>
           </a:p>
           <a:p>
@@ -7723,7 +7723,7 @@
         </p:nvGraphicFramePr>
         <p:xfrm>
           <a:off x="640080" y="1645920"/>
-          <a:ext cx="10972800" cy="2560320"/>
+          <a:ext cx="10972800" cy="2926080"/>
         </p:xfrm>
         <a:graphic>
           <a:graphicData uri="http://schemas.openxmlformats.org/drawingml/2006/table">
@@ -7943,7 +7943,7 @@
                             <a:srgbClr val="0B0B0B"/>
                           </a:solidFill>
                         </a:rPr>
-                        <a:t>Top speed measured</a:t>
+                        <a:t>Top speed, same method (day 3 tuned)</a:t>
                       </a:r>
                     </a:p>
                   </a:txBody>
@@ -7964,7 +7964,7 @@
                             <a:srgbClr val="0B0B0B"/>
                           </a:solidFill>
                         </a:rPr>
-                        <a:t>110,000 msgs/sec (12 units)</a:t>
+                        <a:t>757,600 msgs/sec (20 units)</a:t>
                       </a:r>
                     </a:p>
                   </a:txBody>
@@ -7985,7 +7985,7 @@
                             <a:srgbClr val="0B0B0B"/>
                           </a:solidFill>
                         </a:rPr>
-                        <a:t>232,000 msgs/sec (16 units)</a:t>
+                        <a:t>232,700 msgs/sec (16 units)</a:t>
                       </a:r>
                     </a:p>
                   </a:txBody>
@@ -8187,6 +8187,71 @@
                   <a:tcPr marT="45720" marB="45720">
                     <a:solidFill>
                       <a:srgbClr val="F0EFEC"/>
+                    </a:solidFill>
+                  </a:tcPr>
+                </a:tc>
+              </a:tr>
+              <a:tr h="365760">
+                <a:tc>
+                  <a:txBody>
+                    <a:bodyPr wrap="square"/>
+                    <a:lstStyle/>
+                    <a:p>
+                      <a:r>
+                        <a:rPr sz="1400">
+                          <a:solidFill>
+                            <a:srgbClr val="0B0B0B"/>
+                          </a:solidFill>
+                        </a:rPr>
+                        <a:t>Compute $/hr to match the 232.7k peak (day 3)</a:t>
+                      </a:r>
+                    </a:p>
+                  </a:txBody>
+                  <a:tcPr marT="45720" marB="45720">
+                    <a:solidFill>
+                      <a:srgbClr val="FFFFFF"/>
+                    </a:solidFill>
+                  </a:tcPr>
+                </a:tc>
+                <a:tc>
+                  <a:txBody>
+                    <a:bodyPr wrap="square"/>
+                    <a:lstStyle/>
+                    <a:p>
+                      <a:r>
+                        <a:rPr sz="1400">
+                          <a:solidFill>
+                            <a:srgbClr val="0B0B0B"/>
+                          </a:solidFill>
+                        </a:rPr>
+                        <a:t>$1.21 (10 units)</a:t>
+                      </a:r>
+                    </a:p>
+                  </a:txBody>
+                  <a:tcPr marT="45720" marB="45720">
+                    <a:solidFill>
+                      <a:srgbClr val="FFFFFF"/>
+                    </a:solidFill>
+                  </a:tcPr>
+                </a:tc>
+                <a:tc>
+                  <a:txBody>
+                    <a:bodyPr wrap="square"/>
+                    <a:lstStyle/>
+                    <a:p>
+                      <a:r>
+                        <a:rPr sz="1400">
+                          <a:solidFill>
+                            <a:srgbClr val="0B0B0B"/>
+                          </a:solidFill>
+                        </a:rPr>
+                        <a:t>$3.36 (16 units)</a:t>
+                      </a:r>
+                    </a:p>
+                  </a:txBody>
+                  <a:tcPr marT="45720" marB="45720">
+                    <a:solidFill>
+                      <a:srgbClr val="FFFFFF"/>
                     </a:solidFill>
                   </a:tcPr>
                 </a:tc>

--- a/docs/flink-demo-exec-briefing.pptx
+++ b/docs/flink-demo-exec-briefing.pptx
@@ -8203,7 +8203,7 @@
                             <a:srgbClr val="0B0B0B"/>
                           </a:solidFill>
                         </a:rPr>
-                        <a:t>Compute $/hr to match the 232.7k peak (day 3)</a:t>
+                        <a:t>Infra $/hr to match the 232.7k peak (day 3)</a:t>
                       </a:r>
                     </a:p>
                   </a:txBody>
@@ -8224,7 +8224,7 @@
                             <a:srgbClr val="0B0B0B"/>
                           </a:solidFill>
                         </a:rPr>
-                        <a:t>$1.21 (10 units)</a:t>
+                        <a:t>~$2.39 (10 units + Kafka base/partitions)</a:t>
                       </a:r>
                     </a:p>
                   </a:txBody>
@@ -8245,7 +8245,7 @@
                             <a:srgbClr val="0B0B0B"/>
                           </a:solidFill>
                         </a:rPr>
-                        <a:t>$3.36 (16 units)</a:t>
+                        <a:t>~$3.9 (16 units + usage; no partition fees)</a:t>
                       </a:r>
                     </a:p>
                   </a:txBody>

--- a/docs/flink-demo-exec-briefing.pptx
+++ b/docs/flink-demo-exec-briefing.pptx
@@ -4247,7 +4247,7 @@
                   <a:srgbClr val="0B0B0B"/>
                 </a:solidFill>
               </a:rPr>
-              <a:t>• Two validated deployment targets — choose by ops model: AWS Managed Flink (explicit control, custom metrics) vs Confluent Cloud (serverless SQL, ~40% cheaper at sustained high volume)</a:t>
+              <a:t>• Two validated deployment targets: AWS Managed Flink for latency-critical and high-volume work; Confluent Cloud SQL where multi-second freshness is fine and speed-to-build wins</a:t>
             </a:r>
           </a:p>
           <a:p>
@@ -4262,7 +4262,7 @@
                   <a:srgbClr val="0B0B0B"/>
                 </a:solidFill>
               </a:rPr>
-              <a:t>• Volume proven on both clouds, same method: AWS 757k msgs/sec tuned (linear 2x from a 10-unit floor); Confluent 232.7k</a:t>
+              <a:t>• Volume and stability proven on both, same method: AWS 757k msgs/sec peak, 28 min at 232,705/sec with deviation of 30; Confluent 386k peak single-statement</a:t>
             </a:r>
           </a:p>
           <a:p>
@@ -7632,7 +7632,7 @@
                   <a:srgbClr val="0B0B0B"/>
                 </a:solidFill>
               </a:rPr>
-              <a:t>Day two: same pipeline, second cloud</a:t>
+              <a:t>Two clouds, one test suite — the measured scoreboard</a:t>
             </a:r>
           </a:p>
         </p:txBody>
@@ -7708,7 +7708,7 @@
                   <a:srgbClr val="52514E"/>
                 </a:solidFill>
               </a:rPr>
-              <a:t>Rewritten in Flink SQL on Confluent Cloud — judged by the same validation suite</a:t>
+              <a:t>Same requirements, same data, same five correctness checks; deployable configs only</a:t>
             </a:r>
           </a:p>
         </p:txBody>
@@ -7732,9 +7732,9 @@
                 <a:tableStyleId>{5C22544A-7EE6-4342-B048-85BDC9FD1C3A}</a:tableStyleId>
               </a:tblPr>
               <a:tblGrid>
-                <a:gridCol w="4023360"/>
-                <a:gridCol w="3474720"/>
-                <a:gridCol w="3474720"/>
+                <a:gridCol w="3840480"/>
+                <a:gridCol w="3566160"/>
+                <a:gridCol w="3566160"/>
               </a:tblGrid>
               <a:tr h="365760">
                 <a:tc>
@@ -7743,7 +7743,7 @@
                     <a:lstStyle/>
                     <a:p>
                       <a:r>
-                        <a:rPr sz="1400" b="1">
+                        <a:rPr sz="1300" b="1">
                           <a:solidFill>
                             <a:srgbClr val="FFFFFF"/>
                           </a:solidFill>
@@ -7764,12 +7764,12 @@
                     <a:lstStyle/>
                     <a:p>
                       <a:r>
-                        <a:rPr sz="1400" b="1">
+                        <a:rPr sz="1300" b="1">
                           <a:solidFill>
                             <a:srgbClr val="FFFFFF"/>
                           </a:solidFill>
                         </a:rPr>
-                        <a:t>AWS (day 1)</a:t>
+                        <a:t>AWS (Managed Flink + MSK)</a:t>
                       </a:r>
                     </a:p>
                   </a:txBody>
@@ -7785,12 +7785,12 @@
                     <a:lstStyle/>
                     <a:p>
                       <a:r>
-                        <a:rPr sz="1400" b="1">
+                        <a:rPr sz="1300" b="1">
                           <a:solidFill>
                             <a:srgbClr val="FFFFFF"/>
                           </a:solidFill>
                         </a:rPr>
-                        <a:t>Confluent Cloud (day 2)</a:t>
+                        <a:t>Confluent Cloud (Flink SQL)</a:t>
                       </a:r>
                     </a:p>
                   </a:txBody>
@@ -7808,12 +7808,12 @@
                     <a:lstStyle/>
                     <a:p>
                       <a:r>
-                        <a:rPr sz="1400">
+                        <a:rPr sz="1300">
                           <a:solidFill>
                             <a:srgbClr val="0B0B0B"/>
                           </a:solidFill>
                         </a:rPr>
-                        <a:t>Code</a:t>
+                        <a:t>Correctness - 5 independent checks</a:t>
                       </a:r>
                     </a:p>
                   </a:txBody>
@@ -7829,12 +7829,12 @@
                     <a:lstStyle/>
                     <a:p>
                       <a:r>
-                        <a:rPr sz="1400">
+                        <a:rPr sz="1300">
                           <a:solidFill>
                             <a:srgbClr val="0B0B0B"/>
                           </a:solidFill>
                         </a:rPr>
-                        <a:t>~2,000 lines of Java</a:t>
+                        <a:t>All pass, exact to the cent</a:t>
                       </a:r>
                     </a:p>
                   </a:txBody>
@@ -7850,12 +7850,12 @@
                     <a:lstStyle/>
                     <a:p>
                       <a:r>
-                        <a:rPr sz="1400">
+                        <a:rPr sz="1300">
                           <a:solidFill>
                             <a:srgbClr val="0B0B0B"/>
                           </a:solidFill>
                         </a:rPr>
-                        <a:t>~200 lines of SQL (6 statements)</a:t>
+                        <a:t>All pass, exact to the cent</a:t>
                       </a:r>
                     </a:p>
                   </a:txBody>
@@ -7873,12 +7873,12 @@
                     <a:lstStyle/>
                     <a:p>
                       <a:r>
-                        <a:rPr sz="1400">
+                        <a:rPr sz="1300">
                           <a:solidFill>
                             <a:srgbClr val="0B0B0B"/>
                           </a:solidFill>
                         </a:rPr>
-                        <a:t>Correctness — 5 independent checks</a:t>
+                        <a:t>End-to-end latency (live)</a:t>
                       </a:r>
                     </a:p>
                   </a:txBody>
@@ -7894,12 +7894,12 @@
                     <a:lstStyle/>
                     <a:p>
                       <a:r>
-                        <a:rPr sz="1400">
+                        <a:rPr sz="1300">
                           <a:solidFill>
                             <a:srgbClr val="0B0B0B"/>
                           </a:solidFill>
                         </a:rPr>
-                        <a:t>All pass</a:t>
+                        <a:t>p50 267 ms  /  p99 495 ms</a:t>
                       </a:r>
                     </a:p>
                   </a:txBody>
@@ -7915,12 +7915,12 @@
                     <a:lstStyle/>
                     <a:p>
                       <a:r>
-                        <a:rPr sz="1400">
+                        <a:rPr sz="1300">
                           <a:solidFill>
                             <a:srgbClr val="0B0B0B"/>
                           </a:solidFill>
                         </a:rPr>
-                        <a:t>All pass — exact to the cent</a:t>
+                        <a:t>p50 33 s  /  p99 44 s</a:t>
                       </a:r>
                     </a:p>
                   </a:txBody>
@@ -7938,12 +7938,12 @@
                     <a:lstStyle/>
                     <a:p>
                       <a:r>
-                        <a:rPr sz="1400">
+                        <a:rPr sz="1300">
                           <a:solidFill>
                             <a:srgbClr val="0B0B0B"/>
                           </a:solidFill>
                         </a:rPr>
-                        <a:t>Top speed, same method (day 3 tuned)</a:t>
+                        <a:t>Full pipeline throughput</a:t>
                       </a:r>
                     </a:p>
                   </a:txBody>
@@ -7959,12 +7959,12 @@
                     <a:lstStyle/>
                     <a:p>
                       <a:r>
-                        <a:rPr sz="1400">
+                        <a:rPr sz="1300">
                           <a:solidFill>
                             <a:srgbClr val="0B0B0B"/>
                           </a:solidFill>
                         </a:rPr>
-                        <a:t>757,600 msgs/sec (20 units)</a:t>
+                        <a:t>435,000 msgs/sec</a:t>
                       </a:r>
                     </a:p>
                   </a:txBody>
@@ -7980,12 +7980,12 @@
                     <a:lstStyle/>
                     <a:p>
                       <a:r>
-                        <a:rPr sz="1400">
+                        <a:rPr sz="1300">
                           <a:solidFill>
                             <a:srgbClr val="0B0B0B"/>
                           </a:solidFill>
                         </a:rPr>
-                        <a:t>232,700 msgs/sec (16 units)</a:t>
+                        <a:t>127,000 msgs/sec</a:t>
                       </a:r>
                     </a:p>
                   </a:txBody>
@@ -8003,12 +8003,12 @@
                     <a:lstStyle/>
                     <a:p>
                       <a:r>
-                        <a:rPr sz="1400">
+                        <a:rPr sz="1300">
                           <a:solidFill>
                             <a:srgbClr val="0B0B0B"/>
                           </a:solidFill>
                         </a:rPr>
-                        <a:t>How you scale</a:t>
+                        <a:t>Sustained 28 min</a:t>
                       </a:r>
                     </a:p>
                   </a:txBody>
@@ -8024,12 +8024,12 @@
                     <a:lstStyle/>
                     <a:p>
                       <a:r>
-                        <a:rPr sz="1400">
+                        <a:rPr sz="1300">
                           <a:solidFill>
                             <a:srgbClr val="0B0B0B"/>
                           </a:solidFill>
                         </a:rPr>
-                        <a:t>Pick unit count by hand</a:t>
+                        <a:t>232,705/sec, deviation 30/sec</a:t>
                       </a:r>
                     </a:p>
                   </a:txBody>
@@ -8045,12 +8045,12 @@
                     <a:lstStyle/>
                     <a:p>
                       <a:r>
-                        <a:rPr sz="1400">
+                        <a:rPr sz="1300">
                           <a:solidFill>
                             <a:srgbClr val="0B0B0B"/>
                           </a:solidFill>
                         </a:rPr>
-                        <a:t>Autoscales up to a cap you set</a:t>
+                        <a:t>360,900/sec, deviation 63,900/sec</a:t>
                       </a:r>
                     </a:p>
                   </a:txBody>
@@ -8068,12 +8068,12 @@
                     <a:lstStyle/>
                     <a:p>
                       <a:r>
-                        <a:rPr sz="1400">
+                        <a:rPr sz="1300">
                           <a:solidFill>
                             <a:srgbClr val="0B0B0B"/>
                           </a:solidFill>
                         </a:rPr>
-                        <a:t>Est. monthly cost, under ~10k msgs/sec</a:t>
+                        <a:t>Cost at equal work</a:t>
                       </a:r>
                     </a:p>
                   </a:txBody>
@@ -8089,12 +8089,12 @@
                     <a:lstStyle/>
                     <a:p>
                       <a:r>
-                        <a:rPr sz="1400">
+                        <a:rPr sz="1300">
                           <a:solidFill>
                             <a:srgbClr val="0B0B0B"/>
                           </a:solidFill>
                         </a:rPr>
-                        <a:t>~ $1,070</a:t>
+                        <a:t>~ $2.39/hr all-in</a:t>
                       </a:r>
                     </a:p>
                   </a:txBody>
@@ -8110,12 +8110,12 @@
                     <a:lstStyle/>
                     <a:p>
                       <a:r>
-                        <a:rPr sz="1400">
+                        <a:rPr sz="1300">
                           <a:solidFill>
                             <a:srgbClr val="0B0B0B"/>
                           </a:solidFill>
                         </a:rPr>
-                        <a:t>~ $1,010</a:t>
+                        <a:t>~ $3.36/hr + usage</a:t>
                       </a:r>
                     </a:p>
                   </a:txBody>
@@ -8133,12 +8133,12 @@
                     <a:lstStyle/>
                     <a:p>
                       <a:r>
-                        <a:rPr sz="1400">
+                        <a:rPr sz="1300">
                           <a:solidFill>
                             <a:srgbClr val="0B0B0B"/>
                           </a:solidFill>
                         </a:rPr>
-                        <a:t>Est. monthly cost, same 110k msgs/sec job</a:t>
+                        <a:t>Code to build it</a:t>
                       </a:r>
                     </a:p>
                   </a:txBody>
@@ -8154,12 +8154,12 @@
                     <a:lstStyle/>
                     <a:p>
                       <a:r>
-                        <a:rPr sz="1400">
+                        <a:rPr sz="1300">
                           <a:solidFill>
                             <a:srgbClr val="0B0B0B"/>
                           </a:solidFill>
                         </a:rPr>
-                        <a:t>~ $6,100</a:t>
+                        <a:t>~2,000 lines of Java</a:t>
                       </a:r>
                     </a:p>
                   </a:txBody>
@@ -8175,12 +8175,12 @@
                     <a:lstStyle/>
                     <a:p>
                       <a:r>
-                        <a:rPr sz="1400">
+                        <a:rPr sz="1300">
                           <a:solidFill>
                             <a:srgbClr val="0B0B0B"/>
                           </a:solidFill>
                         </a:rPr>
-                        <a:t>~ $3,500</a:t>
+                        <a:t>~200 lines of SQL</a:t>
                       </a:r>
                     </a:p>
                   </a:txBody>
@@ -8198,12 +8198,12 @@
                     <a:lstStyle/>
                     <a:p>
                       <a:r>
-                        <a:rPr sz="1400">
+                        <a:rPr sz="1300">
                           <a:solidFill>
                             <a:srgbClr val="0B0B0B"/>
                           </a:solidFill>
                         </a:rPr>
-                        <a:t>Infra $/hr to match the 232.7k peak (day 3)</a:t>
+                        <a:t>What you operate</a:t>
                       </a:r>
                     </a:p>
                   </a:txBody>
@@ -8219,12 +8219,12 @@
                     <a:lstStyle/>
                     <a:p>
                       <a:r>
-                        <a:rPr sz="1400">
+                        <a:rPr sz="1300">
                           <a:solidFill>
                             <a:srgbClr val="0B0B0B"/>
                           </a:solidFill>
                         </a:rPr>
-                        <a:t>~$2.39 (10 units + Kafka base/partitions)</a:t>
+                        <a:t>a jar, an image, a VPC</a:t>
                       </a:r>
                     </a:p>
                   </a:txBody>
@@ -8240,12 +8240,12 @@
                     <a:lstStyle/>
                     <a:p>
                       <a:r>
-                        <a:rPr sz="1400">
+                        <a:rPr sz="1300">
                           <a:solidFill>
                             <a:srgbClr val="0B0B0B"/>
                           </a:solidFill>
                         </a:rPr>
-                        <a:t>~$3.9 (16 units + usage; no partition fees)</a:t>
+                        <a:t>statements - nothing to deploy</a:t>
                       </a:r>
                     </a:p>
                   </a:txBody>
@@ -8268,7 +8268,7 @@
         </p:nvSpPr>
         <p:spPr>
           <a:xfrm>
-            <a:off x="640080" y="5120640"/>
+            <a:off x="640080" y="5394960"/>
             <a:ext cx="10881360" cy="4754880"/>
           </a:xfrm>
           <a:prstGeom prst="rect">
@@ -8284,46 +8284,46 @@
           <a:p>
             <a:pPr>
               <a:spcAft>
-                <a:spcPts val="1000"/>
+                <a:spcPts val="900"/>
               </a:spcAft>
             </a:pPr>
             <a:r>
-              <a:rPr sz="1600" b="1">
-                <a:solidFill>
-                  <a:srgbClr val="0B0B0B"/>
-                </a:solidFill>
-              </a:rPr>
-              <a:t>• Same topics, same JSON, same generator, same tests - only the engine changed</a:t>
+              <a:rPr sz="1500" b="1">
+                <a:solidFill>
+                  <a:srgbClr val="008300"/>
+                </a:solidFill>
+              </a:rPr>
+              <a:t>• AWS is faster, cheaper and steadier: one job passes records between operators in memory</a:t>
             </a:r>
           </a:p>
           <a:p>
             <a:pPr>
               <a:spcAft>
-                <a:spcPts val="1000"/>
+                <a:spcPts val="900"/>
               </a:spcAft>
             </a:pPr>
             <a:r>
-              <a:rPr sz="1600" b="0">
-                <a:solidFill>
-                  <a:srgbClr val="0B0B0B"/>
-                </a:solidFill>
-              </a:rPr>
-              <a:t>• The validation suite re-derives every number from raw data, so proving a cross-cloud rewrite took an afternoon and ~ $4</a:t>
+              <a:rPr sz="1500" b="0">
+                <a:solidFill>
+                  <a:srgbClr val="0B0B0B"/>
+                </a:solidFill>
+              </a:rPr>
+              <a:t>• Confluent is ~10x less code and nothing to deploy: independent SQL statements - which is why data crosses Kafka between every step</a:t>
             </a:r>
           </a:p>
           <a:p>
             <a:pPr>
               <a:spcAft>
-                <a:spcPts val="1000"/>
+                <a:spcPts val="900"/>
               </a:spcAft>
             </a:pPr>
             <a:r>
-              <a:rPr sz="1600" b="0">
-                <a:solidFill>
-                  <a:srgbClr val="008300"/>
-                </a:solidFill>
-              </a:rPr>
-              <a:t>• Price storm result reproduced: 10,000 price updates/sec in, ~10 conflated updates/sec out, trades unaffected</a:t>
+              <a:rPr sz="1500" b="1">
+                <a:solidFill>
+                  <a:srgbClr val="0B0B0B"/>
+                </a:solidFill>
+              </a:rPr>
+              <a:t>• Decide by latency budget, not by benchmark: sub-second -&gt; DataStream; multi-second-tolerant analytics -&gt; SQL</a:t>
             </a:r>
           </a:p>
         </p:txBody>

--- a/docs/flink-demo-exec-briefing.pptx
+++ b/docs/flink-demo-exec-briefing.pptx
@@ -4247,7 +4247,7 @@
                   <a:srgbClr val="0B0B0B"/>
                 </a:solidFill>
               </a:rPr>
-              <a:t>• Two validated deployment targets — choose by ops model: AWS Managed Flink (explicit control, custom metrics) vs Confluent Cloud (serverless SQL, ~40% cheaper at sustained high volume)</a:t>
+              <a:t>• Two validated deployment targets: AWS Managed Flink for latency-critical and high-volume work; Confluent Cloud SQL where multi-second freshness is fine and speed-to-build wins</a:t>
             </a:r>
           </a:p>
           <a:p>
@@ -4262,7 +4262,7 @@
                   <a:srgbClr val="0B0B0B"/>
                 </a:solidFill>
               </a:rPr>
-              <a:t>• Volume proven on both clouds, same method: AWS 757k msgs/sec tuned (linear 2x from a 10-unit floor); Confluent 232.7k</a:t>
+              <a:t>• Volume and stability proven on both, same method: AWS 757k msgs/sec peak, 28 min at 232,705/sec with deviation of 30; Confluent 386k peak single-statement</a:t>
             </a:r>
           </a:p>
           <a:p>
@@ -7632,7 +7632,7 @@
                   <a:srgbClr val="0B0B0B"/>
                 </a:solidFill>
               </a:rPr>
-              <a:t>Day two: same pipeline, second cloud</a:t>
+              <a:t>Two clouds, one test suite — the measured scoreboard</a:t>
             </a:r>
           </a:p>
         </p:txBody>
@@ -7708,7 +7708,7 @@
                   <a:srgbClr val="52514E"/>
                 </a:solidFill>
               </a:rPr>
-              <a:t>Rewritten in Flink SQL on Confluent Cloud — judged by the same validation suite</a:t>
+              <a:t>Same requirements, same data, same five correctness checks; deployable configs only</a:t>
             </a:r>
           </a:p>
         </p:txBody>
@@ -7732,9 +7732,9 @@
                 <a:tableStyleId>{5C22544A-7EE6-4342-B048-85BDC9FD1C3A}</a:tableStyleId>
               </a:tblPr>
               <a:tblGrid>
-                <a:gridCol w="4023360"/>
-                <a:gridCol w="3474720"/>
-                <a:gridCol w="3474720"/>
+                <a:gridCol w="3840480"/>
+                <a:gridCol w="3566160"/>
+                <a:gridCol w="3566160"/>
               </a:tblGrid>
               <a:tr h="365760">
                 <a:tc>
@@ -7743,7 +7743,7 @@
                     <a:lstStyle/>
                     <a:p>
                       <a:r>
-                        <a:rPr sz="1400" b="1">
+                        <a:rPr sz="1300" b="1">
                           <a:solidFill>
                             <a:srgbClr val="FFFFFF"/>
                           </a:solidFill>
@@ -7764,12 +7764,12 @@
                     <a:lstStyle/>
                     <a:p>
                       <a:r>
-                        <a:rPr sz="1400" b="1">
+                        <a:rPr sz="1300" b="1">
                           <a:solidFill>
                             <a:srgbClr val="FFFFFF"/>
                           </a:solidFill>
                         </a:rPr>
-                        <a:t>AWS (day 1)</a:t>
+                        <a:t>AWS (Managed Flink + MSK)</a:t>
                       </a:r>
                     </a:p>
                   </a:txBody>
@@ -7785,12 +7785,12 @@
                     <a:lstStyle/>
                     <a:p>
                       <a:r>
-                        <a:rPr sz="1400" b="1">
+                        <a:rPr sz="1300" b="1">
                           <a:solidFill>
                             <a:srgbClr val="FFFFFF"/>
                           </a:solidFill>
                         </a:rPr>
-                        <a:t>Confluent Cloud (day 2)</a:t>
+                        <a:t>Confluent Cloud (Flink SQL)</a:t>
                       </a:r>
                     </a:p>
                   </a:txBody>
@@ -7808,12 +7808,12 @@
                     <a:lstStyle/>
                     <a:p>
                       <a:r>
-                        <a:rPr sz="1400">
+                        <a:rPr sz="1300">
                           <a:solidFill>
                             <a:srgbClr val="0B0B0B"/>
                           </a:solidFill>
                         </a:rPr>
-                        <a:t>Code</a:t>
+                        <a:t>Correctness - 5 independent checks</a:t>
                       </a:r>
                     </a:p>
                   </a:txBody>
@@ -7829,12 +7829,12 @@
                     <a:lstStyle/>
                     <a:p>
                       <a:r>
-                        <a:rPr sz="1400">
+                        <a:rPr sz="1300">
                           <a:solidFill>
                             <a:srgbClr val="0B0B0B"/>
                           </a:solidFill>
                         </a:rPr>
-                        <a:t>~2,000 lines of Java</a:t>
+                        <a:t>All pass, exact to the cent</a:t>
                       </a:r>
                     </a:p>
                   </a:txBody>
@@ -7850,12 +7850,12 @@
                     <a:lstStyle/>
                     <a:p>
                       <a:r>
-                        <a:rPr sz="1400">
+                        <a:rPr sz="1300">
                           <a:solidFill>
                             <a:srgbClr val="0B0B0B"/>
                           </a:solidFill>
                         </a:rPr>
-                        <a:t>~200 lines of SQL (6 statements)</a:t>
+                        <a:t>All pass, exact to the cent</a:t>
                       </a:r>
                     </a:p>
                   </a:txBody>
@@ -7873,12 +7873,12 @@
                     <a:lstStyle/>
                     <a:p>
                       <a:r>
-                        <a:rPr sz="1400">
+                        <a:rPr sz="1300">
                           <a:solidFill>
                             <a:srgbClr val="0B0B0B"/>
                           </a:solidFill>
                         </a:rPr>
-                        <a:t>Correctness — 5 independent checks</a:t>
+                        <a:t>End-to-end latency (live)</a:t>
                       </a:r>
                     </a:p>
                   </a:txBody>
@@ -7894,12 +7894,12 @@
                     <a:lstStyle/>
                     <a:p>
                       <a:r>
-                        <a:rPr sz="1400">
+                        <a:rPr sz="1300">
                           <a:solidFill>
                             <a:srgbClr val="0B0B0B"/>
                           </a:solidFill>
                         </a:rPr>
-                        <a:t>All pass</a:t>
+                        <a:t>p50 267 ms  /  p99 495 ms</a:t>
                       </a:r>
                     </a:p>
                   </a:txBody>
@@ -7915,12 +7915,12 @@
                     <a:lstStyle/>
                     <a:p>
                       <a:r>
-                        <a:rPr sz="1400">
+                        <a:rPr sz="1300">
                           <a:solidFill>
                             <a:srgbClr val="0B0B0B"/>
                           </a:solidFill>
                         </a:rPr>
-                        <a:t>All pass — exact to the cent</a:t>
+                        <a:t>p50 33 s  /  p99 44 s</a:t>
                       </a:r>
                     </a:p>
                   </a:txBody>
@@ -7938,12 +7938,12 @@
                     <a:lstStyle/>
                     <a:p>
                       <a:r>
-                        <a:rPr sz="1400">
+                        <a:rPr sz="1300">
                           <a:solidFill>
                             <a:srgbClr val="0B0B0B"/>
                           </a:solidFill>
                         </a:rPr>
-                        <a:t>Top speed, same method (day 3 tuned)</a:t>
+                        <a:t>Full pipeline throughput</a:t>
                       </a:r>
                     </a:p>
                   </a:txBody>
@@ -7959,12 +7959,12 @@
                     <a:lstStyle/>
                     <a:p>
                       <a:r>
-                        <a:rPr sz="1400">
+                        <a:rPr sz="1300">
                           <a:solidFill>
                             <a:srgbClr val="0B0B0B"/>
                           </a:solidFill>
                         </a:rPr>
-                        <a:t>757,600 msgs/sec (20 units)</a:t>
+                        <a:t>435,000 msgs/sec</a:t>
                       </a:r>
                     </a:p>
                   </a:txBody>
@@ -7980,12 +7980,12 @@
                     <a:lstStyle/>
                     <a:p>
                       <a:r>
-                        <a:rPr sz="1400">
+                        <a:rPr sz="1300">
                           <a:solidFill>
                             <a:srgbClr val="0B0B0B"/>
                           </a:solidFill>
                         </a:rPr>
-                        <a:t>232,700 msgs/sec (16 units)</a:t>
+                        <a:t>127,000 msgs/sec</a:t>
                       </a:r>
                     </a:p>
                   </a:txBody>
@@ -8003,12 +8003,12 @@
                     <a:lstStyle/>
                     <a:p>
                       <a:r>
-                        <a:rPr sz="1400">
+                        <a:rPr sz="1300">
                           <a:solidFill>
                             <a:srgbClr val="0B0B0B"/>
                           </a:solidFill>
                         </a:rPr>
-                        <a:t>How you scale</a:t>
+                        <a:t>Sustained 28 min</a:t>
                       </a:r>
                     </a:p>
                   </a:txBody>
@@ -8024,12 +8024,12 @@
                     <a:lstStyle/>
                     <a:p>
                       <a:r>
-                        <a:rPr sz="1400">
+                        <a:rPr sz="1300">
                           <a:solidFill>
                             <a:srgbClr val="0B0B0B"/>
                           </a:solidFill>
                         </a:rPr>
-                        <a:t>Pick unit count by hand</a:t>
+                        <a:t>232,705/sec, deviation 30/sec</a:t>
                       </a:r>
                     </a:p>
                   </a:txBody>
@@ -8045,12 +8045,12 @@
                     <a:lstStyle/>
                     <a:p>
                       <a:r>
-                        <a:rPr sz="1400">
+                        <a:rPr sz="1300">
                           <a:solidFill>
                             <a:srgbClr val="0B0B0B"/>
                           </a:solidFill>
                         </a:rPr>
-                        <a:t>Autoscales up to a cap you set</a:t>
+                        <a:t>360,900/sec, deviation 63,900/sec</a:t>
                       </a:r>
                     </a:p>
                   </a:txBody>
@@ -8068,12 +8068,12 @@
                     <a:lstStyle/>
                     <a:p>
                       <a:r>
-                        <a:rPr sz="1400">
+                        <a:rPr sz="1300">
                           <a:solidFill>
                             <a:srgbClr val="0B0B0B"/>
                           </a:solidFill>
                         </a:rPr>
-                        <a:t>Est. monthly cost, under ~10k msgs/sec</a:t>
+                        <a:t>Cost at equal work</a:t>
                       </a:r>
                     </a:p>
                   </a:txBody>
@@ -8089,12 +8089,12 @@
                     <a:lstStyle/>
                     <a:p>
                       <a:r>
-                        <a:rPr sz="1400">
+                        <a:rPr sz="1300">
                           <a:solidFill>
                             <a:srgbClr val="0B0B0B"/>
                           </a:solidFill>
                         </a:rPr>
-                        <a:t>~ $1,070</a:t>
+                        <a:t>~ $2.39/hr all-in</a:t>
                       </a:r>
                     </a:p>
                   </a:txBody>
@@ -8110,12 +8110,12 @@
                     <a:lstStyle/>
                     <a:p>
                       <a:r>
-                        <a:rPr sz="1400">
+                        <a:rPr sz="1300">
                           <a:solidFill>
                             <a:srgbClr val="0B0B0B"/>
                           </a:solidFill>
                         </a:rPr>
-                        <a:t>~ $1,010</a:t>
+                        <a:t>~ $3.36/hr + usage</a:t>
                       </a:r>
                     </a:p>
                   </a:txBody>
@@ -8133,12 +8133,12 @@
                     <a:lstStyle/>
                     <a:p>
                       <a:r>
-                        <a:rPr sz="1400">
+                        <a:rPr sz="1300">
                           <a:solidFill>
                             <a:srgbClr val="0B0B0B"/>
                           </a:solidFill>
                         </a:rPr>
-                        <a:t>Est. monthly cost, same 110k msgs/sec job</a:t>
+                        <a:t>Code to build it</a:t>
                       </a:r>
                     </a:p>
                   </a:txBody>
@@ -8154,12 +8154,12 @@
                     <a:lstStyle/>
                     <a:p>
                       <a:r>
-                        <a:rPr sz="1400">
+                        <a:rPr sz="1300">
                           <a:solidFill>
                             <a:srgbClr val="0B0B0B"/>
                           </a:solidFill>
                         </a:rPr>
-                        <a:t>~ $6,100</a:t>
+                        <a:t>~2,000 lines of Java</a:t>
                       </a:r>
                     </a:p>
                   </a:txBody>
@@ -8175,12 +8175,12 @@
                     <a:lstStyle/>
                     <a:p>
                       <a:r>
-                        <a:rPr sz="1400">
+                        <a:rPr sz="1300">
                           <a:solidFill>
                             <a:srgbClr val="0B0B0B"/>
                           </a:solidFill>
                         </a:rPr>
-                        <a:t>~ $3,500</a:t>
+                        <a:t>~200 lines of SQL</a:t>
                       </a:r>
                     </a:p>
                   </a:txBody>
@@ -8198,12 +8198,12 @@
                     <a:lstStyle/>
                     <a:p>
                       <a:r>
-                        <a:rPr sz="1400">
+                        <a:rPr sz="1300">
                           <a:solidFill>
                             <a:srgbClr val="0B0B0B"/>
                           </a:solidFill>
                         </a:rPr>
-                        <a:t>Compute $/hr to match the 232.7k peak (day 3)</a:t>
+                        <a:t>What you operate</a:t>
                       </a:r>
                     </a:p>
                   </a:txBody>
@@ -8219,12 +8219,12 @@
                     <a:lstStyle/>
                     <a:p>
                       <a:r>
-                        <a:rPr sz="1400">
+                        <a:rPr sz="1300">
                           <a:solidFill>
                             <a:srgbClr val="0B0B0B"/>
                           </a:solidFill>
                         </a:rPr>
-                        <a:t>$1.21 (10 units)</a:t>
+                        <a:t>a jar, an image, a VPC</a:t>
                       </a:r>
                     </a:p>
                   </a:txBody>
@@ -8240,12 +8240,12 @@
                     <a:lstStyle/>
                     <a:p>
                       <a:r>
-                        <a:rPr sz="1400">
+                        <a:rPr sz="1300">
                           <a:solidFill>
                             <a:srgbClr val="0B0B0B"/>
                           </a:solidFill>
                         </a:rPr>
-                        <a:t>$3.36 (16 units)</a:t>
+                        <a:t>statements - nothing to deploy</a:t>
                       </a:r>
                     </a:p>
                   </a:txBody>
@@ -8268,7 +8268,7 @@
         </p:nvSpPr>
         <p:spPr>
           <a:xfrm>
-            <a:off x="640080" y="5120640"/>
+            <a:off x="640080" y="5394960"/>
             <a:ext cx="10881360" cy="4754880"/>
           </a:xfrm>
           <a:prstGeom prst="rect">
@@ -8284,46 +8284,46 @@
           <a:p>
             <a:pPr>
               <a:spcAft>
-                <a:spcPts val="1000"/>
+                <a:spcPts val="900"/>
               </a:spcAft>
             </a:pPr>
             <a:r>
-              <a:rPr sz="1600" b="1">
-                <a:solidFill>
-                  <a:srgbClr val="0B0B0B"/>
-                </a:solidFill>
-              </a:rPr>
-              <a:t>• Same topics, same JSON, same generator, same tests - only the engine changed</a:t>
+              <a:rPr sz="1500" b="1">
+                <a:solidFill>
+                  <a:srgbClr val="008300"/>
+                </a:solidFill>
+              </a:rPr>
+              <a:t>• AWS is faster, cheaper and steadier: one job passes records between operators in memory</a:t>
             </a:r>
           </a:p>
           <a:p>
             <a:pPr>
               <a:spcAft>
-                <a:spcPts val="1000"/>
+                <a:spcPts val="900"/>
               </a:spcAft>
             </a:pPr>
             <a:r>
-              <a:rPr sz="1600" b="0">
-                <a:solidFill>
-                  <a:srgbClr val="0B0B0B"/>
-                </a:solidFill>
-              </a:rPr>
-              <a:t>• The validation suite re-derives every number from raw data, so proving a cross-cloud rewrite took an afternoon and ~ $4</a:t>
+              <a:rPr sz="1500" b="0">
+                <a:solidFill>
+                  <a:srgbClr val="0B0B0B"/>
+                </a:solidFill>
+              </a:rPr>
+              <a:t>• Confluent is ~10x less code and nothing to deploy: independent SQL statements - which is why data crosses Kafka between every step</a:t>
             </a:r>
           </a:p>
           <a:p>
             <a:pPr>
               <a:spcAft>
-                <a:spcPts val="1000"/>
+                <a:spcPts val="900"/>
               </a:spcAft>
             </a:pPr>
             <a:r>
-              <a:rPr sz="1600" b="0">
-                <a:solidFill>
-                  <a:srgbClr val="008300"/>
-                </a:solidFill>
-              </a:rPr>
-              <a:t>• Price storm result reproduced: 10,000 price updates/sec in, ~10 conflated updates/sec out, trades unaffected</a:t>
+              <a:rPr sz="1500" b="1">
+                <a:solidFill>
+                  <a:srgbClr val="0B0B0B"/>
+                </a:solidFill>
+              </a:rPr>
+              <a:t>• Decide by latency budget, not by benchmark: sub-second -&gt; DataStream; multi-second-tolerant analytics -&gt; SQL</a:t>
             </a:r>
           </a:p>
         </p:txBody>

--- a/docs/flink-demo-exec-briefing.pptx
+++ b/docs/flink-demo-exec-briefing.pptx
@@ -7920,7 +7920,7 @@
                             <a:srgbClr val="0B0B0B"/>
                           </a:solidFill>
                         </a:rPr>
-                        <a:t>p50 33 s  /  p99 44 s</a:t>
+                        <a:t>p50 1.8 s  /  p99 2.1 s (SQL tuned for latency)</a:t>
                       </a:r>
                     </a:p>
                   </a:txBody>
@@ -8308,7 +8308,7 @@
                   <a:srgbClr val="0B0B0B"/>
                 </a:solidFill>
               </a:rPr>
-              <a:t>• Confluent is ~10x less code and nothing to deploy: independent SQL statements - which is why data crosses Kafka between every step</a:t>
+              <a:t>• Confluent is ~10x less code and nothing to deploy - but the SQL must be ONE fused statement set; writing it as chained statements costs 15x latency (26.7s -&gt; 1.8s when fixed)</a:t>
             </a:r>
           </a:p>
           <a:p>

--- a/docs/flink-demo-exec-briefing.pptx
+++ b/docs/flink-demo-exec-briefing.pptx
@@ -4247,7 +4247,7 @@
                   <a:srgbClr val="0B0B0B"/>
                 </a:solidFill>
               </a:rPr>
-              <a:t>• Two validated deployment targets: AWS Managed Flink for latency-critical and high-volume work; Confluent Cloud SQL where multi-second freshness is fine and speed-to-build wins</a:t>
+              <a:t>• Recommend AWS Managed Flink for this product: it is faster, cheaper at equal work, and the only one of the two that can satisfy the output-cadence requirement (CR-1)</a:t>
             </a:r>
           </a:p>
           <a:p>
@@ -7723,7 +7723,7 @@
         </p:nvGraphicFramePr>
         <p:xfrm>
           <a:off x="640080" y="1645920"/>
-          <a:ext cx="10972800" cy="2926080"/>
+          <a:ext cx="10972800" cy="3291840"/>
         </p:xfrm>
         <a:graphic>
           <a:graphicData uri="http://schemas.openxmlformats.org/drawingml/2006/table">
@@ -8256,6 +8256,71 @@
                   </a:tcPr>
                 </a:tc>
               </a:tr>
+              <a:tr h="365760">
+                <a:tc>
+                  <a:txBody>
+                    <a:bodyPr wrap="square"/>
+                    <a:lstStyle/>
+                    <a:p>
+                      <a:r>
+                        <a:rPr sz="1300">
+                          <a:solidFill>
+                            <a:srgbClr val="0B0B0B"/>
+                          </a:solidFill>
+                        </a:rPr>
+                        <a:t>Rate-limit an output (CR-1)</a:t>
+                      </a:r>
+                    </a:p>
+                  </a:txBody>
+                  <a:tcPr marT="45720" marB="45720">
+                    <a:solidFill>
+                      <a:srgbClr val="F0EFEC"/>
+                    </a:solidFill>
+                  </a:tcPr>
+                </a:tc>
+                <a:tc>
+                  <a:txBody>
+                    <a:bodyPr wrap="square"/>
+                    <a:lstStyle/>
+                    <a:p>
+                      <a:r>
+                        <a:rPr sz="1300">
+                          <a:solidFill>
+                            <a:srgbClr val="0B0B0B"/>
+                          </a:solidFill>
+                        </a:rPr>
+                        <a:t>config change - 0.96/key/sec vs 1.0 cap</a:t>
+                      </a:r>
+                    </a:p>
+                  </a:txBody>
+                  <a:tcPr marT="45720" marB="45720">
+                    <a:solidFill>
+                      <a:srgbClr val="F0EFEC"/>
+                    </a:solidFill>
+                  </a:tcPr>
+                </a:tc>
+                <a:tc>
+                  <a:txBody>
+                    <a:bodyPr wrap="square"/>
+                    <a:lstStyle/>
+                    <a:p>
+                      <a:r>
+                        <a:rPr sz="1300">
+                          <a:solidFill>
+                            <a:srgbClr val="0B0B0B"/>
+                          </a:solidFill>
+                        </a:rPr>
+                        <a:t>NOT EXPRESSIBLE for updating aggregations</a:t>
+                      </a:r>
+                    </a:p>
+                  </a:txBody>
+                  <a:tcPr marT="45720" marB="45720">
+                    <a:solidFill>
+                      <a:srgbClr val="F0EFEC"/>
+                    </a:solidFill>
+                  </a:tcPr>
+                </a:tc>
+              </a:tr>
             </a:tbl>
           </a:graphicData>
         </a:graphic>
@@ -8320,10 +8385,10 @@
             <a:r>
               <a:rPr sz="1500" b="1">
                 <a:solidFill>
-                  <a:srgbClr val="0B0B0B"/>
-                </a:solidFill>
-              </a:rPr>
-              <a:t>• Decide by latency budget, not by benchmark: sub-second -&gt; DataStream; multi-second-tolerant analytics -&gt; SQL</a:t>
+                  <a:srgbClr val="2A78D6"/>
+                </a:solidFill>
+              </a:rPr>
+              <a:t>• The deciding factor was not speed: a plain requirement - do not update the screen faster than a human can read - is one config line on DataStream and has no supported construct in Confluent SQL</a:t>
             </a:r>
           </a:p>
         </p:txBody>

--- a/docs/flink-demo-exec-briefing.pptx
+++ b/docs/flink-demo-exec-briefing.pptx
@@ -17,6 +17,7 @@
     <p:sldId id="265" r:id="rId16"/>
     <p:sldId id="266" r:id="rId17"/>
     <p:sldId id="267" r:id="rId18"/>
+    <p:sldId id="268" r:id="rId19"/>
   </p:sldIdLst>
   <p:sldSz cx="12191695" cy="6858000" type="screen4x3"/>
   <p:notesSz cx="6858000" cy="9144000"/>
@@ -3431,7 +3432,7 @@
                   <a:srgbClr val="0B0B0B"/>
                 </a:solidFill>
               </a:rPr>
-              <a:t>Path to production — AWS ready today</a:t>
+              <a:t>Most of the first numbers were wrong</a:t>
             </a:r>
           </a:p>
         </p:txBody>
@@ -3507,20 +3508,437 @@
                   <a:srgbClr val="52514E"/>
                 </a:solidFill>
               </a:rPr>
-              <a:t>Full infrastructure-as-code, validated; one command to deploy</a:t>
-            </a:r>
-          </a:p>
-        </p:txBody>
-      </p:sp>
-      <p:sp>
-        <p:nvSpPr>
-          <p:cNvPr id="5" name="TextBox 4"/>
+              <a:t>Three published conclusions did not survive re-measurement</a:t>
+            </a:r>
+          </a:p>
+        </p:txBody>
+      </p:sp>
+      <p:graphicFrame>
+        <p:nvGraphicFramePr>
+          <p:cNvPr id="5" name="Table 4"/>
+          <p:cNvGraphicFramePr>
+            <a:graphicFrameLocks noGrp="1"/>
+          </p:cNvGraphicFramePr>
+          <p:nvPr/>
+        </p:nvGraphicFramePr>
+        <p:xfrm>
+          <a:off x="640080" y="1645920"/>
+          <a:ext cx="10972800" cy="2194560"/>
+        </p:xfrm>
+        <a:graphic>
+          <a:graphicData uri="http://schemas.openxmlformats.org/drawingml/2006/table">
+            <a:tbl>
+              <a:tblPr firstRow="1" bandRow="1">
+                <a:tableStyleId>{5C22544A-7EE6-4342-B048-85BDC9FD1C3A}</a:tableStyleId>
+              </a:tblPr>
+              <a:tblGrid>
+                <a:gridCol w="3108960"/>
+                <a:gridCol w="4937760"/>
+                <a:gridCol w="2926080"/>
+              </a:tblGrid>
+              <a:tr h="365760">
+                <a:tc>
+                  <a:txBody>
+                    <a:bodyPr wrap="square"/>
+                    <a:lstStyle/>
+                    <a:p>
+                      <a:r>
+                        <a:rPr sz="1200" b="1">
+                          <a:solidFill>
+                            <a:srgbClr val="FFFFFF"/>
+                          </a:solidFill>
+                        </a:rPr>
+                        <a:t>What I published</a:t>
+                      </a:r>
+                    </a:p>
+                  </a:txBody>
+                  <a:tcPr marT="45720" marB="45720">
+                    <a:solidFill>
+                      <a:srgbClr val="2A78D6"/>
+                    </a:solidFill>
+                  </a:tcPr>
+                </a:tc>
+                <a:tc>
+                  <a:txBody>
+                    <a:bodyPr wrap="square"/>
+                    <a:lstStyle/>
+                    <a:p>
+                      <a:r>
+                        <a:rPr sz="1200" b="1">
+                          <a:solidFill>
+                            <a:srgbClr val="FFFFFF"/>
+                          </a:solidFill>
+                        </a:rPr>
+                        <a:t>What was actually happening</a:t>
+                      </a:r>
+                    </a:p>
+                  </a:txBody>
+                  <a:tcPr marT="45720" marB="45720">
+                    <a:solidFill>
+                      <a:srgbClr val="2A78D6"/>
+                    </a:solidFill>
+                  </a:tcPr>
+                </a:tc>
+                <a:tc>
+                  <a:txBody>
+                    <a:bodyPr wrap="square"/>
+                    <a:lstStyle/>
+                    <a:p>
+                      <a:r>
+                        <a:rPr sz="1200" b="1">
+                          <a:solidFill>
+                            <a:srgbClr val="FFFFFF"/>
+                          </a:solidFill>
+                        </a:rPr>
+                        <a:t>Corrected</a:t>
+                      </a:r>
+                    </a:p>
+                  </a:txBody>
+                  <a:tcPr marT="45720" marB="45720">
+                    <a:solidFill>
+                      <a:srgbClr val="2A78D6"/>
+                    </a:solidFill>
+                  </a:tcPr>
+                </a:tc>
+              </a:tr>
+              <a:tr h="365760">
+                <a:tc>
+                  <a:txBody>
+                    <a:bodyPr wrap="square"/>
+                    <a:lstStyle/>
+                    <a:p>
+                      <a:r>
+                        <a:rPr sz="1200">
+                          <a:solidFill>
+                            <a:srgbClr val="0B0B0B"/>
+                          </a:solidFill>
+                        </a:rPr>
+                        <a:t>SQL is 124x slower</a:t>
+                      </a:r>
+                    </a:p>
+                  </a:txBody>
+                  <a:tcPr marT="45720" marB="45720">
+                    <a:solidFill>
+                      <a:srgbClr val="FFFFFF"/>
+                    </a:solidFill>
+                  </a:tcPr>
+                </a:tc>
+                <a:tc>
+                  <a:txBody>
+                    <a:bodyPr wrap="square"/>
+                    <a:lstStyle/>
+                    <a:p>
+                      <a:r>
+                        <a:rPr sz="1200">
+                          <a:solidFill>
+                            <a:srgbClr val="0B0B0B"/>
+                          </a:solidFill>
+                        </a:rPr>
+                        <a:t>I wrote one SQL statement per Java operator, so every stage hopped through Kafka</a:t>
+                      </a:r>
+                    </a:p>
+                  </a:txBody>
+                  <a:tcPr marT="45720" marB="45720">
+                    <a:solidFill>
+                      <a:srgbClr val="FFFFFF"/>
+                    </a:solidFill>
+                  </a:tcPr>
+                </a:tc>
+                <a:tc>
+                  <a:txBody>
+                    <a:bodyPr wrap="square"/>
+                    <a:lstStyle/>
+                    <a:p>
+                      <a:r>
+                        <a:rPr sz="1200">
+                          <a:solidFill>
+                            <a:srgbClr val="0B0B0B"/>
+                          </a:solidFill>
+                        </a:rPr>
+                        <a:t>1.8s, not 26.7s</a:t>
+                      </a:r>
+                    </a:p>
+                  </a:txBody>
+                  <a:tcPr marT="45720" marB="45720">
+                    <a:solidFill>
+                      <a:srgbClr val="FFFFFF"/>
+                    </a:solidFill>
+                  </a:tcPr>
+                </a:tc>
+              </a:tr>
+              <a:tr h="365760">
+                <a:tc>
+                  <a:txBody>
+                    <a:bodyPr wrap="square"/>
+                    <a:lstStyle/>
+                    <a:p>
+                      <a:r>
+                        <a:rPr sz="1200">
+                          <a:solidFill>
+                            <a:srgbClr val="0B0B0B"/>
+                          </a:solidFill>
+                        </a:rPr>
+                        <a:t>SQL is 2.69x slower</a:t>
+                      </a:r>
+                    </a:p>
+                  </a:txBody>
+                  <a:tcPr marT="45720" marB="45720">
+                    <a:solidFill>
+                      <a:srgbClr val="F0EFEC"/>
+                    </a:solidFill>
+                  </a:tcPr>
+                </a:tc>
+                <a:tc>
+                  <a:txBody>
+                    <a:bodyPr wrap="square"/>
+                    <a:lstStyle/>
+                    <a:p>
+                      <a:r>
+                        <a:rPr sz="1200">
+                          <a:solidFill>
+                            <a:srgbClr val="0B0B0B"/>
+                          </a:solidFill>
+                        </a:rPr>
+                        <a:t>That run consumed 119k rec/sec and wrote NOTHING for an hour - status green throughout</a:t>
+                      </a:r>
+                    </a:p>
+                  </a:txBody>
+                  <a:tcPr marT="45720" marB="45720">
+                    <a:solidFill>
+                      <a:srgbClr val="F0EFEC"/>
+                    </a:solidFill>
+                  </a:tcPr>
+                </a:tc>
+                <a:tc>
+                  <a:txBody>
+                    <a:bodyPr wrap="square"/>
+                    <a:lstStyle/>
+                    <a:p>
+                      <a:r>
+                        <a:rPr sz="1200">
+                          <a:solidFill>
+                            <a:srgbClr val="0B0B0B"/>
+                          </a:solidFill>
+                        </a:rPr>
+                        <a:t>~2x, output verified</a:t>
+                      </a:r>
+                    </a:p>
+                  </a:txBody>
+                  <a:tcPr marT="45720" marB="45720">
+                    <a:solidFill>
+                      <a:srgbClr val="F0EFEC"/>
+                    </a:solidFill>
+                  </a:tcPr>
+                </a:tc>
+              </a:tr>
+              <a:tr h="365760">
+                <a:tc>
+                  <a:txBody>
+                    <a:bodyPr wrap="square"/>
+                    <a:lstStyle/>
+                    <a:p>
+                      <a:r>
+                        <a:rPr sz="1200">
+                          <a:solidFill>
+                            <a:srgbClr val="0B0B0B"/>
+                          </a:solidFill>
+                        </a:rPr>
+                        <a:t>Confluent does not scale</a:t>
+                      </a:r>
+                    </a:p>
+                  </a:txBody>
+                  <a:tcPr marT="45720" marB="45720">
+                    <a:solidFill>
+                      <a:srgbClr val="FFFFFF"/>
+                    </a:solidFill>
+                  </a:tcPr>
+                </a:tc>
+                <a:tc>
+                  <a:txBody>
+                    <a:bodyPr wrap="square"/>
+                    <a:lstStyle/>
+                    <a:p>
+                      <a:r>
+                        <a:rPr sz="1200">
+                          <a:solidFill>
+                            <a:srgbClr val="0B0B0B"/>
+                          </a:solidFill>
+                        </a:rPr>
+                        <a:t>6-bucket tables capped the source at 6 readers - my test rig, not the platform</a:t>
+                      </a:r>
+                    </a:p>
+                  </a:txBody>
+                  <a:tcPr marT="45720" marB="45720">
+                    <a:solidFill>
+                      <a:srgbClr val="FFFFFF"/>
+                    </a:solidFill>
+                  </a:tcPr>
+                </a:tc>
+                <a:tc>
+                  <a:txBody>
+                    <a:bodyPr wrap="square"/>
+                    <a:lstStyle/>
+                    <a:p>
+                      <a:r>
+                        <a:rPr sz="1200">
+                          <a:solidFill>
+                            <a:srgbClr val="0B0B0B"/>
+                          </a:solidFill>
+                        </a:rPr>
+                        <a:t>ceiling was mine</a:t>
+                      </a:r>
+                    </a:p>
+                  </a:txBody>
+                  <a:tcPr marT="45720" marB="45720">
+                    <a:solidFill>
+                      <a:srgbClr val="FFFFFF"/>
+                    </a:solidFill>
+                  </a:tcPr>
+                </a:tc>
+              </a:tr>
+              <a:tr h="365760">
+                <a:tc>
+                  <a:txBody>
+                    <a:bodyPr wrap="square"/>
+                    <a:lstStyle/>
+                    <a:p>
+                      <a:r>
+                        <a:rPr sz="1200">
+                          <a:solidFill>
+                            <a:srgbClr val="0B0B0B"/>
+                          </a:solidFill>
+                        </a:rPr>
+                        <a:t>Confluent scales 1.5x</a:t>
+                      </a:r>
+                    </a:p>
+                  </a:txBody>
+                  <a:tcPr marT="45720" marB="45720">
+                    <a:solidFill>
+                      <a:srgbClr val="F0EFEC"/>
+                    </a:solidFill>
+                  </a:tcPr>
+                </a:tc>
+                <a:tc>
+                  <a:txBody>
+                    <a:bodyPr wrap="square"/>
+                    <a:lstStyle/>
+                    <a:p>
+                      <a:r>
+                        <a:rPr sz="1200">
+                          <a:solidFill>
+                            <a:srgbClr val="0B0B0B"/>
+                          </a:solidFill>
+                        </a:rPr>
+                        <a:t>Compared runs with different backlog sizes; ramp-up penalises the smaller one</a:t>
+                      </a:r>
+                    </a:p>
+                  </a:txBody>
+                  <a:tcPr marT="45720" marB="45720">
+                    <a:solidFill>
+                      <a:srgbClr val="F0EFEC"/>
+                    </a:solidFill>
+                  </a:tcPr>
+                </a:tc>
+                <a:tc>
+                  <a:txBody>
+                    <a:bodyPr wrap="square"/>
+                    <a:lstStyle/>
+                    <a:p>
+                      <a:r>
+                        <a:rPr sz="1200">
+                          <a:solidFill>
+                            <a:srgbClr val="0B0B0B"/>
+                          </a:solidFill>
+                        </a:rPr>
+                        <a:t>no scaling at all</a:t>
+                      </a:r>
+                    </a:p>
+                  </a:txBody>
+                  <a:tcPr marT="45720" marB="45720">
+                    <a:solidFill>
+                      <a:srgbClr val="F0EFEC"/>
+                    </a:solidFill>
+                  </a:tcPr>
+                </a:tc>
+              </a:tr>
+              <a:tr h="365760">
+                <a:tc>
+                  <a:txBody>
+                    <a:bodyPr wrap="square"/>
+                    <a:lstStyle/>
+                    <a:p>
+                      <a:r>
+                        <a:rPr sz="1200">
+                          <a:solidFill>
+                            <a:srgbClr val="0B0B0B"/>
+                          </a:solidFill>
+                        </a:rPr>
+                        <a:t>~$1.09/hr on AWS</a:t>
+                      </a:r>
+                    </a:p>
+                  </a:txBody>
+                  <a:tcPr marT="45720" marB="45720">
+                    <a:solidFill>
+                      <a:srgbClr val="FFFFFF"/>
+                    </a:solidFill>
+                  </a:tcPr>
+                </a:tc>
+                <a:tc>
+                  <a:txBody>
+                    <a:bodyPr wrap="square"/>
+                    <a:lstStyle/>
+                    <a:p>
+                      <a:r>
+                        <a:rPr sz="1200">
+                          <a:solidFill>
+                            <a:srgbClr val="0B0B0B"/>
+                          </a:solidFill>
+                        </a:rPr>
+                        <a:t>Omitted the Kafka base charge entirely</a:t>
+                      </a:r>
+                    </a:p>
+                  </a:txBody>
+                  <a:tcPr marT="45720" marB="45720">
+                    <a:solidFill>
+                      <a:srgbClr val="FFFFFF"/>
+                    </a:solidFill>
+                  </a:tcPr>
+                </a:tc>
+                <a:tc>
+                  <a:txBody>
+                    <a:bodyPr wrap="square"/>
+                    <a:lstStyle/>
+                    <a:p>
+                      <a:r>
+                        <a:rPr sz="1200">
+                          <a:solidFill>
+                            <a:srgbClr val="0B0B0B"/>
+                          </a:solidFill>
+                        </a:rPr>
+                        <a:t>$1.84/hr</a:t>
+                      </a:r>
+                    </a:p>
+                  </a:txBody>
+                  <a:tcPr marT="45720" marB="45720">
+                    <a:solidFill>
+                      <a:srgbClr val="FFFFFF"/>
+                    </a:solidFill>
+                  </a:tcPr>
+                </a:tc>
+              </a:tr>
+            </a:tbl>
+          </a:graphicData>
+        </a:graphic>
+      </p:graphicFrame>
+      <p:sp>
+        <p:nvSpPr>
+          <p:cNvPr id="6" name="TextBox 5"/>
           <p:cNvSpPr txBox="1"/>
           <p:nvPr/>
         </p:nvSpPr>
         <p:spPr>
           <a:xfrm>
-            <a:off x="640080" y="1737360"/>
+            <a:off x="640080" y="5120640"/>
             <a:ext cx="10881360" cy="4754880"/>
           </a:xfrm>
           <a:prstGeom prst="rect">
@@ -3536,91 +3954,61 @@
           <a:p>
             <a:pPr>
               <a:spcAft>
-                <a:spcPts val="1200"/>
+                <a:spcPts val="900"/>
               </a:spcAft>
             </a:pPr>
             <a:r>
-              <a:rPr sz="1800" b="0">
-                <a:solidFill>
-                  <a:srgbClr val="0B0B0B"/>
-                </a:solidFill>
-              </a:rPr>
-              <a:t>• Terraform stack complete: MSK Serverless (Kafka) + Amazon Managed Service for Apache Flink + generator on Fargate + CloudWatch dashboard</a:t>
+              <a:rPr sz="1500" b="1">
+                <a:solidFill>
+                  <a:srgbClr val="2A78D6"/>
+                </a:solidFill>
+              </a:rPr>
+              <a:t>• The root cause of the worst one: I checked on every test that records went IN. I never checked that records came OUT</a:t>
             </a:r>
           </a:p>
           <a:p>
             <a:pPr>
               <a:spcAft>
-                <a:spcPts val="1200"/>
+                <a:spcPts val="900"/>
               </a:spcAft>
             </a:pPr>
             <a:r>
-              <a:rPr sz="1800" b="1">
+              <a:rPr sz="1500" b="0">
                 <a:solidFill>
                   <a:srgbClr val="0B0B0B"/>
                 </a:solidFill>
               </a:rPr>
-              <a:t>• The exact same application jar runs on AWS — every environment difference is configuration</a:t>
+              <a:t>• A pipeline that reads fast and writes nothing scores beautifully on a throughput metric</a:t>
             </a:r>
           </a:p>
           <a:p>
             <a:pPr>
               <a:spcAft>
-                <a:spcPts val="1200"/>
+                <a:spcPts val="900"/>
               </a:spcAft>
             </a:pPr>
             <a:r>
-              <a:rPr sz="1800" b="0">
-                <a:solidFill>
-                  <a:srgbClr val="0B0B0B"/>
-                </a:solidFill>
-              </a:rPr>
-              <a:t>• Security by default: private VPC, IAM auth to Kafka, least-privilege roles</a:t>
+              <a:rPr sz="1500" b="1">
+                <a:solidFill>
+                  <a:srgbClr val="008300"/>
+                </a:solidFill>
+              </a:rPr>
+              <a:t>• The optimisation I argued would slow things down made them 2.66x faster - the test took 20 minutes, the argument would have shipped a version a third as fast</a:t>
             </a:r>
           </a:p>
           <a:p>
             <a:pPr>
               <a:spcAft>
-                <a:spcPts val="1200"/>
+                <a:spcPts val="900"/>
               </a:spcAft>
             </a:pPr>
             <a:r>
-              <a:rPr sz="1800" b="0">
+              <a:rPr sz="1500" b="1">
                 <a:solidFill>
                   <a:srgbClr val="0B0B0B"/>
                 </a:solidFill>
               </a:rPr>
-              <a:t>• Operations runbook: deploy, in-place code update, config-only rescale, teardown</a:t>
-            </a:r>
-          </a:p>
-          <a:p>
-            <a:pPr>
-              <a:spcAft>
-                <a:spcPts val="1200"/>
-              </a:spcAft>
-            </a:pPr>
-            <a:r>
-              <a:rPr sz="1800" b="0">
-                <a:solidFill>
-                  <a:srgbClr val="0B0B0B"/>
-                </a:solidFill>
-              </a:rPr>
-              <a:t>• Demo cost ≈ $1/hour while running; destroyed when not in use</a:t>
-            </a:r>
-          </a:p>
-          <a:p>
-            <a:pPr>
-              <a:spcAft>
-                <a:spcPts val="1200"/>
-              </a:spcAft>
-            </a:pPr>
-            <a:r>
-              <a:rPr sz="1800" b="1">
-                <a:solidFill>
-                  <a:srgbClr val="008300"/>
-                </a:solidFill>
-              </a:rPr>
-              <a:t>• Status: DEPLOYED and load-tested on AWS — all cases green, scaling ladder measured, then torn down cleanly</a:t>
+              <a:t>• Benchmarks mostly measure the person running them</a:t>
             </a:r>
           </a:p>
         </p:txBody>
@@ -3671,6 +4059,246 @@
                   <a:srgbClr val="0B0B0B"/>
                 </a:solidFill>
               </a:rPr>
+              <a:t>Path to production — AWS ready today</a:t>
+            </a:r>
+          </a:p>
+        </p:txBody>
+      </p:sp>
+      <p:sp>
+        <p:nvSpPr>
+          <p:cNvPr id="3" name="Rectangle 2"/>
+          <p:cNvSpPr/>
+          <p:nvPr/>
+        </p:nvSpPr>
+        <p:spPr>
+          <a:xfrm>
+            <a:off x="594360" y="1051560"/>
+            <a:ext cx="2011680" cy="50800"/>
+          </a:xfrm>
+          <a:prstGeom prst="rect">
+            <a:avLst/>
+          </a:prstGeom>
+          <a:solidFill>
+            <a:srgbClr val="2A78D6"/>
+          </a:solidFill>
+          <a:ln>
+            <a:noFill/>
+          </a:ln>
+        </p:spPr>
+        <p:style>
+          <a:lnRef idx="1">
+            <a:schemeClr val="accent1"/>
+          </a:lnRef>
+          <a:fillRef idx="3">
+            <a:schemeClr val="accent1"/>
+          </a:fillRef>
+          <a:effectRef idx="2">
+            <a:schemeClr val="accent1"/>
+          </a:effectRef>
+          <a:fontRef idx="minor">
+            <a:schemeClr val="lt1"/>
+          </a:fontRef>
+        </p:style>
+        <p:txBody>
+          <a:bodyPr rtlCol="0" anchor="ctr"/>
+          <a:lstStyle/>
+          <a:p>
+            <a:pPr algn="ctr"/>
+          </a:p>
+        </p:txBody>
+      </p:sp>
+      <p:sp>
+        <p:nvSpPr>
+          <p:cNvPr id="4" name="TextBox 3"/>
+          <p:cNvSpPr txBox="1"/>
+          <p:nvPr/>
+        </p:nvSpPr>
+        <p:spPr>
+          <a:xfrm>
+            <a:off x="548640" y="1143000"/>
+            <a:ext cx="11064240" cy="457200"/>
+          </a:xfrm>
+          <a:prstGeom prst="rect">
+            <a:avLst/>
+          </a:prstGeom>
+          <a:noFill/>
+        </p:spPr>
+        <p:txBody>
+          <a:bodyPr wrap="square">
+            <a:spAutoFit/>
+          </a:bodyPr>
+          <a:lstStyle/>
+          <a:p>
+            <a:r>
+              <a:rPr sz="1500">
+                <a:solidFill>
+                  <a:srgbClr val="52514E"/>
+                </a:solidFill>
+              </a:rPr>
+              <a:t>Full infrastructure-as-code, validated; one command to deploy</a:t>
+            </a:r>
+          </a:p>
+        </p:txBody>
+      </p:sp>
+      <p:sp>
+        <p:nvSpPr>
+          <p:cNvPr id="5" name="TextBox 4"/>
+          <p:cNvSpPr txBox="1"/>
+          <p:nvPr/>
+        </p:nvSpPr>
+        <p:spPr>
+          <a:xfrm>
+            <a:off x="640080" y="1737360"/>
+            <a:ext cx="10881360" cy="4754880"/>
+          </a:xfrm>
+          <a:prstGeom prst="rect">
+            <a:avLst/>
+          </a:prstGeom>
+          <a:noFill/>
+        </p:spPr>
+        <p:txBody>
+          <a:bodyPr wrap="square">
+            <a:spAutoFit/>
+          </a:bodyPr>
+          <a:lstStyle/>
+          <a:p>
+            <a:pPr>
+              <a:spcAft>
+                <a:spcPts val="1200"/>
+              </a:spcAft>
+            </a:pPr>
+            <a:r>
+              <a:rPr sz="1800" b="0">
+                <a:solidFill>
+                  <a:srgbClr val="0B0B0B"/>
+                </a:solidFill>
+              </a:rPr>
+              <a:t>• Terraform stack complete: MSK Serverless (Kafka) + Amazon Managed Service for Apache Flink + generator on Fargate + CloudWatch dashboard</a:t>
+            </a:r>
+          </a:p>
+          <a:p>
+            <a:pPr>
+              <a:spcAft>
+                <a:spcPts val="1200"/>
+              </a:spcAft>
+            </a:pPr>
+            <a:r>
+              <a:rPr sz="1800" b="1">
+                <a:solidFill>
+                  <a:srgbClr val="0B0B0B"/>
+                </a:solidFill>
+              </a:rPr>
+              <a:t>• The exact same application jar runs on AWS — every environment difference is configuration</a:t>
+            </a:r>
+          </a:p>
+          <a:p>
+            <a:pPr>
+              <a:spcAft>
+                <a:spcPts val="1200"/>
+              </a:spcAft>
+            </a:pPr>
+            <a:r>
+              <a:rPr sz="1800" b="0">
+                <a:solidFill>
+                  <a:srgbClr val="0B0B0B"/>
+                </a:solidFill>
+              </a:rPr>
+              <a:t>• Security by default: private VPC, IAM auth to Kafka, least-privilege roles</a:t>
+            </a:r>
+          </a:p>
+          <a:p>
+            <a:pPr>
+              <a:spcAft>
+                <a:spcPts val="1200"/>
+              </a:spcAft>
+            </a:pPr>
+            <a:r>
+              <a:rPr sz="1800" b="0">
+                <a:solidFill>
+                  <a:srgbClr val="0B0B0B"/>
+                </a:solidFill>
+              </a:rPr>
+              <a:t>• Operations runbook: deploy, in-place code update, config-only rescale, teardown</a:t>
+            </a:r>
+          </a:p>
+          <a:p>
+            <a:pPr>
+              <a:spcAft>
+                <a:spcPts val="1200"/>
+              </a:spcAft>
+            </a:pPr>
+            <a:r>
+              <a:rPr sz="1800" b="0">
+                <a:solidFill>
+                  <a:srgbClr val="0B0B0B"/>
+                </a:solidFill>
+              </a:rPr>
+              <a:t>• Demo cost ≈ $1/hour while running; destroyed when not in use</a:t>
+            </a:r>
+          </a:p>
+          <a:p>
+            <a:pPr>
+              <a:spcAft>
+                <a:spcPts val="1200"/>
+              </a:spcAft>
+            </a:pPr>
+            <a:r>
+              <a:rPr sz="1800" b="1">
+                <a:solidFill>
+                  <a:srgbClr val="008300"/>
+                </a:solidFill>
+              </a:rPr>
+              <a:t>• Status: DEPLOYED and load-tested on AWS — all cases green, scaling ladder measured, then torn down cleanly</a:t>
+            </a:r>
+          </a:p>
+        </p:txBody>
+      </p:sp>
+    </p:spTree>
+  </p:cSld>
+  <p:clrMapOvr>
+    <a:masterClrMapping/>
+  </p:clrMapOvr>
+</p:sld>
+</file>
+
+<file path=ppt/slides/slide12.xml><?xml version="1.0" encoding="utf-8"?>
+<p:sld xmlns:a="http://schemas.openxmlformats.org/drawingml/2006/main" xmlns:p="http://schemas.openxmlformats.org/presentationml/2006/main" xmlns:r="http://schemas.openxmlformats.org/officeDocument/2006/relationships">
+  <p:cSld>
+    <p:spTree>
+      <p:nvGrpSpPr>
+        <p:cNvPr id="1" name=""/>
+        <p:cNvGrpSpPr/>
+        <p:nvPr/>
+      </p:nvGrpSpPr>
+      <p:grpSpPr/>
+      <p:sp>
+        <p:nvSpPr>
+          <p:cNvPr id="2" name="TextBox 1"/>
+          <p:cNvSpPr txBox="1"/>
+          <p:nvPr/>
+        </p:nvSpPr>
+        <p:spPr>
+          <a:xfrm>
+            <a:off x="548640" y="320040"/>
+            <a:ext cx="11064240" cy="914400"/>
+          </a:xfrm>
+          <a:prstGeom prst="rect">
+            <a:avLst/>
+          </a:prstGeom>
+          <a:noFill/>
+        </p:spPr>
+        <p:txBody>
+          <a:bodyPr wrap="square">
+            <a:spAutoFit/>
+          </a:bodyPr>
+          <a:lstStyle/>
+          <a:p>
+            <a:r>
+              <a:rPr sz="3000" b="1">
+                <a:solidFill>
+                  <a:srgbClr val="0B0B0B"/>
+                </a:solidFill>
+              </a:rPr>
               <a:t>What it took to build</a:t>
             </a:r>
           </a:p>
@@ -4128,7 +4756,7 @@
 </p:sld>
 </file>
 
-<file path=ppt/slides/slide12.xml><?xml version="1.0" encoding="utf-8"?>
+<file path=ppt/slides/slide13.xml><?xml version="1.0" encoding="utf-8"?>
 <p:sld xmlns:a="http://schemas.openxmlformats.org/drawingml/2006/main" xmlns:p="http://schemas.openxmlformats.org/presentationml/2006/main" xmlns:r="http://schemas.openxmlformats.org/officeDocument/2006/relationships">
   <p:cSld>
     <p:spTree>
@@ -7708,7 +8336,7 @@
                   <a:srgbClr val="52514E"/>
                 </a:solidFill>
               </a:rPr>
-              <a:t>Same requirements, same data, same five correctness checks; deployable configs only</a:t>
+              <a:t>Same requirements, same data, same five correctness checks; every figure output-verified</a:t>
             </a:r>
           </a:p>
         </p:txBody>
@@ -7722,8 +8350,8 @@
           <p:nvPr/>
         </p:nvGraphicFramePr>
         <p:xfrm>
-          <a:off x="640080" y="1645920"/>
-          <a:ext cx="10972800" cy="3291840"/>
+          <a:off x="640080" y="1554480"/>
+          <a:ext cx="10972800" cy="4023360"/>
         </p:xfrm>
         <a:graphic>
           <a:graphicData uri="http://schemas.openxmlformats.org/drawingml/2006/table">
@@ -7743,7 +8371,7 @@
                     <a:lstStyle/>
                     <a:p>
                       <a:r>
-                        <a:rPr sz="1300" b="1">
+                        <a:rPr sz="1200" b="1">
                           <a:solidFill>
                             <a:srgbClr val="FFFFFF"/>
                           </a:solidFill>
@@ -7764,7 +8392,7 @@
                     <a:lstStyle/>
                     <a:p>
                       <a:r>
-                        <a:rPr sz="1300" b="1">
+                        <a:rPr sz="1200" b="1">
                           <a:solidFill>
                             <a:srgbClr val="FFFFFF"/>
                           </a:solidFill>
@@ -7785,7 +8413,7 @@
                     <a:lstStyle/>
                     <a:p>
                       <a:r>
-                        <a:rPr sz="1300" b="1">
+                        <a:rPr sz="1200" b="1">
                           <a:solidFill>
                             <a:srgbClr val="FFFFFF"/>
                           </a:solidFill>
@@ -7808,7 +8436,7 @@
                     <a:lstStyle/>
                     <a:p>
                       <a:r>
-                        <a:rPr sz="1300">
+                        <a:rPr sz="1200">
                           <a:solidFill>
                             <a:srgbClr val="0B0B0B"/>
                           </a:solidFill>
@@ -7829,7 +8457,7 @@
                     <a:lstStyle/>
                     <a:p>
                       <a:r>
-                        <a:rPr sz="1300">
+                        <a:rPr sz="1200">
                           <a:solidFill>
                             <a:srgbClr val="0B0B0B"/>
                           </a:solidFill>
@@ -7850,7 +8478,7 @@
                     <a:lstStyle/>
                     <a:p>
                       <a:r>
-                        <a:rPr sz="1300">
+                        <a:rPr sz="1200">
                           <a:solidFill>
                             <a:srgbClr val="0B0B0B"/>
                           </a:solidFill>
@@ -7873,12 +8501,12 @@
                     <a:lstStyle/>
                     <a:p>
                       <a:r>
-                        <a:rPr sz="1300">
+                        <a:rPr sz="1200">
                           <a:solidFill>
                             <a:srgbClr val="0B0B0B"/>
                           </a:solidFill>
                         </a:rPr>
-                        <a:t>End-to-end latency (live)</a:t>
+                        <a:t>Throughput - DataStream (Java)</a:t>
                       </a:r>
                     </a:p>
                   </a:txBody>
@@ -7894,12 +8522,12 @@
                     <a:lstStyle/>
                     <a:p>
                       <a:r>
-                        <a:rPr sz="1300">
+                        <a:rPr sz="1200">
                           <a:solidFill>
                             <a:srgbClr val="0B0B0B"/>
                           </a:solidFill>
                         </a:rPr>
-                        <a:t>p50 267 ms  /  p99 495 ms</a:t>
+                        <a:t>146,300 rec/sec</a:t>
                       </a:r>
                     </a:p>
                   </a:txBody>
@@ -7915,12 +8543,12 @@
                     <a:lstStyle/>
                     <a:p>
                       <a:r>
-                        <a:rPr sz="1300">
+                        <a:rPr sz="1200">
                           <a:solidFill>
                             <a:srgbClr val="0B0B0B"/>
                           </a:solidFill>
                         </a:rPr>
-                        <a:t>p50 1.8 s  /  p99 2.1 s (SQL tuned for latency)</a:t>
+                        <a:t>not offered - SQL only</a:t>
                       </a:r>
                     </a:p>
                   </a:txBody>
@@ -7938,12 +8566,12 @@
                     <a:lstStyle/>
                     <a:p>
                       <a:r>
-                        <a:rPr sz="1300">
+                        <a:rPr sz="1200">
                           <a:solidFill>
                             <a:srgbClr val="0B0B0B"/>
                           </a:solidFill>
                         </a:rPr>
-                        <a:t>Full pipeline throughput</a:t>
+                        <a:t>Throughput - the same SQL</a:t>
                       </a:r>
                     </a:p>
                   </a:txBody>
@@ -7959,12 +8587,12 @@
                     <a:lstStyle/>
                     <a:p>
                       <a:r>
-                        <a:rPr sz="1300">
+                        <a:rPr sz="1200">
                           <a:solidFill>
                             <a:srgbClr val="0B0B0B"/>
                           </a:solidFill>
                         </a:rPr>
-                        <a:t>435,000 msgs/sec</a:t>
+                        <a:t>76,956 rec/sec</a:t>
                       </a:r>
                     </a:p>
                   </a:txBody>
@@ -7980,12 +8608,12 @@
                     <a:lstStyle/>
                     <a:p>
                       <a:r>
-                        <a:rPr sz="1300">
+                        <a:rPr sz="1200">
                           <a:solidFill>
                             <a:srgbClr val="0B0B0B"/>
                           </a:solidFill>
                         </a:rPr>
-                        <a:t>127,000 msgs/sec</a:t>
+                        <a:t>39,400 - 90,600 rec/sec</a:t>
                       </a:r>
                     </a:p>
                   </a:txBody>
@@ -8003,12 +8631,12 @@
                     <a:lstStyle/>
                     <a:p>
                       <a:r>
-                        <a:rPr sz="1300">
+                        <a:rPr sz="1200">
                           <a:solidFill>
                             <a:srgbClr val="0B0B0B"/>
                           </a:solidFill>
                         </a:rPr>
-                        <a:t>Sustained 28 min</a:t>
+                        <a:t>Run-to-run variance</a:t>
                       </a:r>
                     </a:p>
                   </a:txBody>
@@ -8024,12 +8652,12 @@
                     <a:lstStyle/>
                     <a:p>
                       <a:r>
-                        <a:rPr sz="1300">
+                        <a:rPr sz="1200">
                           <a:solidFill>
                             <a:srgbClr val="0B0B0B"/>
                           </a:solidFill>
                         </a:rPr>
-                        <a:t>232,705/sec, deviation 30/sec</a:t>
+                        <a:t>~25% - gaps below that are noise</a:t>
                       </a:r>
                     </a:p>
                   </a:txBody>
@@ -8045,12 +8673,12 @@
                     <a:lstStyle/>
                     <a:p>
                       <a:r>
-                        <a:rPr sz="1300">
+                        <a:rPr sz="1200">
                           <a:solidFill>
                             <a:srgbClr val="0B0B0B"/>
                           </a:solidFill>
                         </a:rPr>
-                        <a:t>360,900/sec, deviation 63,900/sec</a:t>
+                        <a:t>~25%</a:t>
                       </a:r>
                     </a:p>
                   </a:txBody>
@@ -8068,12 +8696,12 @@
                     <a:lstStyle/>
                     <a:p>
                       <a:r>
-                        <a:rPr sz="1300">
+                        <a:rPr sz="1200">
                           <a:solidFill>
                             <a:srgbClr val="0B0B0B"/>
                           </a:solidFill>
                         </a:rPr>
-                        <a:t>Cost at equal work</a:t>
+                        <a:t>Scaling</a:t>
                       </a:r>
                     </a:p>
                   </a:txBody>
@@ -8089,12 +8717,12 @@
                     <a:lstStyle/>
                     <a:p>
                       <a:r>
-                        <a:rPr sz="1300">
+                        <a:rPr sz="1200">
                           <a:solidFill>
                             <a:srgbClr val="0B0B0B"/>
                           </a:solidFill>
                         </a:rPr>
-                        <a:t>~ $2.39/hr all-in</a:t>
+                        <a:t>bounded by the workload: 10 tickers cap parallelism at 10</a:t>
                       </a:r>
                     </a:p>
                   </a:txBody>
@@ -8110,12 +8738,12 @@
                     <a:lstStyle/>
                     <a:p>
                       <a:r>
-                        <a:rPr sz="1300">
+                        <a:rPr sz="1200">
                           <a:solidFill>
                             <a:srgbClr val="0B0B0B"/>
                           </a:solidFill>
                         </a:rPr>
-                        <a:t>~ $3.36/hr + usage</a:t>
+                        <a:t>pool allowed 20 CFU drew a measured max of 10</a:t>
                       </a:r>
                     </a:p>
                   </a:txBody>
@@ -8133,7 +8761,137 @@
                     <a:lstStyle/>
                     <a:p>
                       <a:r>
-                        <a:rPr sz="1300">
+                        <a:rPr sz="1200">
+                          <a:solidFill>
+                            <a:srgbClr val="0B0B0B"/>
+                          </a:solidFill>
+                        </a:rPr>
+                        <a:t>Cost (known)</a:t>
+                      </a:r>
+                    </a:p>
+                  </a:txBody>
+                  <a:tcPr marT="45720" marB="45720">
+                    <a:solidFill>
+                      <a:srgbClr val="F0EFEC"/>
+                    </a:solidFill>
+                  </a:tcPr>
+                </a:tc>
+                <a:tc>
+                  <a:txBody>
+                    <a:bodyPr wrap="square"/>
+                    <a:lstStyle/>
+                    <a:p>
+                      <a:r>
+                        <a:rPr sz="1200">
+                          <a:solidFill>
+                            <a:srgbClr val="0B0B0B"/>
+                          </a:solidFill>
+                        </a:rPr>
+                        <a:t>$1.84/hr - 64% of it Kafka, not Flink</a:t>
+                      </a:r>
+                    </a:p>
+                  </a:txBody>
+                  <a:tcPr marT="45720" marB="45720">
+                    <a:solidFill>
+                      <a:srgbClr val="F0EFEC"/>
+                    </a:solidFill>
+                  </a:tcPr>
+                </a:tc>
+                <a:tc>
+                  <a:txBody>
+                    <a:bodyPr wrap="square"/>
+                    <a:lstStyle/>
+                    <a:p>
+                      <a:r>
+                        <a:rPr sz="1200">
+                          <a:solidFill>
+                            <a:srgbClr val="0B0B0B"/>
+                          </a:solidFill>
+                        </a:rPr>
+                        <a:t>compute measured; cluster charge not captured</a:t>
+                      </a:r>
+                    </a:p>
+                  </a:txBody>
+                  <a:tcPr marT="45720" marB="45720">
+                    <a:solidFill>
+                      <a:srgbClr val="F0EFEC"/>
+                    </a:solidFill>
+                  </a:tcPr>
+                </a:tc>
+              </a:tr>
+              <a:tr h="365760">
+                <a:tc>
+                  <a:txBody>
+                    <a:bodyPr wrap="square"/>
+                    <a:lstStyle/>
+                    <a:p>
+                      <a:r>
+                        <a:rPr sz="1200">
+                          <a:solidFill>
+                            <a:srgbClr val="0B0B0B"/>
+                          </a:solidFill>
+                        </a:rPr>
+                        <a:t>Partitions</a:t>
+                      </a:r>
+                    </a:p>
+                  </a:txBody>
+                  <a:tcPr marT="45720" marB="45720">
+                    <a:solidFill>
+                      <a:srgbClr val="FFFFFF"/>
+                    </a:solidFill>
+                  </a:tcPr>
+                </a:tc>
+                <a:tc>
+                  <a:txBody>
+                    <a:bodyPr wrap="square"/>
+                    <a:lstStyle/>
+                    <a:p>
+                      <a:r>
+                        <a:rPr sz="1200">
+                          <a:solidFill>
+                            <a:srgbClr val="0B0B0B"/>
+                          </a:solidFill>
+                        </a:rPr>
+                        <a:t>billed: $0.0015/partition-hr</a:t>
+                      </a:r>
+                    </a:p>
+                  </a:txBody>
+                  <a:tcPr marT="45720" marB="45720">
+                    <a:solidFill>
+                      <a:srgbClr val="FFFFFF"/>
+                    </a:solidFill>
+                  </a:tcPr>
+                </a:tc>
+                <a:tc>
+                  <a:txBody>
+                    <a:bodyPr wrap="square"/>
+                    <a:lstStyle/>
+                    <a:p>
+                      <a:r>
+                        <a:rPr sz="1200">
+                          <a:solidFill>
+                            <a:srgbClr val="0B0B0B"/>
+                          </a:solidFill>
+                        </a:rPr>
+                        <a:t>free</a:t>
+                      </a:r>
+                    </a:p>
+                  </a:txBody>
+                  <a:tcPr marT="45720" marB="45720">
+                    <a:solidFill>
+                      <a:srgbClr val="FFFFFF"/>
+                    </a:solidFill>
+                  </a:tcPr>
+                </a:tc>
+              </a:tr>
+              <a:tr h="365760">
+                <a:tc>
+                  <a:txBody>
+                    <a:bodyPr wrap="square"/>
+                    <a:lstStyle/>
+                    <a:p>
+                      <a:r>
+                        <a:rPr sz="1200">
                           <a:solidFill>
                             <a:srgbClr val="0B0B0B"/>
                           </a:solidFill>
@@ -8154,7 +8912,7 @@
                     <a:lstStyle/>
                     <a:p>
                       <a:r>
-                        <a:rPr sz="1300">
+                        <a:rPr sz="1200">
                           <a:solidFill>
                             <a:srgbClr val="0B0B0B"/>
                           </a:solidFill>
@@ -8175,7 +8933,7 @@
                     <a:lstStyle/>
                     <a:p>
                       <a:r>
-                        <a:rPr sz="1300">
+                        <a:rPr sz="1200">
                           <a:solidFill>
                             <a:srgbClr val="0B0B0B"/>
                           </a:solidFill>
@@ -8198,12 +8956,12 @@
                     <a:lstStyle/>
                     <a:p>
                       <a:r>
-                        <a:rPr sz="1300">
+                        <a:rPr sz="1200">
                           <a:solidFill>
                             <a:srgbClr val="0B0B0B"/>
                           </a:solidFill>
                         </a:rPr>
-                        <a:t>What you operate</a:t>
+                        <a:t>Rate-limit an output</a:t>
                       </a:r>
                     </a:p>
                   </a:txBody>
@@ -8219,12 +8977,12 @@
                     <a:lstStyle/>
                     <a:p>
                       <a:r>
-                        <a:rPr sz="1300">
+                        <a:rPr sz="1200">
                           <a:solidFill>
                             <a:srgbClr val="0B0B0B"/>
                           </a:solidFill>
                         </a:rPr>
-                        <a:t>a jar, an image, a VPC</a:t>
+                        <a:t>one connector option</a:t>
                       </a:r>
                     </a:p>
                   </a:txBody>
@@ -8240,12 +8998,12 @@
                     <a:lstStyle/>
                     <a:p>
                       <a:r>
-                        <a:rPr sz="1300">
+                        <a:rPr sz="1200">
                           <a:solidFill>
                             <a:srgbClr val="0B0B0B"/>
                           </a:solidFill>
                         </a:rPr>
-                        <a:t>statements - nothing to deploy</a:t>
+                        <a:t>NOT EXPRESSIBLE</a:t>
                       </a:r>
                     </a:p>
                   </a:txBody>
@@ -8263,12 +9021,12 @@
                     <a:lstStyle/>
                     <a:p>
                       <a:r>
-                        <a:rPr sz="1300">
+                        <a:rPr sz="1200">
                           <a:solidFill>
                             <a:srgbClr val="0B0B0B"/>
                           </a:solidFill>
                         </a:rPr>
-                        <a:t>Rate-limit an output (CR-1)</a:t>
+                        <a:t>Bad query shapes</a:t>
                       </a:r>
                     </a:p>
                   </a:txBody>
@@ -8284,12 +9042,12 @@
                     <a:lstStyle/>
                     <a:p>
                       <a:r>
-                        <a:rPr sz="1300">
+                        <a:rPr sz="1200">
                           <a:solidFill>
                             <a:srgbClr val="0B0B0B"/>
                           </a:solidFill>
                         </a:rPr>
-                        <a:t>config change - 0.96/key/sec vs 1.0 cap</a:t>
+                        <a:t>silent - found by reading a plan</a:t>
                       </a:r>
                     </a:p>
                   </a:txBody>
@@ -8305,12 +9063,12 @@
                     <a:lstStyle/>
                     <a:p>
                       <a:r>
-                        <a:rPr sz="1300">
+                        <a:rPr sz="1200">
                           <a:solidFill>
                             <a:srgbClr val="0B0B0B"/>
                           </a:solidFill>
                         </a:rPr>
-                        <a:t>NOT EXPRESSIBLE for updating aggregations</a:t>
+                        <a:t>named in the console with a doc link</a:t>
                       </a:r>
                     </a:p>
                   </a:txBody>
@@ -8333,7 +9091,7 @@
         </p:nvSpPr>
         <p:spPr>
           <a:xfrm>
-            <a:off x="640080" y="5394960"/>
+            <a:off x="640080" y="5486400"/>
             <a:ext cx="10881360" cy="4754880"/>
           </a:xfrm>
           <a:prstGeom prst="rect">
@@ -8349,46 +9107,61 @@
           <a:p>
             <a:pPr>
               <a:spcAft>
-                <a:spcPts val="900"/>
+                <a:spcPts val="800"/>
               </a:spcAft>
             </a:pPr>
             <a:r>
-              <a:rPr sz="1500" b="1">
+              <a:rPr sz="1400" b="1">
                 <a:solidFill>
                   <a:srgbClr val="008300"/>
                 </a:solidFill>
               </a:rPr>
-              <a:t>• AWS is faster, cheaper and steadier: one job passes records between operators in memory</a:t>
+              <a:t>• Java is ~2x faster than SQL on identical hardware, load and logic - that gap is real and outside the noise</a:t>
             </a:r>
           </a:p>
           <a:p>
             <a:pPr>
               <a:spcAft>
-                <a:spcPts val="900"/>
+                <a:spcPts val="800"/>
               </a:spcAft>
             </a:pPr>
             <a:r>
-              <a:rPr sz="1500" b="0">
+              <a:rPr sz="1400" b="1">
                 <a:solidFill>
                   <a:srgbClr val="0B0B0B"/>
                 </a:solidFill>
               </a:rPr>
-              <a:t>• Confluent is ~10x less code and nothing to deploy - but the SQL must be ONE fused statement set; writing it as chained statements costs 15x latency (26.7s -&gt; 1.8s when fixed)</a:t>
+              <a:t>• SQL runs at the SAME speed on both clouds: the language is the constraint, not the vendor</a:t>
             </a:r>
           </a:p>
           <a:p>
             <a:pPr>
               <a:spcAft>
-                <a:spcPts val="900"/>
+                <a:spcPts val="800"/>
               </a:spcAft>
             </a:pPr>
             <a:r>
-              <a:rPr sz="1500" b="1">
+              <a:rPr sz="1400" b="0">
+                <a:solidFill>
+                  <a:srgbClr val="0B0B0B"/>
+                </a:solidFill>
+              </a:rPr>
+              <a:t>• Neither platform was the scaling limit - the business problem has ten symbols, and ten things do not spread across twenty workers</a:t>
+            </a:r>
+          </a:p>
+          <a:p>
+            <a:pPr>
+              <a:spcAft>
+                <a:spcPts val="800"/>
+              </a:spcAft>
+            </a:pPr>
+            <a:r>
+              <a:rPr sz="1400" b="1">
                 <a:solidFill>
                   <a:srgbClr val="2A78D6"/>
                 </a:solidFill>
               </a:rPr>
-              <a:t>• The deciding factor was not speed: a plain requirement - do not update the screen faster than a human can read - is one config line on DataStream and has no supported construct in Confluent SQL</a:t>
+              <a:t>• The deciding factor was not speed: do not update a screen faster than a human can read is one option on AWS SQL and has no construct in Confluent SQL</a:t>
             </a:r>
           </a:p>
         </p:txBody>

--- a/docs/flink-demo-exec-briefing.pptx
+++ b/docs/flink-demo-exec-briefing.pptx
@@ -18,6 +18,8 @@
     <p:sldId id="266" r:id="rId17"/>
     <p:sldId id="267" r:id="rId18"/>
     <p:sldId id="268" r:id="rId19"/>
+    <p:sldId id="269" r:id="rId20"/>
+    <p:sldId id="270" r:id="rId21"/>
   </p:sldIdLst>
   <p:sldSz cx="12191695" cy="6858000" type="screen4x3"/>
   <p:notesSz cx="6858000" cy="9144000"/>
@@ -3508,7 +3510,7 @@
                   <a:srgbClr val="52514E"/>
                 </a:solidFill>
               </a:rPr>
-              <a:t>Three published conclusions did not survive re-measurement</a:t>
+              <a:t>Five published conclusions did not survive re-measurement</a:t>
             </a:r>
           </a:p>
         </p:txBody>
@@ -3522,7 +3524,7 @@
           <p:nvPr/>
         </p:nvGraphicFramePr>
         <p:xfrm>
-          <a:off x="640080" y="1645920"/>
+          <a:off x="640080" y="1554480"/>
           <a:ext cx="10972800" cy="2194560"/>
         </p:xfrm>
         <a:graphic>
@@ -3532,8 +3534,8 @@
                 <a:tableStyleId>{5C22544A-7EE6-4342-B048-85BDC9FD1C3A}</a:tableStyleId>
               </a:tblPr>
               <a:tblGrid>
-                <a:gridCol w="3108960"/>
-                <a:gridCol w="4937760"/>
+                <a:gridCol w="3017520"/>
+                <a:gridCol w="5029200"/>
                 <a:gridCol w="2926080"/>
               </a:tblGrid>
               <a:tr h="365760">
@@ -3634,7 +3636,7 @@
                             <a:srgbClr val="0B0B0B"/>
                           </a:solidFill>
                         </a:rPr>
-                        <a:t>I wrote one SQL statement per Java operator, so every stage hopped through Kafka</a:t>
+                        <a:t>One SQL statement per Java operator - every stage hopped through Kafka</a:t>
                       </a:r>
                     </a:p>
                   </a:txBody>
@@ -3699,7 +3701,7 @@
                             <a:srgbClr val="0B0B0B"/>
                           </a:solidFill>
                         </a:rPr>
-                        <a:t>That run consumed 119k rec/sec and wrote NOTHING for an hour - status green throughout</a:t>
+                        <a:t>That run consumed 119k rec/sec and wrote NOTHING for an hour - status green</a:t>
                       </a:r>
                     </a:p>
                   </a:txBody>
@@ -3764,7 +3766,7 @@
                             <a:srgbClr val="0B0B0B"/>
                           </a:solidFill>
                         </a:rPr>
-                        <a:t>6-bucket tables capped the source at 6 readers - my test rig, not the platform</a:t>
+                        <a:t>6-bucket tables capped the source at 6 readers - my rig, not the platform</a:t>
                       </a:r>
                     </a:p>
                   </a:txBody>
@@ -3829,7 +3831,7 @@
                             <a:srgbClr val="0B0B0B"/>
                           </a:solidFill>
                         </a:rPr>
-                        <a:t>Compared runs with different backlog sizes; ramp-up penalises the smaller one</a:t>
+                        <a:t>Compared runs with different backlog sizes; ramp-up favours the larger</a:t>
                       </a:r>
                     </a:p>
                   </a:txBody>
@@ -3873,7 +3875,7 @@
                             <a:srgbClr val="0B0B0B"/>
                           </a:solidFill>
                         </a:rPr>
-                        <a:t>~$1.09/hr on AWS</a:t>
+                        <a:t>Every throughput number</a:t>
                       </a:r>
                     </a:p>
                   </a:txBody>
@@ -3894,7 +3896,7 @@
                             <a:srgbClr val="0B0B0B"/>
                           </a:solidFill>
                         </a:rPr>
-                        <a:t>Omitted the Kafka base charge entirely</a:t>
+                        <a:t>Math.min(requested, 30) capped the test data at 30 symbols, not 3,000</a:t>
                       </a:r>
                     </a:p>
                   </a:txBody>
@@ -3915,7 +3917,7 @@
                             <a:srgbClr val="0B0B0B"/>
                           </a:solidFill>
                         </a:rPr>
-                        <a:t>$1.84/hr</a:t>
+                        <a:t>re-measured at 3,000</a:t>
                       </a:r>
                     </a:p>
                   </a:txBody>
@@ -3938,7 +3940,7 @@
         </p:nvSpPr>
         <p:spPr>
           <a:xfrm>
-            <a:off x="640080" y="5120640"/>
+            <a:off x="640080" y="5212080"/>
             <a:ext cx="10881360" cy="4754880"/>
           </a:xfrm>
           <a:prstGeom prst="rect">
@@ -3963,7 +3965,7 @@
                   <a:srgbClr val="2A78D6"/>
                 </a:solidFill>
               </a:rPr>
-              <a:t>• The root cause of the worst one: I checked on every test that records went IN. I never checked that records came OUT</a:t>
+              <a:t>• Root cause of the worst one: I checked on every test that records went IN. I never checked that records came OUT</a:t>
             </a:r>
           </a:p>
           <a:p>
@@ -3993,7 +3995,7 @@
                   <a:srgbClr val="008300"/>
                 </a:solidFill>
               </a:rPr>
-              <a:t>• The optimisation I argued would slow things down made them 2.66x faster - the test took 20 minutes, the argument would have shipped a version a third as fast</a:t>
+              <a:t>• I published 'it does not scale', corrected it, then corrected the correction - and the ORIGINAL answer was right</a:t>
             </a:r>
           </a:p>
           <a:p>
@@ -4059,7 +4061,7 @@
                   <a:srgbClr val="0B0B0B"/>
                 </a:solidFill>
               </a:rPr>
-              <a:t>Path to production — AWS ready today</a:t>
+              <a:t>Fast only counts if the numbers are correct</a:t>
             </a:r>
           </a:p>
         </p:txBody>
@@ -4135,7 +4137,7 @@
                   <a:srgbClr val="52514E"/>
                 </a:solidFill>
               </a:rPr>
-              <a:t>Full infrastructure-as-code, validated; one command to deploy</a:t>
+              <a:t>Days of throughput figures, and the correctness suite had never once run</a:t>
             </a:r>
           </a:p>
         </p:txBody>
@@ -4164,91 +4166,91 @@
           <a:p>
             <a:pPr>
               <a:spcAft>
-                <a:spcPts val="1200"/>
+                <a:spcPts val="1000"/>
               </a:spcAft>
             </a:pPr>
             <a:r>
-              <a:rPr sz="1800" b="0">
+              <a:rPr sz="1500" b="1">
                 <a:solidFill>
                   <a:srgbClr val="0B0B0B"/>
                 </a:solidFill>
               </a:rPr>
-              <a:t>• Terraform stack complete: MSK Serverless (Kafka) + Amazon Managed Service for Apache Flink + generator on Fargate + CloudWatch dashboard</a:t>
+              <a:t>• Six independent checks recompute every position and market value from the RAW topics with exact decimal arithmetic</a:t>
             </a:r>
           </a:p>
           <a:p>
             <a:pPr>
               <a:spcAft>
-                <a:spcPts val="1200"/>
+                <a:spcPts val="1000"/>
               </a:spcAft>
             </a:pPr>
             <a:r>
-              <a:rPr sz="1800" b="1">
+              <a:rPr sz="1500" b="0">
                 <a:solidFill>
                   <a:srgbClr val="0B0B0B"/>
                 </a:solidFill>
               </a:rPr>
-              <a:t>• The exact same application jar runs on AWS — every environment difference is configuration</a:t>
+              <a:t>• Market values asserted against the FINAL RAW price using OUR OWN recomputed position - so a wrong position cannot cancel a wrong price</a:t>
             </a:r>
           </a:p>
           <a:p>
             <a:pPr>
               <a:spcAft>
-                <a:spcPts val="1200"/>
+                <a:spcPts val="1000"/>
               </a:spcAft>
             </a:pPr>
             <a:r>
-              <a:rPr sz="1800" b="0">
+              <a:rPr sz="1500" b="0">
                 <a:solidFill>
                   <a:srgbClr val="0B0B0B"/>
                 </a:solidFill>
               </a:rPr>
-              <a:t>• Security by default: private VPC, IAM auth to Kafka, least-privilege roles</a:t>
+              <a:t>• To make failures legible: every trade 1 share, every symbol its own fixed price. A position is then a count you can verify by eye</a:t>
             </a:r>
           </a:p>
           <a:p>
             <a:pPr>
               <a:spcAft>
-                <a:spcPts val="1200"/>
+                <a:spcPts val="1000"/>
               </a:spcAft>
             </a:pPr>
             <a:r>
-              <a:rPr sz="1800" b="0">
-                <a:solidFill>
-                  <a:srgbClr val="0B0B0B"/>
-                </a:solidFill>
-              </a:rPr>
-              <a:t>• Operations runbook: deploy, in-place code update, config-only rescale, teardown</a:t>
+              <a:rPr sz="1500" b="1">
+                <a:solidFill>
+                  <a:srgbClr val="2A78D6"/>
+                </a:solidFill>
+              </a:rPr>
+              <a:t>• It FAILED - 615 market values wrong. They were each priced at a slightly older tick of the RIGHT symbol</a:t>
             </a:r>
           </a:p>
           <a:p>
             <a:pPr>
               <a:spcAft>
-                <a:spcPts val="1200"/>
+                <a:spcPts val="1000"/>
               </a:spcAft>
             </a:pPr>
             <a:r>
-              <a:rPr sz="1800" b="0">
-                <a:solidFill>
-                  <a:srgbClr val="0B0B0B"/>
-                </a:solidFill>
-              </a:rPr>
-              <a:t>• Demo cost ≈ $1/hour while running; destroyed when not in use</a:t>
+              <a:rPr sz="1500" b="1">
+                <a:solidFill>
+                  <a:srgbClr val="008300"/>
+                </a:solidFill>
+              </a:rPr>
+              <a:t>• Rather than wave it away as known semantics, the checker proves it: the implied price must fall inside the range that symbol actually traded at. All 615 did</a:t>
             </a:r>
           </a:p>
           <a:p>
             <a:pPr>
               <a:spcAft>
-                <a:spcPts val="1200"/>
+                <a:spcPts val="1000"/>
               </a:spcAft>
             </a:pPr>
             <a:r>
-              <a:rPr sz="1800" b="1">
+              <a:rPr sz="1500" b="1">
                 <a:solidFill>
                   <a:srgbClr val="008300"/>
                 </a:solidFill>
               </a:rPr>
-              <a:t>• Status: DEPLOYED and load-tested on AWS — all cases green, scaling ladder measured, then torn down cleanly</a:t>
+              <a:t>• Result: zero wrong answers, plus a 6% staleness characteristic now described honestly instead of hidden behind a green tick</a:t>
             </a:r>
           </a:p>
         </p:txBody>
@@ -4262,6 +4264,914 @@
 </file>
 
 <file path=ppt/slides/slide12.xml><?xml version="1.0" encoding="utf-8"?>
+<p:sld xmlns:a="http://schemas.openxmlformats.org/drawingml/2006/main" xmlns:p="http://schemas.openxmlformats.org/presentationml/2006/main" xmlns:r="http://schemas.openxmlformats.org/officeDocument/2006/relationships">
+  <p:cSld>
+    <p:spTree>
+      <p:nvGrpSpPr>
+        <p:cNvPr id="1" name=""/>
+        <p:cNvGrpSpPr/>
+        <p:nvPr/>
+      </p:nvGrpSpPr>
+      <p:grpSpPr/>
+      <p:sp>
+        <p:nvSpPr>
+          <p:cNvPr id="2" name="TextBox 1"/>
+          <p:cNvSpPr txBox="1"/>
+          <p:nvPr/>
+        </p:nvSpPr>
+        <p:spPr>
+          <a:xfrm>
+            <a:off x="548640" y="320040"/>
+            <a:ext cx="11064240" cy="914400"/>
+          </a:xfrm>
+          <a:prstGeom prst="rect">
+            <a:avLst/>
+          </a:prstGeom>
+          <a:noFill/>
+        </p:spPr>
+        <p:txBody>
+          <a:bodyPr wrap="square">
+            <a:spAutoFit/>
+          </a:bodyPr>
+          <a:lstStyle/>
+          <a:p>
+            <a:r>
+              <a:rPr sz="3000" b="1">
+                <a:solidFill>
+                  <a:srgbClr val="0B0B0B"/>
+                </a:solidFill>
+              </a:rPr>
+              <a:t>What happens on IPO day</a:t>
+            </a:r>
+          </a:p>
+        </p:txBody>
+      </p:sp>
+      <p:sp>
+        <p:nvSpPr>
+          <p:cNvPr id="3" name="Rectangle 2"/>
+          <p:cNvSpPr/>
+          <p:nvPr/>
+        </p:nvSpPr>
+        <p:spPr>
+          <a:xfrm>
+            <a:off x="594360" y="1051560"/>
+            <a:ext cx="2011680" cy="50800"/>
+          </a:xfrm>
+          <a:prstGeom prst="rect">
+            <a:avLst/>
+          </a:prstGeom>
+          <a:solidFill>
+            <a:srgbClr val="2A78D6"/>
+          </a:solidFill>
+          <a:ln>
+            <a:noFill/>
+          </a:ln>
+        </p:spPr>
+        <p:style>
+          <a:lnRef idx="1">
+            <a:schemeClr val="accent1"/>
+          </a:lnRef>
+          <a:fillRef idx="3">
+            <a:schemeClr val="accent1"/>
+          </a:fillRef>
+          <a:effectRef idx="2">
+            <a:schemeClr val="accent1"/>
+          </a:effectRef>
+          <a:fontRef idx="minor">
+            <a:schemeClr val="lt1"/>
+          </a:fontRef>
+        </p:style>
+        <p:txBody>
+          <a:bodyPr rtlCol="0" anchor="ctr"/>
+          <a:lstStyle/>
+          <a:p>
+            <a:pPr algn="ctr"/>
+          </a:p>
+        </p:txBody>
+      </p:sp>
+      <p:sp>
+        <p:nvSpPr>
+          <p:cNvPr id="4" name="TextBox 3"/>
+          <p:cNvSpPr txBox="1"/>
+          <p:nvPr/>
+        </p:nvSpPr>
+        <p:spPr>
+          <a:xfrm>
+            <a:off x="548640" y="1143000"/>
+            <a:ext cx="11064240" cy="457200"/>
+          </a:xfrm>
+          <a:prstGeom prst="rect">
+            <a:avLst/>
+          </a:prstGeom>
+          <a:noFill/>
+        </p:spPr>
+        <p:txBody>
+          <a:bodyPr wrap="square">
+            <a:spAutoFit/>
+          </a:bodyPr>
+          <a:lstStyle/>
+          <a:p>
+            <a:r>
+              <a:rPr sz="1500">
+                <a:solidFill>
+                  <a:srgbClr val="52514E"/>
+                </a:solidFill>
+              </a:rPr>
+              <a:t>One symbol takes 90% of the tape - measured at the producer</a:t>
+            </a:r>
+          </a:p>
+        </p:txBody>
+      </p:sp>
+      <p:graphicFrame>
+        <p:nvGraphicFramePr>
+          <p:cNvPr id="5" name="Table 4"/>
+          <p:cNvGraphicFramePr>
+            <a:graphicFrameLocks noGrp="1"/>
+          </p:cNvGraphicFramePr>
+          <p:nvPr/>
+        </p:nvGraphicFramePr>
+        <p:xfrm>
+          <a:off x="640080" y="1737360"/>
+          <a:ext cx="10972800" cy="1828800"/>
+        </p:xfrm>
+        <a:graphic>
+          <a:graphicData uri="http://schemas.openxmlformats.org/drawingml/2006/table">
+            <a:tbl>
+              <a:tblPr firstRow="1" bandRow="1">
+                <a:tableStyleId>{5C22544A-7EE6-4342-B048-85BDC9FD1C3A}</a:tableStyleId>
+              </a:tblPr>
+              <a:tblGrid>
+                <a:gridCol w="2743200"/>
+                <a:gridCol w="2377440"/>
+                <a:gridCol w="3108960"/>
+                <a:gridCol w="2743200"/>
+              </a:tblGrid>
+              <a:tr h="365760">
+                <a:tc>
+                  <a:txBody>
+                    <a:bodyPr wrap="square"/>
+                    <a:lstStyle/>
+                    <a:p>
+                      <a:r>
+                        <a:rPr sz="1400" b="1">
+                          <a:solidFill>
+                            <a:srgbClr val="FFFFFF"/>
+                          </a:solidFill>
+                        </a:rPr>
+                        <a:t>Feed</a:t>
+                      </a:r>
+                    </a:p>
+                  </a:txBody>
+                  <a:tcPr marT="45720" marB="45720">
+                    <a:solidFill>
+                      <a:srgbClr val="2A78D6"/>
+                    </a:solidFill>
+                  </a:tcPr>
+                </a:tc>
+                <a:tc>
+                  <a:txBody>
+                    <a:bodyPr wrap="square"/>
+                    <a:lstStyle/>
+                    <a:p>
+                      <a:r>
+                        <a:rPr sz="1400" b="1">
+                          <a:solidFill>
+                            <a:srgbClr val="FFFFFF"/>
+                          </a:solidFill>
+                        </a:rPr>
+                        <a:t>Record key</a:t>
+                      </a:r>
+                    </a:p>
+                  </a:txBody>
+                  <a:tcPr marT="45720" marB="45720">
+                    <a:solidFill>
+                      <a:srgbClr val="2A78D6"/>
+                    </a:solidFill>
+                  </a:tcPr>
+                </a:tc>
+                <a:tc>
+                  <a:txBody>
+                    <a:bodyPr wrap="square"/>
+                    <a:lstStyle/>
+                    <a:p>
+                      <a:r>
+                        <a:rPr sz="1400" b="1">
+                          <a:solidFill>
+                            <a:srgbClr val="FFFFFF"/>
+                          </a:solidFill>
+                        </a:rPr>
+                        <a:t>Ingest</a:t>
+                      </a:r>
+                    </a:p>
+                  </a:txBody>
+                  <a:tcPr marT="45720" marB="45720">
+                    <a:solidFill>
+                      <a:srgbClr val="2A78D6"/>
+                    </a:solidFill>
+                  </a:tcPr>
+                </a:tc>
+                <a:tc>
+                  <a:txBody>
+                    <a:bodyPr wrap="square"/>
+                    <a:lstStyle/>
+                    <a:p>
+                      <a:r>
+                        <a:rPr sz="1400" b="1">
+                          <a:solidFill>
+                            <a:srgbClr val="FFFFFF"/>
+                          </a:solidFill>
+                        </a:rPr>
+                        <a:t>Per-symbol ordering</a:t>
+                      </a:r>
+                    </a:p>
+                  </a:txBody>
+                  <a:tcPr marT="45720" marB="45720">
+                    <a:solidFill>
+                      <a:srgbClr val="2A78D6"/>
+                    </a:solidFill>
+                  </a:tcPr>
+                </a:tc>
+              </a:tr>
+              <a:tr h="365760">
+                <a:tc>
+                  <a:txBody>
+                    <a:bodyPr wrap="square"/>
+                    <a:lstStyle/>
+                    <a:p>
+                      <a:r>
+                        <a:rPr sz="1400">
+                          <a:solidFill>
+                            <a:srgbClr val="0B0B0B"/>
+                          </a:solidFill>
+                        </a:rPr>
+                        <a:t>Uniform</a:t>
+                      </a:r>
+                    </a:p>
+                  </a:txBody>
+                  <a:tcPr marT="45720" marB="45720">
+                    <a:solidFill>
+                      <a:srgbClr val="FFFFFF"/>
+                    </a:solidFill>
+                  </a:tcPr>
+                </a:tc>
+                <a:tc>
+                  <a:txBody>
+                    <a:bodyPr wrap="square"/>
+                    <a:lstStyle/>
+                    <a:p>
+                      <a:r>
+                        <a:rPr sz="1400">
+                          <a:solidFill>
+                            <a:srgbClr val="0B0B0B"/>
+                          </a:solidFill>
+                        </a:rPr>
+                        <a:t>symbol</a:t>
+                      </a:r>
+                    </a:p>
+                  </a:txBody>
+                  <a:tcPr marT="45720" marB="45720">
+                    <a:solidFill>
+                      <a:srgbClr val="FFFFFF"/>
+                    </a:solidFill>
+                  </a:tcPr>
+                </a:tc>
+                <a:tc>
+                  <a:txBody>
+                    <a:bodyPr wrap="square"/>
+                    <a:lstStyle/>
+                    <a:p>
+                      <a:r>
+                        <a:rPr sz="1400">
+                          <a:solidFill>
+                            <a:srgbClr val="0B0B0B"/>
+                          </a:solidFill>
+                        </a:rPr>
+                        <a:t>873,333/sec</a:t>
+                      </a:r>
+                    </a:p>
+                  </a:txBody>
+                  <a:tcPr marT="45720" marB="45720">
+                    <a:solidFill>
+                      <a:srgbClr val="FFFFFF"/>
+                    </a:solidFill>
+                  </a:tcPr>
+                </a:tc>
+                <a:tc>
+                  <a:txBody>
+                    <a:bodyPr wrap="square"/>
+                    <a:lstStyle/>
+                    <a:p>
+                      <a:r>
+                        <a:rPr sz="1400">
+                          <a:solidFill>
+                            <a:srgbClr val="0B0B0B"/>
+                          </a:solidFill>
+                        </a:rPr>
+                        <a:t>kept</a:t>
+                      </a:r>
+                    </a:p>
+                  </a:txBody>
+                  <a:tcPr marT="45720" marB="45720">
+                    <a:solidFill>
+                      <a:srgbClr val="FFFFFF"/>
+                    </a:solidFill>
+                  </a:tcPr>
+                </a:tc>
+              </a:tr>
+              <a:tr h="365760">
+                <a:tc>
+                  <a:txBody>
+                    <a:bodyPr wrap="square"/>
+                    <a:lstStyle/>
+                    <a:p>
+                      <a:r>
+                        <a:rPr sz="1400">
+                          <a:solidFill>
+                            <a:srgbClr val="0B0B0B"/>
+                          </a:solidFill>
+                        </a:rPr>
+                        <a:t>90% one ticker</a:t>
+                      </a:r>
+                    </a:p>
+                  </a:txBody>
+                  <a:tcPr marT="45720" marB="45720">
+                    <a:solidFill>
+                      <a:srgbClr val="F0EFEC"/>
+                    </a:solidFill>
+                  </a:tcPr>
+                </a:tc>
+                <a:tc>
+                  <a:txBody>
+                    <a:bodyPr wrap="square"/>
+                    <a:lstStyle/>
+                    <a:p>
+                      <a:r>
+                        <a:rPr sz="1400">
+                          <a:solidFill>
+                            <a:srgbClr val="0B0B0B"/>
+                          </a:solidFill>
+                        </a:rPr>
+                        <a:t>symbol</a:t>
+                      </a:r>
+                    </a:p>
+                  </a:txBody>
+                  <a:tcPr marT="45720" marB="45720">
+                    <a:solidFill>
+                      <a:srgbClr val="F0EFEC"/>
+                    </a:solidFill>
+                  </a:tcPr>
+                </a:tc>
+                <a:tc>
+                  <a:txBody>
+                    <a:bodyPr wrap="square"/>
+                    <a:lstStyle/>
+                    <a:p>
+                      <a:r>
+                        <a:rPr sz="1400">
+                          <a:solidFill>
+                            <a:srgbClr val="0B0B0B"/>
+                          </a:solidFill>
+                        </a:rPr>
+                        <a:t>293,333/sec  (-66%)</a:t>
+                      </a:r>
+                    </a:p>
+                  </a:txBody>
+                  <a:tcPr marT="45720" marB="45720">
+                    <a:solidFill>
+                      <a:srgbClr val="F0EFEC"/>
+                    </a:solidFill>
+                  </a:tcPr>
+                </a:tc>
+                <a:tc>
+                  <a:txBody>
+                    <a:bodyPr wrap="square"/>
+                    <a:lstStyle/>
+                    <a:p>
+                      <a:r>
+                        <a:rPr sz="1400">
+                          <a:solidFill>
+                            <a:srgbClr val="0B0B0B"/>
+                          </a:solidFill>
+                        </a:rPr>
+                        <a:t>kept</a:t>
+                      </a:r>
+                    </a:p>
+                  </a:txBody>
+                  <a:tcPr marT="45720" marB="45720">
+                    <a:solidFill>
+                      <a:srgbClr val="F0EFEC"/>
+                    </a:solidFill>
+                  </a:tcPr>
+                </a:tc>
+              </a:tr>
+              <a:tr h="365760">
+                <a:tc>
+                  <a:txBody>
+                    <a:bodyPr wrap="square"/>
+                    <a:lstStyle/>
+                    <a:p>
+                      <a:r>
+                        <a:rPr sz="1400">
+                          <a:solidFill>
+                            <a:srgbClr val="0B0B0B"/>
+                          </a:solidFill>
+                        </a:rPr>
+                        <a:t>90% one ticker</a:t>
+                      </a:r>
+                    </a:p>
+                  </a:txBody>
+                  <a:tcPr marT="45720" marB="45720">
+                    <a:solidFill>
+                      <a:srgbClr val="FFFFFF"/>
+                    </a:solidFill>
+                  </a:tcPr>
+                </a:tc>
+                <a:tc>
+                  <a:txBody>
+                    <a:bodyPr wrap="square"/>
+                    <a:lstStyle/>
+                    <a:p>
+                      <a:r>
+                        <a:rPr sz="1400">
+                          <a:solidFill>
+                            <a:srgbClr val="0B0B0B"/>
+                          </a:solidFill>
+                        </a:rPr>
+                        <a:t>salted</a:t>
+                      </a:r>
+                    </a:p>
+                  </a:txBody>
+                  <a:tcPr marT="45720" marB="45720">
+                    <a:solidFill>
+                      <a:srgbClr val="FFFFFF"/>
+                    </a:solidFill>
+                  </a:tcPr>
+                </a:tc>
+                <a:tc>
+                  <a:txBody>
+                    <a:bodyPr wrap="square"/>
+                    <a:lstStyle/>
+                    <a:p>
+                      <a:r>
+                        <a:rPr sz="1400">
+                          <a:solidFill>
+                            <a:srgbClr val="0B0B0B"/>
+                          </a:solidFill>
+                        </a:rPr>
+                        <a:t>764,444/sec  (-12%)</a:t>
+                      </a:r>
+                    </a:p>
+                  </a:txBody>
+                  <a:tcPr marT="45720" marB="45720">
+                    <a:solidFill>
+                      <a:srgbClr val="FFFFFF"/>
+                    </a:solidFill>
+                  </a:tcPr>
+                </a:tc>
+                <a:tc>
+                  <a:txBody>
+                    <a:bodyPr wrap="square"/>
+                    <a:lstStyle/>
+                    <a:p>
+                      <a:r>
+                        <a:rPr sz="1400">
+                          <a:solidFill>
+                            <a:srgbClr val="0B0B0B"/>
+                          </a:solidFill>
+                        </a:rPr>
+                        <a:t>LOST</a:t>
+                      </a:r>
+                    </a:p>
+                  </a:txBody>
+                  <a:tcPr marT="45720" marB="45720">
+                    <a:solidFill>
+                      <a:srgbClr val="FFFFFF"/>
+                    </a:solidFill>
+                  </a:tcPr>
+                </a:tc>
+              </a:tr>
+              <a:tr h="365760">
+                <a:tc>
+                  <a:txBody>
+                    <a:bodyPr wrap="square"/>
+                    <a:lstStyle/>
+                    <a:p>
+                      <a:r>
+                        <a:rPr sz="1400">
+                          <a:solidFill>
+                            <a:srgbClr val="0B0B0B"/>
+                          </a:solidFill>
+                        </a:rPr>
+                        <a:t>90% one ticker</a:t>
+                      </a:r>
+                    </a:p>
+                  </a:txBody>
+                  <a:tcPr marT="45720" marB="45720">
+                    <a:solidFill>
+                      <a:srgbClr val="F0EFEC"/>
+                    </a:solidFill>
+                  </a:tcPr>
+                </a:tc>
+                <a:tc>
+                  <a:txBody>
+                    <a:bodyPr wrap="square"/>
+                    <a:lstStyle/>
+                    <a:p>
+                      <a:r>
+                        <a:rPr sz="1400">
+                          <a:solidFill>
+                            <a:srgbClr val="0B0B0B"/>
+                          </a:solidFill>
+                        </a:rPr>
+                        <a:t>adaptive</a:t>
+                      </a:r>
+                    </a:p>
+                  </a:txBody>
+                  <a:tcPr marT="45720" marB="45720">
+                    <a:solidFill>
+                      <a:srgbClr val="F0EFEC"/>
+                    </a:solidFill>
+                  </a:tcPr>
+                </a:tc>
+                <a:tc>
+                  <a:txBody>
+                    <a:bodyPr wrap="square"/>
+                    <a:lstStyle/>
+                    <a:p>
+                      <a:r>
+                        <a:rPr sz="1400">
+                          <a:solidFill>
+                            <a:srgbClr val="0B0B0B"/>
+                          </a:solidFill>
+                        </a:rPr>
+                        <a:t>788,888/sec  (-10%)</a:t>
+                      </a:r>
+                    </a:p>
+                  </a:txBody>
+                  <a:tcPr marT="45720" marB="45720">
+                    <a:solidFill>
+                      <a:srgbClr val="F0EFEC"/>
+                    </a:solidFill>
+                  </a:tcPr>
+                </a:tc>
+                <a:tc>
+                  <a:txBody>
+                    <a:bodyPr wrap="square"/>
+                    <a:lstStyle/>
+                    <a:p>
+                      <a:r>
+                        <a:rPr sz="1400">
+                          <a:solidFill>
+                            <a:srgbClr val="0B0B0B"/>
+                          </a:solidFill>
+                        </a:rPr>
+                        <a:t>kept for quiet names</a:t>
+                      </a:r>
+                    </a:p>
+                  </a:txBody>
+                  <a:tcPr marT="45720" marB="45720">
+                    <a:solidFill>
+                      <a:srgbClr val="F0EFEC"/>
+                    </a:solidFill>
+                  </a:tcPr>
+                </a:tc>
+              </a:tr>
+            </a:tbl>
+          </a:graphicData>
+        </a:graphic>
+      </p:graphicFrame>
+      <p:sp>
+        <p:nvSpPr>
+          <p:cNvPr id="6" name="TextBox 5"/>
+          <p:cNvSpPr txBox="1"/>
+          <p:nvPr/>
+        </p:nvSpPr>
+        <p:spPr>
+          <a:xfrm>
+            <a:off x="640080" y="4937760"/>
+            <a:ext cx="10881360" cy="4754880"/>
+          </a:xfrm>
+          <a:prstGeom prst="rect">
+            <a:avLst/>
+          </a:prstGeom>
+          <a:noFill/>
+        </p:spPr>
+        <p:txBody>
+          <a:bodyPr wrap="square">
+            <a:spAutoFit/>
+          </a:bodyPr>
+          <a:lstStyle/>
+          <a:p>
+            <a:pPr>
+              <a:spcAft>
+                <a:spcPts val="900"/>
+              </a:spcAft>
+            </a:pPr>
+            <a:r>
+              <a:rPr sz="1400" b="1">
+                <a:solidFill>
+                  <a:srgbClr val="2A78D6"/>
+                </a:solidFill>
+              </a:rPr>
+              <a:t>• A hot listing costs two thirds of ingest BEFORE the stream processor sees a record: every producer queues behind the one broker owning that symbol's partition</a:t>
+            </a:r>
+          </a:p>
+          <a:p>
+            <a:pPr>
+              <a:spcAft>
+                <a:spcPts val="900"/>
+              </a:spcAft>
+            </a:pPr>
+            <a:r>
+              <a:rPr sz="1400" b="0">
+                <a:solidFill>
+                  <a:srgbClr val="0B0B0B"/>
+                </a:solidFill>
+              </a:rPr>
+              <a:t>• Adding producers makes it worse - they contend for the same leader. No downstream tuning can touch this</a:t>
+            </a:r>
+          </a:p>
+          <a:p>
+            <a:pPr>
+              <a:spcAft>
+                <a:spcPts val="900"/>
+              </a:spcAft>
+            </a:pPr>
+            <a:r>
+              <a:rPr sz="1400" b="1">
+                <a:solidFill>
+                  <a:srgbClr val="008300"/>
+                </a:solidFill>
+              </a:rPr>
+              <a:t>• Fix: spread at the KEY, which is upstream of every ceiling. Salt only the hot names so quiet symbols keep ordering and compaction</a:t>
+            </a:r>
+          </a:p>
+          <a:p>
+            <a:pPr>
+              <a:spcAft>
+                <a:spcPts val="900"/>
+              </a:spcAft>
+            </a:pPr>
+            <a:r>
+              <a:rPr sz="1400" b="1">
+                <a:solidFill>
+                  <a:srgbClr val="0B0B0B"/>
+                </a:solidFill>
+              </a:rPr>
+              <a:t>• Keying fixes INGEST only. Surviving an IPO needs both: spread at the key AND conflate before the narrow stage</a:t>
+            </a:r>
+          </a:p>
+        </p:txBody>
+      </p:sp>
+    </p:spTree>
+  </p:cSld>
+  <p:clrMapOvr>
+    <a:masterClrMapping/>
+  </p:clrMapOvr>
+</p:sld>
+</file>
+
+<file path=ppt/slides/slide13.xml><?xml version="1.0" encoding="utf-8"?>
+<p:sld xmlns:a="http://schemas.openxmlformats.org/drawingml/2006/main" xmlns:p="http://schemas.openxmlformats.org/presentationml/2006/main" xmlns:r="http://schemas.openxmlformats.org/officeDocument/2006/relationships">
+  <p:cSld>
+    <p:spTree>
+      <p:nvGrpSpPr>
+        <p:cNvPr id="1" name=""/>
+        <p:cNvGrpSpPr/>
+        <p:nvPr/>
+      </p:nvGrpSpPr>
+      <p:grpSpPr/>
+      <p:sp>
+        <p:nvSpPr>
+          <p:cNvPr id="2" name="TextBox 1"/>
+          <p:cNvSpPr txBox="1"/>
+          <p:nvPr/>
+        </p:nvSpPr>
+        <p:spPr>
+          <a:xfrm>
+            <a:off x="548640" y="320040"/>
+            <a:ext cx="11064240" cy="914400"/>
+          </a:xfrm>
+          <a:prstGeom prst="rect">
+            <a:avLst/>
+          </a:prstGeom>
+          <a:noFill/>
+        </p:spPr>
+        <p:txBody>
+          <a:bodyPr wrap="square">
+            <a:spAutoFit/>
+          </a:bodyPr>
+          <a:lstStyle/>
+          <a:p>
+            <a:r>
+              <a:rPr sz="3000" b="1">
+                <a:solidFill>
+                  <a:srgbClr val="0B0B0B"/>
+                </a:solidFill>
+              </a:rPr>
+              <a:t>Path to production — AWS ready today</a:t>
+            </a:r>
+          </a:p>
+        </p:txBody>
+      </p:sp>
+      <p:sp>
+        <p:nvSpPr>
+          <p:cNvPr id="3" name="Rectangle 2"/>
+          <p:cNvSpPr/>
+          <p:nvPr/>
+        </p:nvSpPr>
+        <p:spPr>
+          <a:xfrm>
+            <a:off x="594360" y="1051560"/>
+            <a:ext cx="2011680" cy="50800"/>
+          </a:xfrm>
+          <a:prstGeom prst="rect">
+            <a:avLst/>
+          </a:prstGeom>
+          <a:solidFill>
+            <a:srgbClr val="2A78D6"/>
+          </a:solidFill>
+          <a:ln>
+            <a:noFill/>
+          </a:ln>
+        </p:spPr>
+        <p:style>
+          <a:lnRef idx="1">
+            <a:schemeClr val="accent1"/>
+          </a:lnRef>
+          <a:fillRef idx="3">
+            <a:schemeClr val="accent1"/>
+          </a:fillRef>
+          <a:effectRef idx="2">
+            <a:schemeClr val="accent1"/>
+          </a:effectRef>
+          <a:fontRef idx="minor">
+            <a:schemeClr val="lt1"/>
+          </a:fontRef>
+        </p:style>
+        <p:txBody>
+          <a:bodyPr rtlCol="0" anchor="ctr"/>
+          <a:lstStyle/>
+          <a:p>
+            <a:pPr algn="ctr"/>
+          </a:p>
+        </p:txBody>
+      </p:sp>
+      <p:sp>
+        <p:nvSpPr>
+          <p:cNvPr id="4" name="TextBox 3"/>
+          <p:cNvSpPr txBox="1"/>
+          <p:nvPr/>
+        </p:nvSpPr>
+        <p:spPr>
+          <a:xfrm>
+            <a:off x="548640" y="1143000"/>
+            <a:ext cx="11064240" cy="457200"/>
+          </a:xfrm>
+          <a:prstGeom prst="rect">
+            <a:avLst/>
+          </a:prstGeom>
+          <a:noFill/>
+        </p:spPr>
+        <p:txBody>
+          <a:bodyPr wrap="square">
+            <a:spAutoFit/>
+          </a:bodyPr>
+          <a:lstStyle/>
+          <a:p>
+            <a:r>
+              <a:rPr sz="1500">
+                <a:solidFill>
+                  <a:srgbClr val="52514E"/>
+                </a:solidFill>
+              </a:rPr>
+              <a:t>Full infrastructure-as-code, validated; one command to deploy</a:t>
+            </a:r>
+          </a:p>
+        </p:txBody>
+      </p:sp>
+      <p:sp>
+        <p:nvSpPr>
+          <p:cNvPr id="5" name="TextBox 4"/>
+          <p:cNvSpPr txBox="1"/>
+          <p:nvPr/>
+        </p:nvSpPr>
+        <p:spPr>
+          <a:xfrm>
+            <a:off x="640080" y="1737360"/>
+            <a:ext cx="10881360" cy="4754880"/>
+          </a:xfrm>
+          <a:prstGeom prst="rect">
+            <a:avLst/>
+          </a:prstGeom>
+          <a:noFill/>
+        </p:spPr>
+        <p:txBody>
+          <a:bodyPr wrap="square">
+            <a:spAutoFit/>
+          </a:bodyPr>
+          <a:lstStyle/>
+          <a:p>
+            <a:pPr>
+              <a:spcAft>
+                <a:spcPts val="1200"/>
+              </a:spcAft>
+            </a:pPr>
+            <a:r>
+              <a:rPr sz="1800" b="0">
+                <a:solidFill>
+                  <a:srgbClr val="0B0B0B"/>
+                </a:solidFill>
+              </a:rPr>
+              <a:t>• Terraform stack complete: MSK Serverless (Kafka) + Amazon Managed Service for Apache Flink + generator on Fargate + CloudWatch dashboard</a:t>
+            </a:r>
+          </a:p>
+          <a:p>
+            <a:pPr>
+              <a:spcAft>
+                <a:spcPts val="1200"/>
+              </a:spcAft>
+            </a:pPr>
+            <a:r>
+              <a:rPr sz="1800" b="1">
+                <a:solidFill>
+                  <a:srgbClr val="0B0B0B"/>
+                </a:solidFill>
+              </a:rPr>
+              <a:t>• The exact same application jar runs on AWS — every environment difference is configuration</a:t>
+            </a:r>
+          </a:p>
+          <a:p>
+            <a:pPr>
+              <a:spcAft>
+                <a:spcPts val="1200"/>
+              </a:spcAft>
+            </a:pPr>
+            <a:r>
+              <a:rPr sz="1800" b="0">
+                <a:solidFill>
+                  <a:srgbClr val="0B0B0B"/>
+                </a:solidFill>
+              </a:rPr>
+              <a:t>• Security by default: private VPC, IAM auth to Kafka, least-privilege roles</a:t>
+            </a:r>
+          </a:p>
+          <a:p>
+            <a:pPr>
+              <a:spcAft>
+                <a:spcPts val="1200"/>
+              </a:spcAft>
+            </a:pPr>
+            <a:r>
+              <a:rPr sz="1800" b="0">
+                <a:solidFill>
+                  <a:srgbClr val="0B0B0B"/>
+                </a:solidFill>
+              </a:rPr>
+              <a:t>• Operations runbook: deploy, in-place code update, config-only rescale, teardown</a:t>
+            </a:r>
+          </a:p>
+          <a:p>
+            <a:pPr>
+              <a:spcAft>
+                <a:spcPts val="1200"/>
+              </a:spcAft>
+            </a:pPr>
+            <a:r>
+              <a:rPr sz="1800" b="0">
+                <a:solidFill>
+                  <a:srgbClr val="0B0B0B"/>
+                </a:solidFill>
+              </a:rPr>
+              <a:t>• Demo cost ≈ $1/hour while running; destroyed when not in use</a:t>
+            </a:r>
+          </a:p>
+          <a:p>
+            <a:pPr>
+              <a:spcAft>
+                <a:spcPts val="1200"/>
+              </a:spcAft>
+            </a:pPr>
+            <a:r>
+              <a:rPr sz="1800" b="1">
+                <a:solidFill>
+                  <a:srgbClr val="008300"/>
+                </a:solidFill>
+              </a:rPr>
+              <a:t>• Status: DEPLOYED and load-tested on AWS — all cases green, scaling ladder measured, then torn down cleanly</a:t>
+            </a:r>
+          </a:p>
+        </p:txBody>
+      </p:sp>
+    </p:spTree>
+  </p:cSld>
+  <p:clrMapOvr>
+    <a:masterClrMapping/>
+  </p:clrMapOvr>
+</p:sld>
+</file>
+
+<file path=ppt/slides/slide14.xml><?xml version="1.0" encoding="utf-8"?>
 <p:sld xmlns:a="http://schemas.openxmlformats.org/drawingml/2006/main" xmlns:p="http://schemas.openxmlformats.org/presentationml/2006/main" xmlns:r="http://schemas.openxmlformats.org/officeDocument/2006/relationships">
   <p:cSld>
     <p:spTree>
@@ -4756,7 +5666,7 @@
 </p:sld>
 </file>
 
-<file path=ppt/slides/slide13.xml><?xml version="1.0" encoding="utf-8"?>
+<file path=ppt/slides/slide15.xml><?xml version="1.0" encoding="utf-8"?>
 <p:sld xmlns:a="http://schemas.openxmlformats.org/drawingml/2006/main" xmlns:p="http://schemas.openxmlformats.org/presentationml/2006/main" xmlns:r="http://schemas.openxmlformats.org/officeDocument/2006/relationships">
   <p:cSld>
     <p:spTree>

--- a/docs/flink-demo-exec-briefing.pptx
+++ b/docs/flink-demo-exec-briefing.pptx
@@ -20,6 +20,7 @@
     <p:sldId id="268" r:id="rId19"/>
     <p:sldId id="269" r:id="rId20"/>
     <p:sldId id="270" r:id="rId21"/>
+    <p:sldId id="271" r:id="rId22"/>
   </p:sldIdLst>
   <p:sldSz cx="12191695" cy="6858000" type="screen4x3"/>
   <p:notesSz cx="6858000" cy="9144000"/>
@@ -4969,7 +4970,7 @@
                   <a:srgbClr val="0B0B0B"/>
                 </a:solidFill>
               </a:rPr>
-              <a:t>Path to production — AWS ready today</a:t>
+              <a:t>When it falls behind, can you buy your way out?</a:t>
             </a:r>
           </a:p>
         </p:txBody>
@@ -5045,6 +5046,603 @@
                   <a:srgbClr val="52514E"/>
                 </a:solidFill>
               </a:rPr>
+              <a:t>Same load, same market, one variable: the compute knob doubled</a:t>
+            </a:r>
+          </a:p>
+        </p:txBody>
+      </p:sp>
+      <p:graphicFrame>
+        <p:nvGraphicFramePr>
+          <p:cNvPr id="5" name="Table 4"/>
+          <p:cNvGraphicFramePr>
+            <a:graphicFrameLocks noGrp="1"/>
+          </p:cNvGraphicFramePr>
+          <p:nvPr/>
+        </p:nvGraphicFramePr>
+        <p:xfrm>
+          <a:off x="640080" y="1828800"/>
+          <a:ext cx="11887200" cy="1463040"/>
+        </p:xfrm>
+        <a:graphic>
+          <a:graphicData uri="http://schemas.openxmlformats.org/drawingml/2006/table">
+            <a:tbl>
+              <a:tblPr firstRow="1" bandRow="1">
+                <a:tableStyleId>{5C22544A-7EE6-4342-B048-85BDC9FD1C3A}</a:tableStyleId>
+              </a:tblPr>
+              <a:tblGrid>
+                <a:gridCol w="2743200"/>
+                <a:gridCol w="2743200"/>
+                <a:gridCol w="4114800"/>
+                <a:gridCol w="2286000"/>
+              </a:tblGrid>
+              <a:tr h="365760">
+                <a:tc>
+                  <a:txBody>
+                    <a:bodyPr wrap="square"/>
+                    <a:lstStyle/>
+                    <a:p>
+                      <a:r>
+                        <a:rPr sz="1400" b="1">
+                          <a:solidFill>
+                            <a:srgbClr val="FFFFFF"/>
+                          </a:solidFill>
+                        </a:rPr>
+                        <a:t/>
+                      </a:r>
+                    </a:p>
+                  </a:txBody>
+                  <a:tcPr marT="45720" marB="45720">
+                    <a:solidFill>
+                      <a:srgbClr val="2A78D6"/>
+                    </a:solidFill>
+                  </a:tcPr>
+                </a:tc>
+                <a:tc>
+                  <a:txBody>
+                    <a:bodyPr wrap="square"/>
+                    <a:lstStyle/>
+                    <a:p>
+                      <a:r>
+                        <a:rPr sz="1400" b="1">
+                          <a:solidFill>
+                            <a:srgbClr val="FFFFFF"/>
+                          </a:solidFill>
+                        </a:rPr>
+                        <a:t>Knob doubled</a:t>
+                      </a:r>
+                    </a:p>
+                  </a:txBody>
+                  <a:tcPr marT="45720" marB="45720">
+                    <a:solidFill>
+                      <a:srgbClr val="2A78D6"/>
+                    </a:solidFill>
+                  </a:tcPr>
+                </a:tc>
+                <a:tc>
+                  <a:txBody>
+                    <a:bodyPr wrap="square"/>
+                    <a:lstStyle/>
+                    <a:p>
+                      <a:r>
+                        <a:rPr sz="1400" b="1">
+                          <a:solidFill>
+                            <a:srgbClr val="FFFFFF"/>
+                          </a:solidFill>
+                        </a:rPr>
+                        <a:t>Throughput gained</a:t>
+                      </a:r>
+                    </a:p>
+                  </a:txBody>
+                  <a:tcPr marT="45720" marB="45720">
+                    <a:solidFill>
+                      <a:srgbClr val="2A78D6"/>
+                    </a:solidFill>
+                  </a:tcPr>
+                </a:tc>
+                <a:tc>
+                  <a:txBody>
+                    <a:bodyPr wrap="square"/>
+                    <a:lstStyle/>
+                    <a:p>
+                      <a:r>
+                        <a:rPr sz="1400" b="1">
+                          <a:solidFill>
+                            <a:srgbClr val="FFFFFF"/>
+                          </a:solidFill>
+                        </a:rPr>
+                        <a:t>Cost</a:t>
+                      </a:r>
+                    </a:p>
+                  </a:txBody>
+                  <a:tcPr marT="45720" marB="45720">
+                    <a:solidFill>
+                      <a:srgbClr val="2A78D6"/>
+                    </a:solidFill>
+                  </a:tcPr>
+                </a:tc>
+              </a:tr>
+              <a:tr h="365760">
+                <a:tc>
+                  <a:txBody>
+                    <a:bodyPr wrap="square"/>
+                    <a:lstStyle/>
+                    <a:p>
+                      <a:r>
+                        <a:rPr sz="1400">
+                          <a:solidFill>
+                            <a:srgbClr val="0B0B0B"/>
+                          </a:solidFill>
+                        </a:rPr>
+                        <a:t>DataStream (Java)</a:t>
+                      </a:r>
+                    </a:p>
+                  </a:txBody>
+                  <a:tcPr marT="45720" marB="45720">
+                    <a:solidFill>
+                      <a:srgbClr val="FFFFFF"/>
+                    </a:solidFill>
+                  </a:tcPr>
+                </a:tc>
+                <a:tc>
+                  <a:txBody>
+                    <a:bodyPr wrap="square"/>
+                    <a:lstStyle/>
+                    <a:p>
+                      <a:r>
+                        <a:rPr sz="1400">
+                          <a:solidFill>
+                            <a:srgbClr val="0B0B0B"/>
+                          </a:solidFill>
+                        </a:rPr>
+                        <a:t>parallelism</a:t>
+                      </a:r>
+                    </a:p>
+                  </a:txBody>
+                  <a:tcPr marT="45720" marB="45720">
+                    <a:solidFill>
+                      <a:srgbClr val="FFFFFF"/>
+                    </a:solidFill>
+                  </a:tcPr>
+                </a:tc>
+                <a:tc>
+                  <a:txBody>
+                    <a:bodyPr wrap="square"/>
+                    <a:lstStyle/>
+                    <a:p>
+                      <a:r>
+                        <a:rPr sz="1400">
+                          <a:solidFill>
+                            <a:srgbClr val="0B0B0B"/>
+                          </a:solidFill>
+                        </a:rPr>
+                        <a:t>converts extra hardware into throughput</a:t>
+                      </a:r>
+                    </a:p>
+                  </a:txBody>
+                  <a:tcPr marT="45720" marB="45720">
+                    <a:solidFill>
+                      <a:srgbClr val="FFFFFF"/>
+                    </a:solidFill>
+                  </a:tcPr>
+                </a:tc>
+                <a:tc>
+                  <a:txBody>
+                    <a:bodyPr wrap="square"/>
+                    <a:lstStyle/>
+                    <a:p>
+                      <a:r>
+                        <a:rPr sz="1400">
+                          <a:solidFill>
+                            <a:srgbClr val="0B0B0B"/>
+                          </a:solidFill>
+                        </a:rPr>
+                        <a:t>linear</a:t>
+                      </a:r>
+                    </a:p>
+                  </a:txBody>
+                  <a:tcPr marT="45720" marB="45720">
+                    <a:solidFill>
+                      <a:srgbClr val="FFFFFF"/>
+                    </a:solidFill>
+                  </a:tcPr>
+                </a:tc>
+              </a:tr>
+              <a:tr h="365760">
+                <a:tc>
+                  <a:txBody>
+                    <a:bodyPr wrap="square"/>
+                    <a:lstStyle/>
+                    <a:p>
+                      <a:r>
+                        <a:rPr sz="1400">
+                          <a:solidFill>
+                            <a:srgbClr val="0B0B0B"/>
+                          </a:solidFill>
+                        </a:rPr>
+                        <a:t>SQL on AWS</a:t>
+                      </a:r>
+                    </a:p>
+                  </a:txBody>
+                  <a:tcPr marT="45720" marB="45720">
+                    <a:solidFill>
+                      <a:srgbClr val="F0EFEC"/>
+                    </a:solidFill>
+                  </a:tcPr>
+                </a:tc>
+                <a:tc>
+                  <a:txBody>
+                    <a:bodyPr wrap="square"/>
+                    <a:lstStyle/>
+                    <a:p>
+                      <a:r>
+                        <a:rPr sz="1400">
+                          <a:solidFill>
+                            <a:srgbClr val="0B0B0B"/>
+                          </a:solidFill>
+                        </a:rPr>
+                        <a:t>parallelism 20 -&gt; 40</a:t>
+                      </a:r>
+                    </a:p>
+                  </a:txBody>
+                  <a:tcPr marT="45720" marB="45720">
+                    <a:solidFill>
+                      <a:srgbClr val="F0EFEC"/>
+                    </a:solidFill>
+                  </a:tcPr>
+                </a:tc>
+                <a:tc>
+                  <a:txBody>
+                    <a:bodyPr wrap="square"/>
+                    <a:lstStyle/>
+                    <a:p>
+                      <a:r>
+                        <a:rPr sz="1400">
+                          <a:solidFill>
+                            <a:srgbClr val="0B0B0B"/>
+                          </a:solidFill>
+                        </a:rPr>
+                        <a:t>+17% median - INSIDE the +/-25% noise band</a:t>
+                      </a:r>
+                    </a:p>
+                  </a:txBody>
+                  <a:tcPr marT="45720" marB="45720">
+                    <a:solidFill>
+                      <a:srgbClr val="F0EFEC"/>
+                    </a:solidFill>
+                  </a:tcPr>
+                </a:tc>
+                <a:tc>
+                  <a:txBody>
+                    <a:bodyPr wrap="square"/>
+                    <a:lstStyle/>
+                    <a:p>
+                      <a:r>
+                        <a:rPr sz="1400">
+                          <a:solidFill>
+                            <a:srgbClr val="0B0B0B"/>
+                          </a:solidFill>
+                        </a:rPr>
+                        <a:t>+83%</a:t>
+                      </a:r>
+                    </a:p>
+                  </a:txBody>
+                  <a:tcPr marT="45720" marB="45720">
+                    <a:solidFill>
+                      <a:srgbClr val="F0EFEC"/>
+                    </a:solidFill>
+                  </a:tcPr>
+                </a:tc>
+              </a:tr>
+              <a:tr h="365760">
+                <a:tc>
+                  <a:txBody>
+                    <a:bodyPr wrap="square"/>
+                    <a:lstStyle/>
+                    <a:p>
+                      <a:r>
+                        <a:rPr sz="1400">
+                          <a:solidFill>
+                            <a:srgbClr val="0B0B0B"/>
+                          </a:solidFill>
+                        </a:rPr>
+                        <a:t>SQL on Confluent</a:t>
+                      </a:r>
+                    </a:p>
+                  </a:txBody>
+                  <a:tcPr marT="45720" marB="45720">
+                    <a:solidFill>
+                      <a:srgbClr val="FFFFFF"/>
+                    </a:solidFill>
+                  </a:tcPr>
+                </a:tc>
+                <a:tc>
+                  <a:txBody>
+                    <a:bodyPr wrap="square"/>
+                    <a:lstStyle/>
+                    <a:p>
+                      <a:r>
+                        <a:rPr sz="1400">
+                          <a:solidFill>
+                            <a:srgbClr val="0B0B0B"/>
+                          </a:solidFill>
+                        </a:rPr>
+                        <a:t>pool cap 10 -&gt; 20</a:t>
+                      </a:r>
+                    </a:p>
+                  </a:txBody>
+                  <a:tcPr marT="45720" marB="45720">
+                    <a:solidFill>
+                      <a:srgbClr val="FFFFFF"/>
+                    </a:solidFill>
+                  </a:tcPr>
+                </a:tc>
+                <a:tc>
+                  <a:txBody>
+                    <a:bodyPr wrap="square"/>
+                    <a:lstStyle/>
+                    <a:p>
+                      <a:r>
+                        <a:rPr sz="1400">
+                          <a:solidFill>
+                            <a:srgbClr val="0B0B0B"/>
+                          </a:solidFill>
+                        </a:rPr>
+                        <a:t>0% - platform kept drawing 10 units</a:t>
+                      </a:r>
+                    </a:p>
+                  </a:txBody>
+                  <a:tcPr marT="45720" marB="45720">
+                    <a:solidFill>
+                      <a:srgbClr val="FFFFFF"/>
+                    </a:solidFill>
+                  </a:tcPr>
+                </a:tc>
+                <a:tc>
+                  <a:txBody>
+                    <a:bodyPr wrap="square"/>
+                    <a:lstStyle/>
+                    <a:p>
+                      <a:r>
+                        <a:rPr sz="1400">
+                          <a:solidFill>
+                            <a:srgbClr val="0B0B0B"/>
+                          </a:solidFill>
+                        </a:rPr>
+                        <a:t>n/a</a:t>
+                      </a:r>
+                    </a:p>
+                  </a:txBody>
+                  <a:tcPr marT="45720" marB="45720">
+                    <a:solidFill>
+                      <a:srgbClr val="FFFFFF"/>
+                    </a:solidFill>
+                  </a:tcPr>
+                </a:tc>
+              </a:tr>
+            </a:tbl>
+          </a:graphicData>
+        </a:graphic>
+      </p:graphicFrame>
+      <p:sp>
+        <p:nvSpPr>
+          <p:cNvPr id="6" name="TextBox 5"/>
+          <p:cNvSpPr txBox="1"/>
+          <p:nvPr/>
+        </p:nvSpPr>
+        <p:spPr>
+          <a:xfrm>
+            <a:off x="640080" y="5120640"/>
+            <a:ext cx="10881360" cy="4754880"/>
+          </a:xfrm>
+          <a:prstGeom prst="rect">
+            <a:avLst/>
+          </a:prstGeom>
+          <a:noFill/>
+        </p:spPr>
+        <p:txBody>
+          <a:bodyPr wrap="square">
+            <a:spAutoFit/>
+          </a:bodyPr>
+          <a:lstStyle/>
+          <a:p>
+            <a:pPr>
+              <a:spcAft>
+                <a:spcPts val="900"/>
+              </a:spcAft>
+            </a:pPr>
+            <a:r>
+              <a:rPr sz="1500" b="1">
+                <a:solidFill>
+                  <a:srgbClr val="2A78D6"/>
+                </a:solidFill>
+              </a:rPr>
+              <a:t>• One cloud will not sell you the capacity; the other sells it, bills you, and delivers almost none of it</a:t>
+            </a:r>
+          </a:p>
+          <a:p>
+            <a:pPr>
+              <a:spcAft>
+                <a:spcPts val="900"/>
+              </a:spcAft>
+            </a:pPr>
+            <a:r>
+              <a:rPr sz="1500" b="0">
+                <a:solidFill>
+                  <a:srgbClr val="0B0B0B"/>
+                </a:solidFill>
+              </a:rPr>
+              <a:t>• Threshold was set BEFORE the run: &gt;=1.6x genuine, 1.2-1.6x partial, &lt;1.2x none. Median landed at 1.17x</a:t>
+            </a:r>
+          </a:p>
+          <a:p>
+            <a:pPr>
+              <a:spcAft>
+                <a:spcPts val="900"/>
+              </a:spcAft>
+            </a:pPr>
+            <a:r>
+              <a:rPr sz="1500" b="0">
+                <a:solidFill>
+                  <a:srgbClr val="0B0B0B"/>
+                </a:solidFill>
+              </a:rPr>
+              <a:t>• Extra workers only help if the work can be split - a stock's numbers must be added up in one place, so the new workers idle</a:t>
+            </a:r>
+          </a:p>
+          <a:p>
+            <a:pPr>
+              <a:spcAft>
+                <a:spcPts val="900"/>
+              </a:spcAft>
+            </a:pPr>
+            <a:r>
+              <a:rPr sz="1500" b="1">
+                <a:solidFill>
+                  <a:srgbClr val="008300"/>
+                </a:solidFill>
+              </a:rPr>
+              <a:t>• The Java advantage is not mainly SPEED, it is that Java converts extra hardware into throughput and this SQL does not</a:t>
+            </a:r>
+          </a:p>
+          <a:p>
+            <a:pPr>
+              <a:spcAft>
+                <a:spcPts val="900"/>
+              </a:spcAft>
+            </a:pPr>
+            <a:r>
+              <a:rPr sz="1500" b="1">
+                <a:solidFill>
+                  <a:srgbClr val="008300"/>
+                </a:solidFill>
+              </a:rPr>
+              <a:t>• Speed you can live with. Not being able to grow is a different problem - and invisible if you only test at one size</a:t>
+            </a:r>
+          </a:p>
+        </p:txBody>
+      </p:sp>
+    </p:spTree>
+  </p:cSld>
+  <p:clrMapOvr>
+    <a:masterClrMapping/>
+  </p:clrMapOvr>
+</p:sld>
+</file>
+
+<file path=ppt/slides/slide14.xml><?xml version="1.0" encoding="utf-8"?>
+<p:sld xmlns:a="http://schemas.openxmlformats.org/drawingml/2006/main" xmlns:p="http://schemas.openxmlformats.org/presentationml/2006/main" xmlns:r="http://schemas.openxmlformats.org/officeDocument/2006/relationships">
+  <p:cSld>
+    <p:spTree>
+      <p:nvGrpSpPr>
+        <p:cNvPr id="1" name=""/>
+        <p:cNvGrpSpPr/>
+        <p:nvPr/>
+      </p:nvGrpSpPr>
+      <p:grpSpPr/>
+      <p:sp>
+        <p:nvSpPr>
+          <p:cNvPr id="2" name="TextBox 1"/>
+          <p:cNvSpPr txBox="1"/>
+          <p:nvPr/>
+        </p:nvSpPr>
+        <p:spPr>
+          <a:xfrm>
+            <a:off x="548640" y="320040"/>
+            <a:ext cx="11064240" cy="914400"/>
+          </a:xfrm>
+          <a:prstGeom prst="rect">
+            <a:avLst/>
+          </a:prstGeom>
+          <a:noFill/>
+        </p:spPr>
+        <p:txBody>
+          <a:bodyPr wrap="square">
+            <a:spAutoFit/>
+          </a:bodyPr>
+          <a:lstStyle/>
+          <a:p>
+            <a:r>
+              <a:rPr sz="3000" b="1">
+                <a:solidFill>
+                  <a:srgbClr val="0B0B0B"/>
+                </a:solidFill>
+              </a:rPr>
+              <a:t>Path to production — AWS ready today</a:t>
+            </a:r>
+          </a:p>
+        </p:txBody>
+      </p:sp>
+      <p:sp>
+        <p:nvSpPr>
+          <p:cNvPr id="3" name="Rectangle 2"/>
+          <p:cNvSpPr/>
+          <p:nvPr/>
+        </p:nvSpPr>
+        <p:spPr>
+          <a:xfrm>
+            <a:off x="594360" y="1051560"/>
+            <a:ext cx="2011680" cy="50800"/>
+          </a:xfrm>
+          <a:prstGeom prst="rect">
+            <a:avLst/>
+          </a:prstGeom>
+          <a:solidFill>
+            <a:srgbClr val="2A78D6"/>
+          </a:solidFill>
+          <a:ln>
+            <a:noFill/>
+          </a:ln>
+        </p:spPr>
+        <p:style>
+          <a:lnRef idx="1">
+            <a:schemeClr val="accent1"/>
+          </a:lnRef>
+          <a:fillRef idx="3">
+            <a:schemeClr val="accent1"/>
+          </a:fillRef>
+          <a:effectRef idx="2">
+            <a:schemeClr val="accent1"/>
+          </a:effectRef>
+          <a:fontRef idx="minor">
+            <a:schemeClr val="lt1"/>
+          </a:fontRef>
+        </p:style>
+        <p:txBody>
+          <a:bodyPr rtlCol="0" anchor="ctr"/>
+          <a:lstStyle/>
+          <a:p>
+            <a:pPr algn="ctr"/>
+          </a:p>
+        </p:txBody>
+      </p:sp>
+      <p:sp>
+        <p:nvSpPr>
+          <p:cNvPr id="4" name="TextBox 3"/>
+          <p:cNvSpPr txBox="1"/>
+          <p:nvPr/>
+        </p:nvSpPr>
+        <p:spPr>
+          <a:xfrm>
+            <a:off x="548640" y="1143000"/>
+            <a:ext cx="11064240" cy="457200"/>
+          </a:xfrm>
+          <a:prstGeom prst="rect">
+            <a:avLst/>
+          </a:prstGeom>
+          <a:noFill/>
+        </p:spPr>
+        <p:txBody>
+          <a:bodyPr wrap="square">
+            <a:spAutoFit/>
+          </a:bodyPr>
+          <a:lstStyle/>
+          <a:p>
+            <a:r>
+              <a:rPr sz="1500">
+                <a:solidFill>
+                  <a:srgbClr val="52514E"/>
+                </a:solidFill>
+              </a:rPr>
               <a:t>Full infrastructure-as-code, validated; one command to deploy</a:t>
             </a:r>
           </a:p>
@@ -5171,7 +5769,7 @@
 </p:sld>
 </file>
 
-<file path=ppt/slides/slide14.xml><?xml version="1.0" encoding="utf-8"?>
+<file path=ppt/slides/slide15.xml><?xml version="1.0" encoding="utf-8"?>
 <p:sld xmlns:a="http://schemas.openxmlformats.org/drawingml/2006/main" xmlns:p="http://schemas.openxmlformats.org/presentationml/2006/main" xmlns:r="http://schemas.openxmlformats.org/officeDocument/2006/relationships">
   <p:cSld>
     <p:spTree>
@@ -5666,7 +6264,7 @@
 </p:sld>
 </file>
 
-<file path=ppt/slides/slide15.xml><?xml version="1.0" encoding="utf-8"?>
+<file path=ppt/slides/slide16.xml><?xml version="1.0" encoding="utf-8"?>
 <p:sld xmlns:a="http://schemas.openxmlformats.org/drawingml/2006/main" xmlns:p="http://schemas.openxmlformats.org/presentationml/2006/main" xmlns:r="http://schemas.openxmlformats.org/officeDocument/2006/relationships">
   <p:cSld>
     <p:spTree>

--- a/docs/flink-demo-exec-briefing.pptx
+++ b/docs/flink-demo-exec-briefing.pptx
@@ -4970,7 +4970,7 @@
                   <a:srgbClr val="0B0B0B"/>
                 </a:solidFill>
               </a:rPr>
-              <a:t>When it falls behind, can you buy your way out?</a:t>
+              <a:t>SQL did not scale on either platform</a:t>
             </a:r>
           </a:p>
         </p:txBody>
@@ -5456,7 +5456,7 @@
                   <a:srgbClr val="2A78D6"/>
                 </a:solidFill>
               </a:rPr>
-              <a:t>• One cloud will not sell you the capacity; the other sells it, bills you, and delivers almost none of it</a:t>
+              <a:t>• NEITHER scaled. +17% is inside the noise band - not a weaker form of scaling, a number indistinguishable from zero</a:t>
             </a:r>
           </a:p>
           <a:p>

--- a/docs/flink-demo-exec-briefing.pptx
+++ b/docs/flink-demo-exec-briefing.pptx
@@ -4970,7 +4970,7 @@
                   <a:srgbClr val="0B0B0B"/>
                 </a:solidFill>
               </a:rPr>
-              <a:t>SQL did not scale on either platform</a:t>
+              <a:t>Flink SQL did not scale on either cloud</a:t>
             </a:r>
           </a:p>
         </p:txBody>
@@ -9768,7 +9768,7 @@
                   <a:srgbClr val="0B0B0B"/>
                 </a:solidFill>
               </a:rPr>
-              <a:t>Two clouds, one test suite — the measured scoreboard</a:t>
+              <a:t>DataStream API vs Flink SQL — the measured scoreboard</a:t>
             </a:r>
           </a:p>
         </p:txBody>
@@ -9844,7 +9844,7 @@
                   <a:srgbClr val="52514E"/>
                 </a:solidFill>
               </a:rPr>
-              <a:t>Same requirements, same data, same five correctness checks; every figure output-verified</a:t>
+              <a:t>The axis is the API, not the vendor: SQL was run on BOTH clouds and behaved the same on each</a:t>
             </a:r>
           </a:p>
         </p:txBody>
@@ -10636,10 +10636,10 @@
             <a:r>
               <a:rPr sz="1400" b="1">
                 <a:solidFill>
-                  <a:srgbClr val="0B0B0B"/>
-                </a:solidFill>
-              </a:rPr>
-              <a:t>• SQL runs at the SAME speed on both clouds: the language is the constraint, not the vendor</a:t>
+                  <a:srgbClr val="008300"/>
+                </a:solidFill>
+              </a:rPr>
+              <a:t>• SQL runs the SAME on both clouds - same speed, same failure to scale. The API is the variable; the vendor is not</a:t>
             </a:r>
           </a:p>
           <a:p>

--- a/docs/flink-demo-exec-briefing.pptx
+++ b/docs/flink-demo-exec-briefing.pptx
@@ -5301,7 +5301,7 @@
                             <a:srgbClr val="0B0B0B"/>
                           </a:solidFill>
                         </a:rPr>
-                        <a:t>+17% median - INSIDE the +/-25% noise band</a:t>
+                        <a:t>6,106 -&gt; 10,363 rec/s = 1.70x</a:t>
                       </a:r>
                     </a:p>
                   </a:txBody>
@@ -5322,7 +5322,7 @@
                             <a:srgbClr val="0B0B0B"/>
                           </a:solidFill>
                         </a:rPr>
-                        <a:t>+83%</a:t>
+                        <a:t>+15% total cost</a:t>
                       </a:r>
                     </a:p>
                   </a:txBody>
@@ -5456,7 +5456,7 @@
                   <a:srgbClr val="2A78D6"/>
                 </a:solidFill>
               </a:rPr>
-              <a:t>• NEITHER scaled. +17% is inside the noise band - not a weaker form of scaling, a number indistinguishable from zero</a:t>
+              <a:t>• DataStream 2.27x vs SQL 1.70x. Both scale; DataStream converts compute better and the gap WIDENS: 2.05x faster at P=20, 2.74x at P=40</a:t>
             </a:r>
           </a:p>
           <a:p>
@@ -5471,7 +5471,7 @@
                   <a:srgbClr val="0B0B0B"/>
                 </a:solidFill>
               </a:rPr>
-              <a:t>• Threshold was set BEFORE the run: &gt;=1.6x genuine, 1.2-1.6x partial, &lt;1.2x none. Median landed at 1.17x</a:t>
+              <a:t>• Earlier 1.17x was a metric artifact - CloudWatch reports PER-SUBTASK, dividing by the variable under test. Retracted; re-measured on fixed backlogs</a:t>
             </a:r>
           </a:p>
           <a:p>
@@ -10654,7 +10654,7 @@
                   <a:srgbClr val="0B0B0B"/>
                 </a:solidFill>
               </a:rPr>
-              <a:t>• Neither platform was the scaling limit - the business problem has ten symbols, and ten things do not spread across twenty workers</a:t>
+              <a:t>• Both APIs scale. DataStream converts compute better - 2.27x vs 1.70x for 2x parallelism - and the gap widens with scale</a:t>
             </a:r>
           </a:p>
           <a:p>
